--- a/Análise de Vulnerabilidades.pptx
+++ b/Análise de Vulnerabilidades.pptx
@@ -214,6 +214,121 @@
     </p:ext>
   </p:extLst>
 </p:presentation>
+</file>
+
+<file path=ppt/revisionInfo.xml><?xml version="1.0" encoding="utf-8"?>
+<p1510:revInfo xmlns:a="http://schemas.openxmlformats.org/drawingml/2006/main" xmlns:r="http://schemas.openxmlformats.org/officeDocument/2006/relationships" xmlns:p1510="http://schemas.microsoft.com/office/powerpoint/2015/10/main">
+  <p1510:revLst>
+    <p1510:client id="{32015F90-8808-4EF3-9066-3D6C50CC8441}" v="5" dt="2025-12-09T09:36:00.530"/>
+  </p1510:revLst>
+</p1510:revInfo>
+</file>
+
+<file path=ppt/changesInfos/changesInfo1.xml><?xml version="1.0" encoding="utf-8"?>
+<pc:chgInfo xmlns:a="http://schemas.openxmlformats.org/drawingml/2006/main" xmlns:r="http://schemas.openxmlformats.org/officeDocument/2006/relationships" xmlns:ac="http://schemas.microsoft.com/office/drawing/2013/main/command" xmlns:pc="http://schemas.microsoft.com/office/powerpoint/2013/main/command">
+  <pc:docChgLst>
+    <pc:chgData name="Simoes, Guilherme Coelho" userId="0f4a8b8c-6b64-466e-963d-dc5f0833145f" providerId="ADAL" clId="{32015F90-8808-4EF3-9066-3D6C50CC8441}"/>
+    <pc:docChg chg="undo custSel modSld">
+      <pc:chgData name="Simoes, Guilherme Coelho" userId="0f4a8b8c-6b64-466e-963d-dc5f0833145f" providerId="ADAL" clId="{32015F90-8808-4EF3-9066-3D6C50CC8441}" dt="2025-12-09T09:37:23.284" v="206" actId="20577"/>
+      <pc:docMkLst>
+        <pc:docMk/>
+      </pc:docMkLst>
+      <pc:sldChg chg="modSp mod">
+        <pc:chgData name="Simoes, Guilherme Coelho" userId="0f4a8b8c-6b64-466e-963d-dc5f0833145f" providerId="ADAL" clId="{32015F90-8808-4EF3-9066-3D6C50CC8441}" dt="2025-12-09T09:30:18.942" v="1" actId="27636"/>
+        <pc:sldMkLst>
+          <pc:docMk/>
+          <pc:sldMk cId="2404961111" sldId="261"/>
+        </pc:sldMkLst>
+        <pc:spChg chg="mod">
+          <ac:chgData name="Simoes, Guilherme Coelho" userId="0f4a8b8c-6b64-466e-963d-dc5f0833145f" providerId="ADAL" clId="{32015F90-8808-4EF3-9066-3D6C50CC8441}" dt="2025-12-09T09:30:18.942" v="1" actId="27636"/>
+          <ac:spMkLst>
+            <pc:docMk/>
+            <pc:sldMk cId="2404961111" sldId="261"/>
+            <ac:spMk id="2" creationId="{10CC0049-03BC-4F1D-D318-F2D3FCEACC66}"/>
+          </ac:spMkLst>
+        </pc:spChg>
+      </pc:sldChg>
+      <pc:sldChg chg="addSp modSp mod">
+        <pc:chgData name="Simoes, Guilherme Coelho" userId="0f4a8b8c-6b64-466e-963d-dc5f0833145f" providerId="ADAL" clId="{32015F90-8808-4EF3-9066-3D6C50CC8441}" dt="2025-12-09T09:32:46.118" v="58" actId="1076"/>
+        <pc:sldMkLst>
+          <pc:docMk/>
+          <pc:sldMk cId="300392993" sldId="296"/>
+        </pc:sldMkLst>
+        <pc:spChg chg="add mod">
+          <ac:chgData name="Simoes, Guilherme Coelho" userId="0f4a8b8c-6b64-466e-963d-dc5f0833145f" providerId="ADAL" clId="{32015F90-8808-4EF3-9066-3D6C50CC8441}" dt="2025-12-09T09:30:38.353" v="11" actId="255"/>
+          <ac:spMkLst>
+            <pc:docMk/>
+            <pc:sldMk cId="300392993" sldId="296"/>
+            <ac:spMk id="2" creationId="{5D6A380F-1BD6-05A6-E322-4AF7B502227C}"/>
+          </ac:spMkLst>
+        </pc:spChg>
+        <pc:spChg chg="add mod">
+          <ac:chgData name="Simoes, Guilherme Coelho" userId="0f4a8b8c-6b64-466e-963d-dc5f0833145f" providerId="ADAL" clId="{32015F90-8808-4EF3-9066-3D6C50CC8441}" dt="2025-12-09T09:32:46.118" v="58" actId="1076"/>
+          <ac:spMkLst>
+            <pc:docMk/>
+            <pc:sldMk cId="300392993" sldId="296"/>
+            <ac:spMk id="7" creationId="{DD566AF5-A41B-739E-0103-BF0FE148AC1D}"/>
+          </ac:spMkLst>
+        </pc:spChg>
+        <pc:picChg chg="add mod">
+          <ac:chgData name="Simoes, Guilherme Coelho" userId="0f4a8b8c-6b64-466e-963d-dc5f0833145f" providerId="ADAL" clId="{32015F90-8808-4EF3-9066-3D6C50CC8441}" dt="2025-12-09T09:31:08.716" v="15" actId="1076"/>
+          <ac:picMkLst>
+            <pc:docMk/>
+            <pc:sldMk cId="300392993" sldId="296"/>
+            <ac:picMk id="6" creationId="{123CBF88-4DB4-4036-68CC-6E59C4B8FB45}"/>
+          </ac:picMkLst>
+        </pc:picChg>
+      </pc:sldChg>
+      <pc:sldChg chg="addSp modSp mod">
+        <pc:chgData name="Simoes, Guilherme Coelho" userId="0f4a8b8c-6b64-466e-963d-dc5f0833145f" providerId="ADAL" clId="{32015F90-8808-4EF3-9066-3D6C50CC8441}" dt="2025-12-09T09:37:23.284" v="206" actId="20577"/>
+        <pc:sldMkLst>
+          <pc:docMk/>
+          <pc:sldMk cId="21030779" sldId="297"/>
+        </pc:sldMkLst>
+        <pc:spChg chg="add mod">
+          <ac:chgData name="Simoes, Guilherme Coelho" userId="0f4a8b8c-6b64-466e-963d-dc5f0833145f" providerId="ADAL" clId="{32015F90-8808-4EF3-9066-3D6C50CC8441}" dt="2025-12-09T09:37:23.284" v="206" actId="20577"/>
+          <ac:spMkLst>
+            <pc:docMk/>
+            <pc:sldMk cId="21030779" sldId="297"/>
+            <ac:spMk id="2" creationId="{084C005F-160F-B85A-477B-640A49DB8E6D}"/>
+          </ac:spMkLst>
+        </pc:spChg>
+        <pc:spChg chg="add mod">
+          <ac:chgData name="Simoes, Guilherme Coelho" userId="0f4a8b8c-6b64-466e-963d-dc5f0833145f" providerId="ADAL" clId="{32015F90-8808-4EF3-9066-3D6C50CC8441}" dt="2025-12-09T09:37:05.072" v="172" actId="1076"/>
+          <ac:spMkLst>
+            <pc:docMk/>
+            <pc:sldMk cId="21030779" sldId="297"/>
+            <ac:spMk id="4" creationId="{1D6FCA90-AA7F-2943-0724-72018F464FA5}"/>
+          </ac:spMkLst>
+        </pc:spChg>
+        <pc:spChg chg="add mod">
+          <ac:chgData name="Simoes, Guilherme Coelho" userId="0f4a8b8c-6b64-466e-963d-dc5f0833145f" providerId="ADAL" clId="{32015F90-8808-4EF3-9066-3D6C50CC8441}" dt="2025-12-09T09:37:13.331" v="195" actId="20577"/>
+          <ac:spMkLst>
+            <pc:docMk/>
+            <pc:sldMk cId="21030779" sldId="297"/>
+            <ac:spMk id="6" creationId="{0BFA7230-2E37-B497-BAAE-7CD9C7FCD662}"/>
+          </ac:spMkLst>
+        </pc:spChg>
+        <pc:picChg chg="mod">
+          <ac:chgData name="Simoes, Guilherme Coelho" userId="0f4a8b8c-6b64-466e-963d-dc5f0833145f" providerId="ADAL" clId="{32015F90-8808-4EF3-9066-3D6C50CC8441}" dt="2025-12-09T09:34:37.246" v="60" actId="1076"/>
+          <ac:picMkLst>
+            <pc:docMk/>
+            <pc:sldMk cId="21030779" sldId="297"/>
+            <ac:picMk id="7" creationId="{8298F381-DCE8-EFED-C554-44E2FF23CB56}"/>
+          </ac:picMkLst>
+        </pc:picChg>
+        <pc:picChg chg="mod">
+          <ac:chgData name="Simoes, Guilherme Coelho" userId="0f4a8b8c-6b64-466e-963d-dc5f0833145f" providerId="ADAL" clId="{32015F90-8808-4EF3-9066-3D6C50CC8441}" dt="2025-12-09T09:34:32.644" v="59" actId="1076"/>
+          <ac:picMkLst>
+            <pc:docMk/>
+            <pc:sldMk cId="21030779" sldId="297"/>
+            <ac:picMk id="11" creationId="{B956D00D-F765-B3A8-115F-8D440136E307}"/>
+          </ac:picMkLst>
+        </pc:picChg>
+      </pc:sldChg>
+    </pc:docChg>
+  </pc:docChgLst>
+</pc:chgInfo>
 </file>
 
 <file path=ppt/diagrams/colors1.xml><?xml version="1.0" encoding="utf-8"?>
@@ -2943,7 +3058,7 @@
           <a:p>
             <a:fld id="{8FD89619-223D-40FD-8774-2BB540DE267E}" type="datetimeFigureOut">
               <a:rPr lang="pt-PT" smtClean="0"/>
-              <a:t>08/12/2025</a:t>
+              <a:t>09/12/2025</a:t>
             </a:fld>
             <a:endParaRPr lang="pt-PT"/>
           </a:p>
@@ -3720,7 +3835,7 @@
           <a:p>
             <a:fld id="{E8B53D03-110A-429B-AF89-CB87E6CBA551}" type="datetimeFigureOut">
               <a:rPr lang="pt-PT" smtClean="0"/>
-              <a:t>08/12/2025</a:t>
+              <a:t>09/12/2025</a:t>
             </a:fld>
             <a:endParaRPr lang="pt-PT"/>
           </a:p>
@@ -3920,7 +4035,7 @@
           <a:p>
             <a:fld id="{E8B53D03-110A-429B-AF89-CB87E6CBA551}" type="datetimeFigureOut">
               <a:rPr lang="pt-PT" smtClean="0"/>
-              <a:t>08/12/2025</a:t>
+              <a:t>09/12/2025</a:t>
             </a:fld>
             <a:endParaRPr lang="pt-PT"/>
           </a:p>
@@ -4130,7 +4245,7 @@
           <a:p>
             <a:fld id="{E8B53D03-110A-429B-AF89-CB87E6CBA551}" type="datetimeFigureOut">
               <a:rPr lang="pt-PT" smtClean="0"/>
-              <a:t>08/12/2025</a:t>
+              <a:t>09/12/2025</a:t>
             </a:fld>
             <a:endParaRPr lang="pt-PT"/>
           </a:p>
@@ -4330,7 +4445,7 @@
           <a:p>
             <a:fld id="{E8B53D03-110A-429B-AF89-CB87E6CBA551}" type="datetimeFigureOut">
               <a:rPr lang="pt-PT" smtClean="0"/>
-              <a:t>08/12/2025</a:t>
+              <a:t>09/12/2025</a:t>
             </a:fld>
             <a:endParaRPr lang="pt-PT"/>
           </a:p>
@@ -4606,7 +4721,7 @@
           <a:p>
             <a:fld id="{E8B53D03-110A-429B-AF89-CB87E6CBA551}" type="datetimeFigureOut">
               <a:rPr lang="pt-PT" smtClean="0"/>
-              <a:t>08/12/2025</a:t>
+              <a:t>09/12/2025</a:t>
             </a:fld>
             <a:endParaRPr lang="pt-PT"/>
           </a:p>
@@ -4874,7 +4989,7 @@
           <a:p>
             <a:fld id="{E8B53D03-110A-429B-AF89-CB87E6CBA551}" type="datetimeFigureOut">
               <a:rPr lang="pt-PT" smtClean="0"/>
-              <a:t>08/12/2025</a:t>
+              <a:t>09/12/2025</a:t>
             </a:fld>
             <a:endParaRPr lang="pt-PT"/>
           </a:p>
@@ -5289,7 +5404,7 @@
           <a:p>
             <a:fld id="{E8B53D03-110A-429B-AF89-CB87E6CBA551}" type="datetimeFigureOut">
               <a:rPr lang="pt-PT" smtClean="0"/>
-              <a:t>08/12/2025</a:t>
+              <a:t>09/12/2025</a:t>
             </a:fld>
             <a:endParaRPr lang="pt-PT"/>
           </a:p>
@@ -5431,7 +5546,7 @@
           <a:p>
             <a:fld id="{E8B53D03-110A-429B-AF89-CB87E6CBA551}" type="datetimeFigureOut">
               <a:rPr lang="pt-PT" smtClean="0"/>
-              <a:t>08/12/2025</a:t>
+              <a:t>09/12/2025</a:t>
             </a:fld>
             <a:endParaRPr lang="pt-PT"/>
           </a:p>
@@ -5544,7 +5659,7 @@
           <a:p>
             <a:fld id="{E8B53D03-110A-429B-AF89-CB87E6CBA551}" type="datetimeFigureOut">
               <a:rPr lang="pt-PT" smtClean="0"/>
-              <a:t>08/12/2025</a:t>
+              <a:t>09/12/2025</a:t>
             </a:fld>
             <a:endParaRPr lang="pt-PT"/>
           </a:p>
@@ -5857,7 +5972,7 @@
           <a:p>
             <a:fld id="{E8B53D03-110A-429B-AF89-CB87E6CBA551}" type="datetimeFigureOut">
               <a:rPr lang="pt-PT" smtClean="0"/>
-              <a:t>08/12/2025</a:t>
+              <a:t>09/12/2025</a:t>
             </a:fld>
             <a:endParaRPr lang="pt-PT"/>
           </a:p>
@@ -6146,7 +6261,7 @@
           <a:p>
             <a:fld id="{E8B53D03-110A-429B-AF89-CB87E6CBA551}" type="datetimeFigureOut">
               <a:rPr lang="pt-PT" smtClean="0"/>
-              <a:t>08/12/2025</a:t>
+              <a:t>09/12/2025</a:t>
             </a:fld>
             <a:endParaRPr lang="pt-PT"/>
           </a:p>
@@ -6389,7 +6504,7 @@
           <a:p>
             <a:fld id="{E8B53D03-110A-429B-AF89-CB87E6CBA551}" type="datetimeFigureOut">
               <a:rPr lang="pt-PT" smtClean="0"/>
-              <a:t>08/12/2025</a:t>
+              <a:t>09/12/2025</a:t>
             </a:fld>
             <a:endParaRPr lang="pt-PT"/>
           </a:p>
@@ -17283,15 +17398,6 @@
           <a:effectLst>
             <a:reflection blurRad="12700" stA="28000" endPos="28000" dist="5000" dir="5400000" sy="-100000" algn="bl" rotWithShape="0"/>
           </a:effectLst>
-          <a:extLst>
-            <a:ext uri="{909E8E84-426E-40DD-AFC4-6F175D3DCCD1}">
-              <a14:hiddenFill xmlns:a14="http://schemas.microsoft.com/office/drawing/2010/main">
-                <a:solidFill>
-                  <a:srgbClr val="FFFFFF"/>
-                </a:solidFill>
-              </a14:hiddenFill>
-            </a:ext>
-          </a:extLst>
         </p:spPr>
       </p:pic>
       <p:sp useBgFill="1">
@@ -18338,15 +18444,6 @@
               <a:srgbClr val="C0C0C0"/>
             </a:contourClr>
           </a:sp3d>
-          <a:extLst>
-            <a:ext uri="{909E8E84-426E-40DD-AFC4-6F175D3DCCD1}">
-              <a14:hiddenFill xmlns:a14="http://schemas.microsoft.com/office/drawing/2010/main">
-                <a:solidFill>
-                  <a:srgbClr val="FFFFFF"/>
-                </a:solidFill>
-              </a14:hiddenFill>
-            </a:ext>
-          </a:extLst>
         </p:spPr>
       </p:pic>
       <p:pic>
@@ -18429,13 +18526,13 @@
   <p:clrMapOvr>
     <a:masterClrMapping/>
   </p:clrMapOvr>
-  <mc:AlternateContent xmlns:mc="http://schemas.openxmlformats.org/markup-compatibility/2006">
-    <mc:Choice xmlns:p159="http://schemas.microsoft.com/office/powerpoint/2015/09/main" Requires="p159">
+  <mc:AlternateContent xmlns:mc="http://schemas.openxmlformats.org/markup-compatibility/2006" xmlns:p159="http://schemas.microsoft.com/office/powerpoint/2015/09/main">
+    <mc:Choice Requires="p159">
       <p:transition xmlns:p14="http://schemas.microsoft.com/office/powerpoint/2010/main" spd="slow" p14:dur="2000">
         <p159:morph option="byObject"/>
       </p:transition>
     </mc:Choice>
-    <mc:Fallback>
+    <mc:Fallback xmlns="">
       <p:transition spd="slow">
         <p:fade/>
       </p:transition>
@@ -19100,13 +19197,13 @@
   <p:clrMapOvr>
     <a:overrideClrMapping bg1="lt1" tx1="dk1" bg2="lt2" tx2="dk2" accent1="accent1" accent2="accent2" accent3="accent3" accent4="accent4" accent5="accent5" accent6="accent6" hlink="hlink" folHlink="folHlink"/>
   </p:clrMapOvr>
-  <mc:AlternateContent xmlns:mc="http://schemas.openxmlformats.org/markup-compatibility/2006">
-    <mc:Choice xmlns:p159="http://schemas.microsoft.com/office/powerpoint/2015/09/main" Requires="p159">
+  <mc:AlternateContent xmlns:mc="http://schemas.openxmlformats.org/markup-compatibility/2006" xmlns:p159="http://schemas.microsoft.com/office/powerpoint/2015/09/main">
+    <mc:Choice Requires="p159">
       <p:transition xmlns:p14="http://schemas.microsoft.com/office/powerpoint/2010/main" spd="slow" p14:dur="2000">
         <p159:morph option="byObject"/>
       </p:transition>
     </mc:Choice>
-    <mc:Fallback>
+    <mc:Fallback xmlns="">
       <p:transition spd="slow">
         <p:fade/>
       </p:transition>
@@ -27304,15 +27401,6 @@
               <a:srgbClr val="C0C0C0"/>
             </a:contourClr>
           </a:sp3d>
-          <a:extLst>
-            <a:ext uri="{909E8E84-426E-40DD-AFC4-6F175D3DCCD1}">
-              <a14:hiddenFill xmlns:a14="http://schemas.microsoft.com/office/drawing/2010/main">
-                <a:solidFill>
-                  <a:srgbClr val="FFFFFF"/>
-                </a:solidFill>
-              </a14:hiddenFill>
-            </a:ext>
-          </a:extLst>
         </p:spPr>
       </p:pic>
       <p:pic>
@@ -27395,13 +27483,13 @@
   <p:clrMapOvr>
     <a:masterClrMapping/>
   </p:clrMapOvr>
-  <mc:AlternateContent xmlns:mc="http://schemas.openxmlformats.org/markup-compatibility/2006">
-    <mc:Choice xmlns:p159="http://schemas.microsoft.com/office/powerpoint/2015/09/main" Requires="p159">
+  <mc:AlternateContent xmlns:mc="http://schemas.openxmlformats.org/markup-compatibility/2006" xmlns:p159="http://schemas.microsoft.com/office/powerpoint/2015/09/main">
+    <mc:Choice Requires="p159">
       <p:transition xmlns:p14="http://schemas.microsoft.com/office/powerpoint/2010/main" spd="slow" p14:dur="2000">
         <p159:morph option="byObject"/>
       </p:transition>
     </mc:Choice>
-    <mc:Fallback>
+    <mc:Fallback xmlns="">
       <p:transition spd="slow">
         <p:fade/>
       </p:transition>
@@ -30325,6 +30413,112 @@
           </a:prstGeom>
         </p:spPr>
       </p:pic>
+      <p:sp>
+        <p:nvSpPr>
+          <p:cNvPr id="2" name="TextBox 1">
+            <a:extLst>
+              <a:ext uri="{FF2B5EF4-FFF2-40B4-BE49-F238E27FC236}">
+                <a16:creationId xmlns:a16="http://schemas.microsoft.com/office/drawing/2014/main" id="{5D6A380F-1BD6-05A6-E322-4AF7B502227C}"/>
+              </a:ext>
+            </a:extLst>
+          </p:cNvPr>
+          <p:cNvSpPr txBox="1"/>
+          <p:nvPr/>
+        </p:nvSpPr>
+        <p:spPr>
+          <a:xfrm>
+            <a:off x="6693589" y="4725056"/>
+            <a:ext cx="2596715" cy="307777"/>
+          </a:xfrm>
+          <a:prstGeom prst="rect">
+            <a:avLst/>
+          </a:prstGeom>
+          <a:noFill/>
+        </p:spPr>
+        <p:txBody>
+          <a:bodyPr wrap="square" rtlCol="0">
+            <a:spAutoFit/>
+          </a:bodyPr>
+          <a:lstStyle/>
+          <a:p>
+            <a:r>
+              <a:rPr lang="pt-PT" sz="1400" i="1" dirty="0"/>
+              <a:t>Listener</a:t>
+            </a:r>
+            <a:endParaRPr lang="en-US" sz="1400" i="1" dirty="0"/>
+          </a:p>
+        </p:txBody>
+      </p:sp>
+      <p:pic>
+        <p:nvPicPr>
+          <p:cNvPr id="6" name="Picture 5">
+            <a:extLst>
+              <a:ext uri="{FF2B5EF4-FFF2-40B4-BE49-F238E27FC236}">
+                <a16:creationId xmlns:a16="http://schemas.microsoft.com/office/drawing/2014/main" id="{123CBF88-4DB4-4036-68CC-6E59C4B8FB45}"/>
+              </a:ext>
+            </a:extLst>
+          </p:cNvPr>
+          <p:cNvPicPr>
+            <a:picLocks noChangeAspect="1"/>
+          </p:cNvPicPr>
+          <p:nvPr/>
+        </p:nvPicPr>
+        <p:blipFill>
+          <a:blip r:embed="rId3"/>
+          <a:stretch>
+            <a:fillRect/>
+          </a:stretch>
+        </p:blipFill>
+        <p:spPr>
+          <a:xfrm>
+            <a:off x="1673320" y="5027065"/>
+            <a:ext cx="2982167" cy="1034785"/>
+          </a:xfrm>
+          <a:prstGeom prst="rect">
+            <a:avLst/>
+          </a:prstGeom>
+        </p:spPr>
+      </p:pic>
+      <p:sp>
+        <p:nvSpPr>
+          <p:cNvPr id="7" name="TextBox 6">
+            <a:extLst>
+              <a:ext uri="{FF2B5EF4-FFF2-40B4-BE49-F238E27FC236}">
+                <a16:creationId xmlns:a16="http://schemas.microsoft.com/office/drawing/2014/main" id="{DD566AF5-A41B-739E-0103-BF0FE148AC1D}"/>
+              </a:ext>
+            </a:extLst>
+          </p:cNvPr>
+          <p:cNvSpPr txBox="1"/>
+          <p:nvPr/>
+        </p:nvSpPr>
+        <p:spPr>
+          <a:xfrm>
+            <a:off x="1586330" y="6061850"/>
+            <a:ext cx="1775435" cy="307777"/>
+          </a:xfrm>
+          <a:prstGeom prst="rect">
+            <a:avLst/>
+          </a:prstGeom>
+          <a:noFill/>
+        </p:spPr>
+        <p:txBody>
+          <a:bodyPr wrap="square" rtlCol="0">
+            <a:spAutoFit/>
+          </a:bodyPr>
+          <a:lstStyle/>
+          <a:p>
+            <a:r>
+              <a:rPr lang="pt-PT" sz="1200" i="1" dirty="0"/>
+              <a:t>Parametros</a:t>
+            </a:r>
+            <a:r>
+              <a:rPr lang="pt-PT" sz="1400" i="1" dirty="0"/>
+              <a:t> </a:t>
+            </a:r>
+            <a:endParaRPr lang="en-US" sz="1400" i="1" dirty="0"/>
+          </a:p>
+        </p:txBody>
+      </p:sp>
     </p:spTree>
     <p:extLst>
       <p:ext uri="{BB962C8B-B14F-4D97-AF65-F5344CB8AC3E}">
@@ -30590,7 +30784,7 @@
         </p:blipFill>
         <p:spPr>
           <a:xfrm>
-            <a:off x="4334818" y="2466427"/>
+            <a:off x="4374147" y="2680696"/>
             <a:ext cx="6588821" cy="2334516"/>
           </a:xfrm>
           <a:prstGeom prst="rect">
@@ -30683,7 +30877,7 @@
         </p:blipFill>
         <p:spPr>
           <a:xfrm>
-            <a:off x="4374147" y="5029652"/>
+            <a:off x="4374147" y="5511464"/>
             <a:ext cx="6077543" cy="859293"/>
           </a:xfrm>
           <a:prstGeom prst="rect">
@@ -30691,6 +30885,133 @@
           </a:prstGeom>
         </p:spPr>
       </p:pic>
+      <p:sp>
+        <p:nvSpPr>
+          <p:cNvPr id="2" name="TextBox 1">
+            <a:extLst>
+              <a:ext uri="{FF2B5EF4-FFF2-40B4-BE49-F238E27FC236}">
+                <a16:creationId xmlns:a16="http://schemas.microsoft.com/office/drawing/2014/main" id="{084C005F-160F-B85A-477B-640A49DB8E6D}"/>
+              </a:ext>
+            </a:extLst>
+          </p:cNvPr>
+          <p:cNvSpPr txBox="1"/>
+          <p:nvPr/>
+        </p:nvSpPr>
+        <p:spPr>
+          <a:xfrm>
+            <a:off x="4320940" y="2223342"/>
+            <a:ext cx="1231125" cy="276999"/>
+          </a:xfrm>
+          <a:prstGeom prst="rect">
+            <a:avLst/>
+          </a:prstGeom>
+          <a:noFill/>
+        </p:spPr>
+        <p:txBody>
+          <a:bodyPr wrap="square" rtlCol="0">
+            <a:spAutoFit/>
+          </a:bodyPr>
+          <a:lstStyle/>
+          <a:p>
+            <a:r>
+              <a:rPr lang="pt-PT" sz="1200" i="1">
+                <a:solidFill>
+                  <a:schemeClr val="bg1"/>
+                </a:solidFill>
+              </a:rPr>
+              <a:t>Ataque </a:t>
+            </a:r>
+            <a:endParaRPr lang="en-US" sz="1200" i="1" dirty="0">
+              <a:solidFill>
+                <a:schemeClr val="bg1"/>
+              </a:solidFill>
+            </a:endParaRPr>
+          </a:p>
+        </p:txBody>
+      </p:sp>
+      <p:sp>
+        <p:nvSpPr>
+          <p:cNvPr id="4" name="TextBox 3">
+            <a:extLst>
+              <a:ext uri="{FF2B5EF4-FFF2-40B4-BE49-F238E27FC236}">
+                <a16:creationId xmlns:a16="http://schemas.microsoft.com/office/drawing/2014/main" id="{1D6FCA90-AA7F-2943-0724-72018F464FA5}"/>
+              </a:ext>
+            </a:extLst>
+          </p:cNvPr>
+          <p:cNvSpPr txBox="1"/>
+          <p:nvPr/>
+        </p:nvSpPr>
+        <p:spPr>
+          <a:xfrm>
+            <a:off x="4374147" y="5015212"/>
+            <a:ext cx="2291829" cy="276999"/>
+          </a:xfrm>
+          <a:prstGeom prst="rect">
+            <a:avLst/>
+          </a:prstGeom>
+          <a:noFill/>
+        </p:spPr>
+        <p:txBody>
+          <a:bodyPr wrap="square" rtlCol="0">
+            <a:spAutoFit/>
+          </a:bodyPr>
+          <a:lstStyle/>
+          <a:p>
+            <a:r>
+              <a:rPr lang="pt-PT" sz="1200" i="1" dirty="0">
+                <a:solidFill>
+                  <a:schemeClr val="bg1"/>
+                </a:solidFill>
+              </a:rPr>
+              <a:t>Dentro do pc da vitima</a:t>
+            </a:r>
+          </a:p>
+        </p:txBody>
+      </p:sp>
+      <p:sp>
+        <p:nvSpPr>
+          <p:cNvPr id="6" name="TextBox 5">
+            <a:extLst>
+              <a:ext uri="{FF2B5EF4-FFF2-40B4-BE49-F238E27FC236}">
+                <a16:creationId xmlns:a16="http://schemas.microsoft.com/office/drawing/2014/main" id="{0BFA7230-2E37-B497-BAAE-7CD9C7FCD662}"/>
+              </a:ext>
+            </a:extLst>
+          </p:cNvPr>
+          <p:cNvSpPr txBox="1"/>
+          <p:nvPr/>
+        </p:nvSpPr>
+        <p:spPr>
+          <a:xfrm>
+            <a:off x="4374147" y="6370757"/>
+            <a:ext cx="2355837" cy="276999"/>
+          </a:xfrm>
+          <a:prstGeom prst="rect">
+            <a:avLst/>
+          </a:prstGeom>
+          <a:noFill/>
+        </p:spPr>
+        <p:txBody>
+          <a:bodyPr wrap="square" rtlCol="0">
+            <a:spAutoFit/>
+          </a:bodyPr>
+          <a:lstStyle/>
+          <a:p>
+            <a:r>
+              <a:rPr lang="pt-PT" sz="1200" i="1" dirty="0">
+                <a:solidFill>
+                  <a:schemeClr val="bg1"/>
+                </a:solidFill>
+              </a:rPr>
+              <a:t>O user que foi acessado</a:t>
+            </a:r>
+            <a:endParaRPr lang="en-US" sz="1200" i="1" dirty="0">
+              <a:solidFill>
+                <a:schemeClr val="bg1"/>
+              </a:solidFill>
+            </a:endParaRPr>
+          </a:p>
+        </p:txBody>
+      </p:sp>
     </p:spTree>
     <p:extLst>
       <p:ext uri="{BB962C8B-B14F-4D97-AF65-F5344CB8AC3E}">
@@ -32024,15 +32345,6 @@
           <a:effectLst>
             <a:reflection blurRad="12700" stA="28000" endPos="28000" dist="5000" dir="5400000" sy="-100000" algn="bl" rotWithShape="0"/>
           </a:effectLst>
-          <a:extLst>
-            <a:ext uri="{909E8E84-426E-40DD-AFC4-6F175D3DCCD1}">
-              <a14:hiddenFill xmlns:a14="http://schemas.microsoft.com/office/drawing/2010/main">
-                <a:solidFill>
-                  <a:srgbClr val="FFFFFF"/>
-                </a:solidFill>
-              </a14:hiddenFill>
-            </a:ext>
-          </a:extLst>
         </p:spPr>
       </p:pic>
       <p:sp>
@@ -32155,7 +32467,7 @@
         </p:spPr>
         <p:txBody>
           <a:bodyPr vert="horz" lIns="91440" tIns="45720" rIns="91440" bIns="45720" rtlCol="0" anchor="b">
-            <a:normAutofit/>
+            <a:normAutofit fontScale="90000"/>
           </a:bodyPr>
           <a:lstStyle/>
           <a:p>
@@ -32563,13 +32875,13 @@
   <p:clrMapOvr>
     <a:overrideClrMapping bg1="lt1" tx1="dk1" bg2="lt2" tx2="dk2" accent1="accent1" accent2="accent2" accent3="accent3" accent4="accent4" accent5="accent5" accent6="accent6" hlink="hlink" folHlink="folHlink"/>
   </p:clrMapOvr>
-  <mc:AlternateContent xmlns:mc="http://schemas.openxmlformats.org/markup-compatibility/2006">
-    <mc:Choice xmlns:p159="http://schemas.microsoft.com/office/powerpoint/2015/09/main" Requires="p159">
+  <mc:AlternateContent xmlns:mc="http://schemas.openxmlformats.org/markup-compatibility/2006" xmlns:p159="http://schemas.microsoft.com/office/powerpoint/2015/09/main">
+    <mc:Choice Requires="p159">
       <p:transition xmlns:p14="http://schemas.microsoft.com/office/powerpoint/2010/main" spd="slow" p14:dur="2000">
         <p159:morph option="byObject"/>
       </p:transition>
     </mc:Choice>
-    <mc:Fallback>
+    <mc:Fallback xmlns="">
       <p:transition spd="slow">
         <p:fade/>
       </p:transition>
@@ -33841,13 +34153,13 @@
   <p:clrMapOvr>
     <a:masterClrMapping/>
   </p:clrMapOvr>
-  <mc:AlternateContent xmlns:mc="http://schemas.openxmlformats.org/markup-compatibility/2006">
-    <mc:Choice xmlns:p159="http://schemas.microsoft.com/office/powerpoint/2015/09/main" Requires="p159">
+  <mc:AlternateContent xmlns:mc="http://schemas.openxmlformats.org/markup-compatibility/2006" xmlns:p159="http://schemas.microsoft.com/office/powerpoint/2015/09/main">
+    <mc:Choice Requires="p159">
       <p:transition xmlns:p14="http://schemas.microsoft.com/office/powerpoint/2010/main" spd="slow" p14:dur="2000">
         <p159:morph option="byObject"/>
       </p:transition>
     </mc:Choice>
-    <mc:Fallback>
+    <mc:Fallback xmlns="">
       <p:transition spd="slow">
         <p:fade/>
       </p:transition>
@@ -35595,4 +35907,10 @@
     </a:ext>
   </a:extLst>
 </a:theme>
+</file>
+
+<file path=docMetadata/LabelInfo.xml><?xml version="1.0" encoding="utf-8"?>
+<clbl:labelList xmlns:clbl="http://schemas.microsoft.com/office/2020/mipLabelMetadata">
+  <clbl:label id="{ea60d57e-af5b-4752-ac57-3e4f28ca11dc}" enabled="1" method="Standard" siteId="{36da45f1-dd2c-4d1f-af13-5abe46b99921}" removed="0"/>
+</clbl:labelList>
 </file>
--- a/Análise de Vulnerabilidades.pptx
+++ b/Análise de Vulnerabilidades.pptx
@@ -5,7 +5,7 @@
     <p:sldMasterId id="2147483648" r:id="rId1"/>
   </p:sldMasterIdLst>
   <p:notesMasterIdLst>
-    <p:notesMasterId r:id="rId47"/>
+    <p:notesMasterId r:id="rId48"/>
   </p:notesMasterIdLst>
   <p:sldIdLst>
     <p:sldId id="256" r:id="rId2"/>
@@ -41,18 +41,19 @@
     <p:sldId id="287" r:id="rId32"/>
     <p:sldId id="301" r:id="rId33"/>
     <p:sldId id="288" r:id="rId34"/>
-    <p:sldId id="290" r:id="rId35"/>
-    <p:sldId id="291" r:id="rId36"/>
-    <p:sldId id="292" r:id="rId37"/>
-    <p:sldId id="289" r:id="rId38"/>
-    <p:sldId id="293" r:id="rId39"/>
-    <p:sldId id="294" r:id="rId40"/>
-    <p:sldId id="295" r:id="rId41"/>
-    <p:sldId id="296" r:id="rId42"/>
-    <p:sldId id="297" r:id="rId43"/>
-    <p:sldId id="298" r:id="rId44"/>
-    <p:sldId id="299" r:id="rId45"/>
-    <p:sldId id="300" r:id="rId46"/>
+    <p:sldId id="304" r:id="rId35"/>
+    <p:sldId id="290" r:id="rId36"/>
+    <p:sldId id="291" r:id="rId37"/>
+    <p:sldId id="292" r:id="rId38"/>
+    <p:sldId id="289" r:id="rId39"/>
+    <p:sldId id="293" r:id="rId40"/>
+    <p:sldId id="294" r:id="rId41"/>
+    <p:sldId id="295" r:id="rId42"/>
+    <p:sldId id="296" r:id="rId43"/>
+    <p:sldId id="297" r:id="rId44"/>
+    <p:sldId id="298" r:id="rId45"/>
+    <p:sldId id="299" r:id="rId46"/>
+    <p:sldId id="300" r:id="rId47"/>
   </p:sldIdLst>
   <p:sldSz cx="12192000" cy="6858000"/>
   <p:notesSz cx="6858000" cy="9144000"/>
@@ -193,6 +194,7 @@
             <p14:sldId id="287"/>
             <p14:sldId id="301"/>
             <p14:sldId id="288"/>
+            <p14:sldId id="304"/>
             <p14:sldId id="290"/>
             <p14:sldId id="291"/>
             <p14:sldId id="292"/>
@@ -3217,7 +3219,7 @@
           <a:p>
             <a:fld id="{4EE424FA-A00F-4E5E-8350-0C744EC89605}" type="slidenum">
               <a:rPr lang="pt-PT" smtClean="0"/>
-              <a:t>‹#›</a:t>
+              <a:t>‹nº›</a:t>
             </a:fld>
             <a:endParaRPr lang="pt-PT"/>
           </a:p>
@@ -3667,7 +3669,7 @@
           <a:p>
             <a:fld id="{4EE424FA-A00F-4E5E-8350-0C744EC89605}" type="slidenum">
               <a:rPr lang="pt-PT" smtClean="0"/>
-              <a:t>37</a:t>
+              <a:t>38</a:t>
             </a:fld>
             <a:endParaRPr lang="pt-PT"/>
           </a:p>
@@ -3889,7 +3891,7 @@
           <a:p>
             <a:fld id="{4DCF6903-0146-44E3-9B86-ACA9D88A63D9}" type="slidenum">
               <a:rPr lang="pt-PT" smtClean="0"/>
-              <a:t>‹#›</a:t>
+              <a:t>‹nº›</a:t>
             </a:fld>
             <a:endParaRPr lang="pt-PT"/>
           </a:p>
@@ -4089,7 +4091,7 @@
           <a:p>
             <a:fld id="{4DCF6903-0146-44E3-9B86-ACA9D88A63D9}" type="slidenum">
               <a:rPr lang="pt-PT" smtClean="0"/>
-              <a:t>‹#›</a:t>
+              <a:t>‹nº›</a:t>
             </a:fld>
             <a:endParaRPr lang="pt-PT"/>
           </a:p>
@@ -4299,7 +4301,7 @@
           <a:p>
             <a:fld id="{4DCF6903-0146-44E3-9B86-ACA9D88A63D9}" type="slidenum">
               <a:rPr lang="pt-PT" smtClean="0"/>
-              <a:t>‹#›</a:t>
+              <a:t>‹nº›</a:t>
             </a:fld>
             <a:endParaRPr lang="pt-PT"/>
           </a:p>
@@ -4499,7 +4501,7 @@
           <a:p>
             <a:fld id="{4DCF6903-0146-44E3-9B86-ACA9D88A63D9}" type="slidenum">
               <a:rPr lang="pt-PT" smtClean="0"/>
-              <a:t>‹#›</a:t>
+              <a:t>‹nº›</a:t>
             </a:fld>
             <a:endParaRPr lang="pt-PT"/>
           </a:p>
@@ -4775,7 +4777,7 @@
           <a:p>
             <a:fld id="{4DCF6903-0146-44E3-9B86-ACA9D88A63D9}" type="slidenum">
               <a:rPr lang="pt-PT" smtClean="0"/>
-              <a:t>‹#›</a:t>
+              <a:t>‹nº›</a:t>
             </a:fld>
             <a:endParaRPr lang="pt-PT"/>
           </a:p>
@@ -5043,7 +5045,7 @@
           <a:p>
             <a:fld id="{4DCF6903-0146-44E3-9B86-ACA9D88A63D9}" type="slidenum">
               <a:rPr lang="pt-PT" smtClean="0"/>
-              <a:t>‹#›</a:t>
+              <a:t>‹nº›</a:t>
             </a:fld>
             <a:endParaRPr lang="pt-PT"/>
           </a:p>
@@ -5458,7 +5460,7 @@
           <a:p>
             <a:fld id="{4DCF6903-0146-44E3-9B86-ACA9D88A63D9}" type="slidenum">
               <a:rPr lang="pt-PT" smtClean="0"/>
-              <a:t>‹#›</a:t>
+              <a:t>‹nº›</a:t>
             </a:fld>
             <a:endParaRPr lang="pt-PT"/>
           </a:p>
@@ -5600,7 +5602,7 @@
           <a:p>
             <a:fld id="{4DCF6903-0146-44E3-9B86-ACA9D88A63D9}" type="slidenum">
               <a:rPr lang="pt-PT" smtClean="0"/>
-              <a:t>‹#›</a:t>
+              <a:t>‹nº›</a:t>
             </a:fld>
             <a:endParaRPr lang="pt-PT"/>
           </a:p>
@@ -5713,7 +5715,7 @@
           <a:p>
             <a:fld id="{4DCF6903-0146-44E3-9B86-ACA9D88A63D9}" type="slidenum">
               <a:rPr lang="pt-PT" smtClean="0"/>
-              <a:t>‹#›</a:t>
+              <a:t>‹nº›</a:t>
             </a:fld>
             <a:endParaRPr lang="pt-PT"/>
           </a:p>
@@ -6026,7 +6028,7 @@
           <a:p>
             <a:fld id="{4DCF6903-0146-44E3-9B86-ACA9D88A63D9}" type="slidenum">
               <a:rPr lang="pt-PT" smtClean="0"/>
-              <a:t>‹#›</a:t>
+              <a:t>‹nº›</a:t>
             </a:fld>
             <a:endParaRPr lang="pt-PT"/>
           </a:p>
@@ -6315,7 +6317,7 @@
           <a:p>
             <a:fld id="{4DCF6903-0146-44E3-9B86-ACA9D88A63D9}" type="slidenum">
               <a:rPr lang="pt-PT" smtClean="0"/>
-              <a:t>‹#›</a:t>
+              <a:t>‹nº›</a:t>
             </a:fld>
             <a:endParaRPr lang="pt-PT"/>
           </a:p>
@@ -6594,7 +6596,7 @@
           <a:p>
             <a:fld id="{4DCF6903-0146-44E3-9B86-ACA9D88A63D9}" type="slidenum">
               <a:rPr lang="pt-PT" smtClean="0"/>
-              <a:t>‹#›</a:t>
+              <a:t>‹nº›</a:t>
             </a:fld>
             <a:endParaRPr lang="pt-PT"/>
           </a:p>
@@ -8155,68 +8157,68 @@
           <a:custGeom>
             <a:avLst/>
             <a:gdLst>
-              <a:gd name="connsiteX0" fmla="*/ 0 w 3255095"/>
-              <a:gd name="connsiteY0" fmla="*/ 0 h 18288"/>
-              <a:gd name="connsiteX1" fmla="*/ 618468 w 3255095"/>
-              <a:gd name="connsiteY1" fmla="*/ 0 h 18288"/>
-              <a:gd name="connsiteX2" fmla="*/ 1269487 w 3255095"/>
-              <a:gd name="connsiteY2" fmla="*/ 0 h 18288"/>
-              <a:gd name="connsiteX3" fmla="*/ 1953057 w 3255095"/>
-              <a:gd name="connsiteY3" fmla="*/ 0 h 18288"/>
-              <a:gd name="connsiteX4" fmla="*/ 2636627 w 3255095"/>
-              <a:gd name="connsiteY4" fmla="*/ 0 h 18288"/>
-              <a:gd name="connsiteX5" fmla="*/ 3255095 w 3255095"/>
-              <a:gd name="connsiteY5" fmla="*/ 0 h 18288"/>
-              <a:gd name="connsiteX6" fmla="*/ 3255095 w 3255095"/>
-              <a:gd name="connsiteY6" fmla="*/ 18288 h 18288"/>
-              <a:gd name="connsiteX7" fmla="*/ 2538974 w 3255095"/>
-              <a:gd name="connsiteY7" fmla="*/ 18288 h 18288"/>
-              <a:gd name="connsiteX8" fmla="*/ 1822853 w 3255095"/>
-              <a:gd name="connsiteY8" fmla="*/ 18288 h 18288"/>
-              <a:gd name="connsiteX9" fmla="*/ 1171834 w 3255095"/>
-              <a:gd name="connsiteY9" fmla="*/ 18288 h 18288"/>
-              <a:gd name="connsiteX10" fmla="*/ 0 w 3255095"/>
-              <a:gd name="connsiteY10" fmla="*/ 18288 h 18288"/>
-              <a:gd name="connsiteX11" fmla="*/ 0 w 3255095"/>
-              <a:gd name="connsiteY11" fmla="*/ 0 h 18288"/>
+              <a:gd name="csX0" fmla="*/ 0 w 3255095"/>
+              <a:gd name="csY0" fmla="*/ 0 h 18288"/>
+              <a:gd name="csX1" fmla="*/ 618468 w 3255095"/>
+              <a:gd name="csY1" fmla="*/ 0 h 18288"/>
+              <a:gd name="csX2" fmla="*/ 1269487 w 3255095"/>
+              <a:gd name="csY2" fmla="*/ 0 h 18288"/>
+              <a:gd name="csX3" fmla="*/ 1953057 w 3255095"/>
+              <a:gd name="csY3" fmla="*/ 0 h 18288"/>
+              <a:gd name="csX4" fmla="*/ 2636627 w 3255095"/>
+              <a:gd name="csY4" fmla="*/ 0 h 18288"/>
+              <a:gd name="csX5" fmla="*/ 3255095 w 3255095"/>
+              <a:gd name="csY5" fmla="*/ 0 h 18288"/>
+              <a:gd name="csX6" fmla="*/ 3255095 w 3255095"/>
+              <a:gd name="csY6" fmla="*/ 18288 h 18288"/>
+              <a:gd name="csX7" fmla="*/ 2538974 w 3255095"/>
+              <a:gd name="csY7" fmla="*/ 18288 h 18288"/>
+              <a:gd name="csX8" fmla="*/ 1822853 w 3255095"/>
+              <a:gd name="csY8" fmla="*/ 18288 h 18288"/>
+              <a:gd name="csX9" fmla="*/ 1171834 w 3255095"/>
+              <a:gd name="csY9" fmla="*/ 18288 h 18288"/>
+              <a:gd name="csX10" fmla="*/ 0 w 3255095"/>
+              <a:gd name="csY10" fmla="*/ 18288 h 18288"/>
+              <a:gd name="csX11" fmla="*/ 0 w 3255095"/>
+              <a:gd name="csY11" fmla="*/ 0 h 18288"/>
             </a:gdLst>
             <a:ahLst/>
             <a:cxnLst>
               <a:cxn ang="0">
-                <a:pos x="connsiteX0" y="connsiteY0"/>
+                <a:pos x="csX0" y="csY0"/>
               </a:cxn>
               <a:cxn ang="0">
-                <a:pos x="connsiteX1" y="connsiteY1"/>
+                <a:pos x="csX1" y="csY1"/>
               </a:cxn>
               <a:cxn ang="0">
-                <a:pos x="connsiteX2" y="connsiteY2"/>
+                <a:pos x="csX2" y="csY2"/>
               </a:cxn>
               <a:cxn ang="0">
-                <a:pos x="connsiteX3" y="connsiteY3"/>
+                <a:pos x="csX3" y="csY3"/>
               </a:cxn>
               <a:cxn ang="0">
-                <a:pos x="connsiteX4" y="connsiteY4"/>
+                <a:pos x="csX4" y="csY4"/>
               </a:cxn>
               <a:cxn ang="0">
-                <a:pos x="connsiteX5" y="connsiteY5"/>
+                <a:pos x="csX5" y="csY5"/>
               </a:cxn>
               <a:cxn ang="0">
-                <a:pos x="connsiteX6" y="connsiteY6"/>
+                <a:pos x="csX6" y="csY6"/>
               </a:cxn>
               <a:cxn ang="0">
-                <a:pos x="connsiteX7" y="connsiteY7"/>
+                <a:pos x="csX7" y="csY7"/>
               </a:cxn>
               <a:cxn ang="0">
-                <a:pos x="connsiteX8" y="connsiteY8"/>
+                <a:pos x="csX8" y="csY8"/>
               </a:cxn>
               <a:cxn ang="0">
-                <a:pos x="connsiteX9" y="connsiteY9"/>
+                <a:pos x="csX9" y="csY9"/>
               </a:cxn>
               <a:cxn ang="0">
-                <a:pos x="connsiteX10" y="connsiteY10"/>
+                <a:pos x="csX10" y="csY10"/>
               </a:cxn>
               <a:cxn ang="0">
-                <a:pos x="connsiteX11" y="connsiteY11"/>
+                <a:pos x="csX11" y="csY11"/>
               </a:cxn>
             </a:cxnLst>
             <a:rect l="l" t="t" r="r" b="b"/>
@@ -8652,198 +8654,198 @@
           <a:custGeom>
             <a:avLst/>
             <a:gdLst>
-              <a:gd name="connsiteX0" fmla="*/ 0 w 10972800"/>
-              <a:gd name="connsiteY0" fmla="*/ 0 h 18288"/>
-              <a:gd name="connsiteX1" fmla="*/ 356616 w 10972800"/>
-              <a:gd name="connsiteY1" fmla="*/ 0 h 18288"/>
-              <a:gd name="connsiteX2" fmla="*/ 1042416 w 10972800"/>
-              <a:gd name="connsiteY2" fmla="*/ 0 h 18288"/>
-              <a:gd name="connsiteX3" fmla="*/ 1947672 w 10972800"/>
-              <a:gd name="connsiteY3" fmla="*/ 0 h 18288"/>
-              <a:gd name="connsiteX4" fmla="*/ 2633472 w 10972800"/>
-              <a:gd name="connsiteY4" fmla="*/ 0 h 18288"/>
-              <a:gd name="connsiteX5" fmla="*/ 2990088 w 10972800"/>
-              <a:gd name="connsiteY5" fmla="*/ 0 h 18288"/>
-              <a:gd name="connsiteX6" fmla="*/ 3456432 w 10972800"/>
-              <a:gd name="connsiteY6" fmla="*/ 0 h 18288"/>
-              <a:gd name="connsiteX7" fmla="*/ 4361688 w 10972800"/>
-              <a:gd name="connsiteY7" fmla="*/ 0 h 18288"/>
-              <a:gd name="connsiteX8" fmla="*/ 5266944 w 10972800"/>
-              <a:gd name="connsiteY8" fmla="*/ 0 h 18288"/>
-              <a:gd name="connsiteX9" fmla="*/ 6172200 w 10972800"/>
-              <a:gd name="connsiteY9" fmla="*/ 0 h 18288"/>
-              <a:gd name="connsiteX10" fmla="*/ 6528816 w 10972800"/>
-              <a:gd name="connsiteY10" fmla="*/ 0 h 18288"/>
-              <a:gd name="connsiteX11" fmla="*/ 7214616 w 10972800"/>
-              <a:gd name="connsiteY11" fmla="*/ 0 h 18288"/>
-              <a:gd name="connsiteX12" fmla="*/ 7790688 w 10972800"/>
-              <a:gd name="connsiteY12" fmla="*/ 0 h 18288"/>
-              <a:gd name="connsiteX13" fmla="*/ 8147304 w 10972800"/>
-              <a:gd name="connsiteY13" fmla="*/ 0 h 18288"/>
-              <a:gd name="connsiteX14" fmla="*/ 9052560 w 10972800"/>
-              <a:gd name="connsiteY14" fmla="*/ 0 h 18288"/>
-              <a:gd name="connsiteX15" fmla="*/ 9409176 w 10972800"/>
-              <a:gd name="connsiteY15" fmla="*/ 0 h 18288"/>
-              <a:gd name="connsiteX16" fmla="*/ 9765792 w 10972800"/>
-              <a:gd name="connsiteY16" fmla="*/ 0 h 18288"/>
-              <a:gd name="connsiteX17" fmla="*/ 10341864 w 10972800"/>
-              <a:gd name="connsiteY17" fmla="*/ 0 h 18288"/>
-              <a:gd name="connsiteX18" fmla="*/ 10972800 w 10972800"/>
-              <a:gd name="connsiteY18" fmla="*/ 0 h 18288"/>
-              <a:gd name="connsiteX19" fmla="*/ 10972800 w 10972800"/>
-              <a:gd name="connsiteY19" fmla="*/ 18288 h 18288"/>
-              <a:gd name="connsiteX20" fmla="*/ 10177272 w 10972800"/>
-              <a:gd name="connsiteY20" fmla="*/ 18288 h 18288"/>
-              <a:gd name="connsiteX21" fmla="*/ 9820656 w 10972800"/>
-              <a:gd name="connsiteY21" fmla="*/ 18288 h 18288"/>
-              <a:gd name="connsiteX22" fmla="*/ 9464040 w 10972800"/>
-              <a:gd name="connsiteY22" fmla="*/ 18288 h 18288"/>
-              <a:gd name="connsiteX23" fmla="*/ 8778240 w 10972800"/>
-              <a:gd name="connsiteY23" fmla="*/ 18288 h 18288"/>
-              <a:gd name="connsiteX24" fmla="*/ 8421624 w 10972800"/>
-              <a:gd name="connsiteY24" fmla="*/ 18288 h 18288"/>
-              <a:gd name="connsiteX25" fmla="*/ 7735824 w 10972800"/>
-              <a:gd name="connsiteY25" fmla="*/ 18288 h 18288"/>
-              <a:gd name="connsiteX26" fmla="*/ 6940296 w 10972800"/>
-              <a:gd name="connsiteY26" fmla="*/ 18288 h 18288"/>
-              <a:gd name="connsiteX27" fmla="*/ 6254496 w 10972800"/>
-              <a:gd name="connsiteY27" fmla="*/ 18288 h 18288"/>
-              <a:gd name="connsiteX28" fmla="*/ 5458968 w 10972800"/>
-              <a:gd name="connsiteY28" fmla="*/ 18288 h 18288"/>
-              <a:gd name="connsiteX29" fmla="*/ 4663440 w 10972800"/>
-              <a:gd name="connsiteY29" fmla="*/ 18288 h 18288"/>
-              <a:gd name="connsiteX30" fmla="*/ 4306824 w 10972800"/>
-              <a:gd name="connsiteY30" fmla="*/ 18288 h 18288"/>
-              <a:gd name="connsiteX31" fmla="*/ 3840480 w 10972800"/>
-              <a:gd name="connsiteY31" fmla="*/ 18288 h 18288"/>
-              <a:gd name="connsiteX32" fmla="*/ 3264408 w 10972800"/>
-              <a:gd name="connsiteY32" fmla="*/ 18288 h 18288"/>
-              <a:gd name="connsiteX33" fmla="*/ 2578608 w 10972800"/>
-              <a:gd name="connsiteY33" fmla="*/ 18288 h 18288"/>
-              <a:gd name="connsiteX34" fmla="*/ 1673352 w 10972800"/>
-              <a:gd name="connsiteY34" fmla="*/ 18288 h 18288"/>
-              <a:gd name="connsiteX35" fmla="*/ 877824 w 10972800"/>
-              <a:gd name="connsiteY35" fmla="*/ 18288 h 18288"/>
-              <a:gd name="connsiteX36" fmla="*/ 0 w 10972800"/>
-              <a:gd name="connsiteY36" fmla="*/ 18288 h 18288"/>
-              <a:gd name="connsiteX37" fmla="*/ 0 w 10972800"/>
-              <a:gd name="connsiteY37" fmla="*/ 0 h 18288"/>
+              <a:gd name="csX0" fmla="*/ 0 w 10972800"/>
+              <a:gd name="csY0" fmla="*/ 0 h 18288"/>
+              <a:gd name="csX1" fmla="*/ 356616 w 10972800"/>
+              <a:gd name="csY1" fmla="*/ 0 h 18288"/>
+              <a:gd name="csX2" fmla="*/ 1042416 w 10972800"/>
+              <a:gd name="csY2" fmla="*/ 0 h 18288"/>
+              <a:gd name="csX3" fmla="*/ 1947672 w 10972800"/>
+              <a:gd name="csY3" fmla="*/ 0 h 18288"/>
+              <a:gd name="csX4" fmla="*/ 2633472 w 10972800"/>
+              <a:gd name="csY4" fmla="*/ 0 h 18288"/>
+              <a:gd name="csX5" fmla="*/ 2990088 w 10972800"/>
+              <a:gd name="csY5" fmla="*/ 0 h 18288"/>
+              <a:gd name="csX6" fmla="*/ 3456432 w 10972800"/>
+              <a:gd name="csY6" fmla="*/ 0 h 18288"/>
+              <a:gd name="csX7" fmla="*/ 4361688 w 10972800"/>
+              <a:gd name="csY7" fmla="*/ 0 h 18288"/>
+              <a:gd name="csX8" fmla="*/ 5266944 w 10972800"/>
+              <a:gd name="csY8" fmla="*/ 0 h 18288"/>
+              <a:gd name="csX9" fmla="*/ 6172200 w 10972800"/>
+              <a:gd name="csY9" fmla="*/ 0 h 18288"/>
+              <a:gd name="csX10" fmla="*/ 6528816 w 10972800"/>
+              <a:gd name="csY10" fmla="*/ 0 h 18288"/>
+              <a:gd name="csX11" fmla="*/ 7214616 w 10972800"/>
+              <a:gd name="csY11" fmla="*/ 0 h 18288"/>
+              <a:gd name="csX12" fmla="*/ 7790688 w 10972800"/>
+              <a:gd name="csY12" fmla="*/ 0 h 18288"/>
+              <a:gd name="csX13" fmla="*/ 8147304 w 10972800"/>
+              <a:gd name="csY13" fmla="*/ 0 h 18288"/>
+              <a:gd name="csX14" fmla="*/ 9052560 w 10972800"/>
+              <a:gd name="csY14" fmla="*/ 0 h 18288"/>
+              <a:gd name="csX15" fmla="*/ 9409176 w 10972800"/>
+              <a:gd name="csY15" fmla="*/ 0 h 18288"/>
+              <a:gd name="csX16" fmla="*/ 9765792 w 10972800"/>
+              <a:gd name="csY16" fmla="*/ 0 h 18288"/>
+              <a:gd name="csX17" fmla="*/ 10341864 w 10972800"/>
+              <a:gd name="csY17" fmla="*/ 0 h 18288"/>
+              <a:gd name="csX18" fmla="*/ 10972800 w 10972800"/>
+              <a:gd name="csY18" fmla="*/ 0 h 18288"/>
+              <a:gd name="csX19" fmla="*/ 10972800 w 10972800"/>
+              <a:gd name="csY19" fmla="*/ 18288 h 18288"/>
+              <a:gd name="csX20" fmla="*/ 10177272 w 10972800"/>
+              <a:gd name="csY20" fmla="*/ 18288 h 18288"/>
+              <a:gd name="csX21" fmla="*/ 9820656 w 10972800"/>
+              <a:gd name="csY21" fmla="*/ 18288 h 18288"/>
+              <a:gd name="csX22" fmla="*/ 9464040 w 10972800"/>
+              <a:gd name="csY22" fmla="*/ 18288 h 18288"/>
+              <a:gd name="csX23" fmla="*/ 8778240 w 10972800"/>
+              <a:gd name="csY23" fmla="*/ 18288 h 18288"/>
+              <a:gd name="csX24" fmla="*/ 8421624 w 10972800"/>
+              <a:gd name="csY24" fmla="*/ 18288 h 18288"/>
+              <a:gd name="csX25" fmla="*/ 7735824 w 10972800"/>
+              <a:gd name="csY25" fmla="*/ 18288 h 18288"/>
+              <a:gd name="csX26" fmla="*/ 6940296 w 10972800"/>
+              <a:gd name="csY26" fmla="*/ 18288 h 18288"/>
+              <a:gd name="csX27" fmla="*/ 6254496 w 10972800"/>
+              <a:gd name="csY27" fmla="*/ 18288 h 18288"/>
+              <a:gd name="csX28" fmla="*/ 5458968 w 10972800"/>
+              <a:gd name="csY28" fmla="*/ 18288 h 18288"/>
+              <a:gd name="csX29" fmla="*/ 4663440 w 10972800"/>
+              <a:gd name="csY29" fmla="*/ 18288 h 18288"/>
+              <a:gd name="csX30" fmla="*/ 4306824 w 10972800"/>
+              <a:gd name="csY30" fmla="*/ 18288 h 18288"/>
+              <a:gd name="csX31" fmla="*/ 3840480 w 10972800"/>
+              <a:gd name="csY31" fmla="*/ 18288 h 18288"/>
+              <a:gd name="csX32" fmla="*/ 3264408 w 10972800"/>
+              <a:gd name="csY32" fmla="*/ 18288 h 18288"/>
+              <a:gd name="csX33" fmla="*/ 2578608 w 10972800"/>
+              <a:gd name="csY33" fmla="*/ 18288 h 18288"/>
+              <a:gd name="csX34" fmla="*/ 1673352 w 10972800"/>
+              <a:gd name="csY34" fmla="*/ 18288 h 18288"/>
+              <a:gd name="csX35" fmla="*/ 877824 w 10972800"/>
+              <a:gd name="csY35" fmla="*/ 18288 h 18288"/>
+              <a:gd name="csX36" fmla="*/ 0 w 10972800"/>
+              <a:gd name="csY36" fmla="*/ 18288 h 18288"/>
+              <a:gd name="csX37" fmla="*/ 0 w 10972800"/>
+              <a:gd name="csY37" fmla="*/ 0 h 18288"/>
             </a:gdLst>
             <a:ahLst/>
             <a:cxnLst>
               <a:cxn ang="0">
-                <a:pos x="connsiteX0" y="connsiteY0"/>
+                <a:pos x="csX0" y="csY0"/>
               </a:cxn>
               <a:cxn ang="0">
-                <a:pos x="connsiteX1" y="connsiteY1"/>
+                <a:pos x="csX1" y="csY1"/>
               </a:cxn>
               <a:cxn ang="0">
-                <a:pos x="connsiteX2" y="connsiteY2"/>
+                <a:pos x="csX2" y="csY2"/>
               </a:cxn>
               <a:cxn ang="0">
-                <a:pos x="connsiteX3" y="connsiteY3"/>
+                <a:pos x="csX3" y="csY3"/>
               </a:cxn>
               <a:cxn ang="0">
-                <a:pos x="connsiteX4" y="connsiteY4"/>
+                <a:pos x="csX4" y="csY4"/>
               </a:cxn>
               <a:cxn ang="0">
-                <a:pos x="connsiteX5" y="connsiteY5"/>
+                <a:pos x="csX5" y="csY5"/>
               </a:cxn>
               <a:cxn ang="0">
-                <a:pos x="connsiteX6" y="connsiteY6"/>
+                <a:pos x="csX6" y="csY6"/>
               </a:cxn>
               <a:cxn ang="0">
-                <a:pos x="connsiteX7" y="connsiteY7"/>
+                <a:pos x="csX7" y="csY7"/>
               </a:cxn>
               <a:cxn ang="0">
-                <a:pos x="connsiteX8" y="connsiteY8"/>
+                <a:pos x="csX8" y="csY8"/>
               </a:cxn>
               <a:cxn ang="0">
-                <a:pos x="connsiteX9" y="connsiteY9"/>
+                <a:pos x="csX9" y="csY9"/>
               </a:cxn>
               <a:cxn ang="0">
-                <a:pos x="connsiteX10" y="connsiteY10"/>
+                <a:pos x="csX10" y="csY10"/>
               </a:cxn>
               <a:cxn ang="0">
-                <a:pos x="connsiteX11" y="connsiteY11"/>
+                <a:pos x="csX11" y="csY11"/>
               </a:cxn>
               <a:cxn ang="0">
-                <a:pos x="connsiteX12" y="connsiteY12"/>
+                <a:pos x="csX12" y="csY12"/>
               </a:cxn>
               <a:cxn ang="0">
-                <a:pos x="connsiteX13" y="connsiteY13"/>
+                <a:pos x="csX13" y="csY13"/>
               </a:cxn>
               <a:cxn ang="0">
-                <a:pos x="connsiteX14" y="connsiteY14"/>
+                <a:pos x="csX14" y="csY14"/>
               </a:cxn>
               <a:cxn ang="0">
-                <a:pos x="connsiteX15" y="connsiteY15"/>
+                <a:pos x="csX15" y="csY15"/>
               </a:cxn>
               <a:cxn ang="0">
-                <a:pos x="connsiteX16" y="connsiteY16"/>
+                <a:pos x="csX16" y="csY16"/>
               </a:cxn>
               <a:cxn ang="0">
-                <a:pos x="connsiteX17" y="connsiteY17"/>
+                <a:pos x="csX17" y="csY17"/>
               </a:cxn>
               <a:cxn ang="0">
-                <a:pos x="connsiteX18" y="connsiteY18"/>
+                <a:pos x="csX18" y="csY18"/>
               </a:cxn>
               <a:cxn ang="0">
-                <a:pos x="connsiteX19" y="connsiteY19"/>
+                <a:pos x="csX19" y="csY19"/>
               </a:cxn>
               <a:cxn ang="0">
-                <a:pos x="connsiteX20" y="connsiteY20"/>
+                <a:pos x="csX20" y="csY20"/>
               </a:cxn>
               <a:cxn ang="0">
-                <a:pos x="connsiteX21" y="connsiteY21"/>
+                <a:pos x="csX21" y="csY21"/>
               </a:cxn>
               <a:cxn ang="0">
-                <a:pos x="connsiteX22" y="connsiteY22"/>
+                <a:pos x="csX22" y="csY22"/>
               </a:cxn>
               <a:cxn ang="0">
-                <a:pos x="connsiteX23" y="connsiteY23"/>
+                <a:pos x="csX23" y="csY23"/>
               </a:cxn>
               <a:cxn ang="0">
-                <a:pos x="connsiteX24" y="connsiteY24"/>
+                <a:pos x="csX24" y="csY24"/>
               </a:cxn>
               <a:cxn ang="0">
-                <a:pos x="connsiteX25" y="connsiteY25"/>
+                <a:pos x="csX25" y="csY25"/>
               </a:cxn>
               <a:cxn ang="0">
-                <a:pos x="connsiteX26" y="connsiteY26"/>
+                <a:pos x="csX26" y="csY26"/>
               </a:cxn>
               <a:cxn ang="0">
-                <a:pos x="connsiteX27" y="connsiteY27"/>
+                <a:pos x="csX27" y="csY27"/>
               </a:cxn>
               <a:cxn ang="0">
-                <a:pos x="connsiteX28" y="connsiteY28"/>
+                <a:pos x="csX28" y="csY28"/>
               </a:cxn>
               <a:cxn ang="0">
-                <a:pos x="connsiteX29" y="connsiteY29"/>
+                <a:pos x="csX29" y="csY29"/>
               </a:cxn>
               <a:cxn ang="0">
-                <a:pos x="connsiteX30" y="connsiteY30"/>
+                <a:pos x="csX30" y="csY30"/>
               </a:cxn>
               <a:cxn ang="0">
-                <a:pos x="connsiteX31" y="connsiteY31"/>
+                <a:pos x="csX31" y="csY31"/>
               </a:cxn>
               <a:cxn ang="0">
-                <a:pos x="connsiteX32" y="connsiteY32"/>
+                <a:pos x="csX32" y="csY32"/>
               </a:cxn>
               <a:cxn ang="0">
-                <a:pos x="connsiteX33" y="connsiteY33"/>
+                <a:pos x="csX33" y="csY33"/>
               </a:cxn>
               <a:cxn ang="0">
-                <a:pos x="connsiteX34" y="connsiteY34"/>
+                <a:pos x="csX34" y="csY34"/>
               </a:cxn>
               <a:cxn ang="0">
-                <a:pos x="connsiteX35" y="connsiteY35"/>
+                <a:pos x="csX35" y="csY35"/>
               </a:cxn>
               <a:cxn ang="0">
-                <a:pos x="connsiteX36" y="connsiteY36"/>
+                <a:pos x="csX36" y="csY36"/>
               </a:cxn>
               <a:cxn ang="0">
-                <a:pos x="connsiteX37" y="connsiteY37"/>
+                <a:pos x="csX37" y="csY37"/>
               </a:cxn>
             </a:cxnLst>
             <a:rect l="l" t="t" r="r" b="b"/>
@@ -10086,53 +10088,53 @@
           <a:custGeom>
             <a:avLst/>
             <a:gdLst>
-              <a:gd name="connsiteX0" fmla="*/ 0 w 1554480"/>
-              <a:gd name="connsiteY0" fmla="*/ 0 h 18288"/>
-              <a:gd name="connsiteX1" fmla="*/ 549250 w 1554480"/>
-              <a:gd name="connsiteY1" fmla="*/ 0 h 18288"/>
-              <a:gd name="connsiteX2" fmla="*/ 1082954 w 1554480"/>
-              <a:gd name="connsiteY2" fmla="*/ 0 h 18288"/>
-              <a:gd name="connsiteX3" fmla="*/ 1554480 w 1554480"/>
-              <a:gd name="connsiteY3" fmla="*/ 0 h 18288"/>
-              <a:gd name="connsiteX4" fmla="*/ 1554480 w 1554480"/>
-              <a:gd name="connsiteY4" fmla="*/ 18288 h 18288"/>
-              <a:gd name="connsiteX5" fmla="*/ 1067410 w 1554480"/>
-              <a:gd name="connsiteY5" fmla="*/ 18288 h 18288"/>
-              <a:gd name="connsiteX6" fmla="*/ 549250 w 1554480"/>
-              <a:gd name="connsiteY6" fmla="*/ 18288 h 18288"/>
-              <a:gd name="connsiteX7" fmla="*/ 0 w 1554480"/>
-              <a:gd name="connsiteY7" fmla="*/ 18288 h 18288"/>
-              <a:gd name="connsiteX8" fmla="*/ 0 w 1554480"/>
-              <a:gd name="connsiteY8" fmla="*/ 0 h 18288"/>
+              <a:gd name="csX0" fmla="*/ 0 w 1554480"/>
+              <a:gd name="csY0" fmla="*/ 0 h 18288"/>
+              <a:gd name="csX1" fmla="*/ 549250 w 1554480"/>
+              <a:gd name="csY1" fmla="*/ 0 h 18288"/>
+              <a:gd name="csX2" fmla="*/ 1082954 w 1554480"/>
+              <a:gd name="csY2" fmla="*/ 0 h 18288"/>
+              <a:gd name="csX3" fmla="*/ 1554480 w 1554480"/>
+              <a:gd name="csY3" fmla="*/ 0 h 18288"/>
+              <a:gd name="csX4" fmla="*/ 1554480 w 1554480"/>
+              <a:gd name="csY4" fmla="*/ 18288 h 18288"/>
+              <a:gd name="csX5" fmla="*/ 1067410 w 1554480"/>
+              <a:gd name="csY5" fmla="*/ 18288 h 18288"/>
+              <a:gd name="csX6" fmla="*/ 549250 w 1554480"/>
+              <a:gd name="csY6" fmla="*/ 18288 h 18288"/>
+              <a:gd name="csX7" fmla="*/ 0 w 1554480"/>
+              <a:gd name="csY7" fmla="*/ 18288 h 18288"/>
+              <a:gd name="csX8" fmla="*/ 0 w 1554480"/>
+              <a:gd name="csY8" fmla="*/ 0 h 18288"/>
             </a:gdLst>
             <a:ahLst/>
             <a:cxnLst>
               <a:cxn ang="0">
-                <a:pos x="connsiteX0" y="connsiteY0"/>
+                <a:pos x="csX0" y="csY0"/>
               </a:cxn>
               <a:cxn ang="0">
-                <a:pos x="connsiteX1" y="connsiteY1"/>
+                <a:pos x="csX1" y="csY1"/>
               </a:cxn>
               <a:cxn ang="0">
-                <a:pos x="connsiteX2" y="connsiteY2"/>
+                <a:pos x="csX2" y="csY2"/>
               </a:cxn>
               <a:cxn ang="0">
-                <a:pos x="connsiteX3" y="connsiteY3"/>
+                <a:pos x="csX3" y="csY3"/>
               </a:cxn>
               <a:cxn ang="0">
-                <a:pos x="connsiteX4" y="connsiteY4"/>
+                <a:pos x="csX4" y="csY4"/>
               </a:cxn>
               <a:cxn ang="0">
-                <a:pos x="connsiteX5" y="connsiteY5"/>
+                <a:pos x="csX5" y="csY5"/>
               </a:cxn>
               <a:cxn ang="0">
-                <a:pos x="connsiteX6" y="connsiteY6"/>
+                <a:pos x="csX6" y="csY6"/>
               </a:cxn>
               <a:cxn ang="0">
-                <a:pos x="connsiteX7" y="connsiteY7"/>
+                <a:pos x="csX7" y="csY7"/>
               </a:cxn>
               <a:cxn ang="0">
-                <a:pos x="connsiteX8" y="connsiteY8"/>
+                <a:pos x="csX8" y="csY8"/>
               </a:cxn>
             </a:cxnLst>
             <a:rect l="l" t="t" r="r" b="b"/>
@@ -11059,53 +11061,53 @@
           <a:custGeom>
             <a:avLst/>
             <a:gdLst>
-              <a:gd name="connsiteX0" fmla="*/ 0 w 1554480"/>
-              <a:gd name="connsiteY0" fmla="*/ 0 h 18288"/>
-              <a:gd name="connsiteX1" fmla="*/ 549250 w 1554480"/>
-              <a:gd name="connsiteY1" fmla="*/ 0 h 18288"/>
-              <a:gd name="connsiteX2" fmla="*/ 1082954 w 1554480"/>
-              <a:gd name="connsiteY2" fmla="*/ 0 h 18288"/>
-              <a:gd name="connsiteX3" fmla="*/ 1554480 w 1554480"/>
-              <a:gd name="connsiteY3" fmla="*/ 0 h 18288"/>
-              <a:gd name="connsiteX4" fmla="*/ 1554480 w 1554480"/>
-              <a:gd name="connsiteY4" fmla="*/ 18288 h 18288"/>
-              <a:gd name="connsiteX5" fmla="*/ 1067410 w 1554480"/>
-              <a:gd name="connsiteY5" fmla="*/ 18288 h 18288"/>
-              <a:gd name="connsiteX6" fmla="*/ 549250 w 1554480"/>
-              <a:gd name="connsiteY6" fmla="*/ 18288 h 18288"/>
-              <a:gd name="connsiteX7" fmla="*/ 0 w 1554480"/>
-              <a:gd name="connsiteY7" fmla="*/ 18288 h 18288"/>
-              <a:gd name="connsiteX8" fmla="*/ 0 w 1554480"/>
-              <a:gd name="connsiteY8" fmla="*/ 0 h 18288"/>
+              <a:gd name="csX0" fmla="*/ 0 w 1554480"/>
+              <a:gd name="csY0" fmla="*/ 0 h 18288"/>
+              <a:gd name="csX1" fmla="*/ 549250 w 1554480"/>
+              <a:gd name="csY1" fmla="*/ 0 h 18288"/>
+              <a:gd name="csX2" fmla="*/ 1082954 w 1554480"/>
+              <a:gd name="csY2" fmla="*/ 0 h 18288"/>
+              <a:gd name="csX3" fmla="*/ 1554480 w 1554480"/>
+              <a:gd name="csY3" fmla="*/ 0 h 18288"/>
+              <a:gd name="csX4" fmla="*/ 1554480 w 1554480"/>
+              <a:gd name="csY4" fmla="*/ 18288 h 18288"/>
+              <a:gd name="csX5" fmla="*/ 1067410 w 1554480"/>
+              <a:gd name="csY5" fmla="*/ 18288 h 18288"/>
+              <a:gd name="csX6" fmla="*/ 549250 w 1554480"/>
+              <a:gd name="csY6" fmla="*/ 18288 h 18288"/>
+              <a:gd name="csX7" fmla="*/ 0 w 1554480"/>
+              <a:gd name="csY7" fmla="*/ 18288 h 18288"/>
+              <a:gd name="csX8" fmla="*/ 0 w 1554480"/>
+              <a:gd name="csY8" fmla="*/ 0 h 18288"/>
             </a:gdLst>
             <a:ahLst/>
             <a:cxnLst>
               <a:cxn ang="0">
-                <a:pos x="connsiteX0" y="connsiteY0"/>
+                <a:pos x="csX0" y="csY0"/>
               </a:cxn>
               <a:cxn ang="0">
-                <a:pos x="connsiteX1" y="connsiteY1"/>
+                <a:pos x="csX1" y="csY1"/>
               </a:cxn>
               <a:cxn ang="0">
-                <a:pos x="connsiteX2" y="connsiteY2"/>
+                <a:pos x="csX2" y="csY2"/>
               </a:cxn>
               <a:cxn ang="0">
-                <a:pos x="connsiteX3" y="connsiteY3"/>
+                <a:pos x="csX3" y="csY3"/>
               </a:cxn>
               <a:cxn ang="0">
-                <a:pos x="connsiteX4" y="connsiteY4"/>
+                <a:pos x="csX4" y="csY4"/>
               </a:cxn>
               <a:cxn ang="0">
-                <a:pos x="connsiteX5" y="connsiteY5"/>
+                <a:pos x="csX5" y="csY5"/>
               </a:cxn>
               <a:cxn ang="0">
-                <a:pos x="connsiteX6" y="connsiteY6"/>
+                <a:pos x="csX6" y="csY6"/>
               </a:cxn>
               <a:cxn ang="0">
-                <a:pos x="connsiteX7" y="connsiteY7"/>
+                <a:pos x="csX7" y="csY7"/>
               </a:cxn>
               <a:cxn ang="0">
-                <a:pos x="connsiteX8" y="connsiteY8"/>
+                <a:pos x="csX8" y="csY8"/>
               </a:cxn>
             </a:cxnLst>
             <a:rect l="l" t="t" r="r" b="b"/>
@@ -11445,53 +11447,53 @@
           <a:custGeom>
             <a:avLst/>
             <a:gdLst>
-              <a:gd name="connsiteX0" fmla="*/ 0 w 1554480"/>
-              <a:gd name="connsiteY0" fmla="*/ 0 h 18288"/>
-              <a:gd name="connsiteX1" fmla="*/ 549250 w 1554480"/>
-              <a:gd name="connsiteY1" fmla="*/ 0 h 18288"/>
-              <a:gd name="connsiteX2" fmla="*/ 1082954 w 1554480"/>
-              <a:gd name="connsiteY2" fmla="*/ 0 h 18288"/>
-              <a:gd name="connsiteX3" fmla="*/ 1554480 w 1554480"/>
-              <a:gd name="connsiteY3" fmla="*/ 0 h 18288"/>
-              <a:gd name="connsiteX4" fmla="*/ 1554480 w 1554480"/>
-              <a:gd name="connsiteY4" fmla="*/ 18288 h 18288"/>
-              <a:gd name="connsiteX5" fmla="*/ 1067410 w 1554480"/>
-              <a:gd name="connsiteY5" fmla="*/ 18288 h 18288"/>
-              <a:gd name="connsiteX6" fmla="*/ 549250 w 1554480"/>
-              <a:gd name="connsiteY6" fmla="*/ 18288 h 18288"/>
-              <a:gd name="connsiteX7" fmla="*/ 0 w 1554480"/>
-              <a:gd name="connsiteY7" fmla="*/ 18288 h 18288"/>
-              <a:gd name="connsiteX8" fmla="*/ 0 w 1554480"/>
-              <a:gd name="connsiteY8" fmla="*/ 0 h 18288"/>
+              <a:gd name="csX0" fmla="*/ 0 w 1554480"/>
+              <a:gd name="csY0" fmla="*/ 0 h 18288"/>
+              <a:gd name="csX1" fmla="*/ 549250 w 1554480"/>
+              <a:gd name="csY1" fmla="*/ 0 h 18288"/>
+              <a:gd name="csX2" fmla="*/ 1082954 w 1554480"/>
+              <a:gd name="csY2" fmla="*/ 0 h 18288"/>
+              <a:gd name="csX3" fmla="*/ 1554480 w 1554480"/>
+              <a:gd name="csY3" fmla="*/ 0 h 18288"/>
+              <a:gd name="csX4" fmla="*/ 1554480 w 1554480"/>
+              <a:gd name="csY4" fmla="*/ 18288 h 18288"/>
+              <a:gd name="csX5" fmla="*/ 1067410 w 1554480"/>
+              <a:gd name="csY5" fmla="*/ 18288 h 18288"/>
+              <a:gd name="csX6" fmla="*/ 549250 w 1554480"/>
+              <a:gd name="csY6" fmla="*/ 18288 h 18288"/>
+              <a:gd name="csX7" fmla="*/ 0 w 1554480"/>
+              <a:gd name="csY7" fmla="*/ 18288 h 18288"/>
+              <a:gd name="csX8" fmla="*/ 0 w 1554480"/>
+              <a:gd name="csY8" fmla="*/ 0 h 18288"/>
             </a:gdLst>
             <a:ahLst/>
             <a:cxnLst>
               <a:cxn ang="0">
-                <a:pos x="connsiteX0" y="connsiteY0"/>
+                <a:pos x="csX0" y="csY0"/>
               </a:cxn>
               <a:cxn ang="0">
-                <a:pos x="connsiteX1" y="connsiteY1"/>
+                <a:pos x="csX1" y="csY1"/>
               </a:cxn>
               <a:cxn ang="0">
-                <a:pos x="connsiteX2" y="connsiteY2"/>
+                <a:pos x="csX2" y="csY2"/>
               </a:cxn>
               <a:cxn ang="0">
-                <a:pos x="connsiteX3" y="connsiteY3"/>
+                <a:pos x="csX3" y="csY3"/>
               </a:cxn>
               <a:cxn ang="0">
-                <a:pos x="connsiteX4" y="connsiteY4"/>
+                <a:pos x="csX4" y="csY4"/>
               </a:cxn>
               <a:cxn ang="0">
-                <a:pos x="connsiteX5" y="connsiteY5"/>
+                <a:pos x="csX5" y="csY5"/>
               </a:cxn>
               <a:cxn ang="0">
-                <a:pos x="connsiteX6" y="connsiteY6"/>
+                <a:pos x="csX6" y="csY6"/>
               </a:cxn>
               <a:cxn ang="0">
-                <a:pos x="connsiteX7" y="connsiteY7"/>
+                <a:pos x="csX7" y="csY7"/>
               </a:cxn>
               <a:cxn ang="0">
-                <a:pos x="connsiteX8" y="connsiteY8"/>
+                <a:pos x="csX8" y="csY8"/>
               </a:cxn>
             </a:cxnLst>
             <a:rect l="l" t="t" r="r" b="b"/>
@@ -12452,73 +12454,73 @@
           <a:custGeom>
             <a:avLst/>
             <a:gdLst>
-              <a:gd name="connsiteX0" fmla="*/ 0 w 3474720"/>
-              <a:gd name="connsiteY0" fmla="*/ 0 h 18288"/>
-              <a:gd name="connsiteX1" fmla="*/ 694944 w 3474720"/>
-              <a:gd name="connsiteY1" fmla="*/ 0 h 18288"/>
-              <a:gd name="connsiteX2" fmla="*/ 1355141 w 3474720"/>
-              <a:gd name="connsiteY2" fmla="*/ 0 h 18288"/>
-              <a:gd name="connsiteX3" fmla="*/ 2015338 w 3474720"/>
-              <a:gd name="connsiteY3" fmla="*/ 0 h 18288"/>
-              <a:gd name="connsiteX4" fmla="*/ 2779776 w 3474720"/>
-              <a:gd name="connsiteY4" fmla="*/ 0 h 18288"/>
-              <a:gd name="connsiteX5" fmla="*/ 3474720 w 3474720"/>
-              <a:gd name="connsiteY5" fmla="*/ 0 h 18288"/>
-              <a:gd name="connsiteX6" fmla="*/ 3474720 w 3474720"/>
-              <a:gd name="connsiteY6" fmla="*/ 18288 h 18288"/>
-              <a:gd name="connsiteX7" fmla="*/ 2779776 w 3474720"/>
-              <a:gd name="connsiteY7" fmla="*/ 18288 h 18288"/>
-              <a:gd name="connsiteX8" fmla="*/ 2189074 w 3474720"/>
-              <a:gd name="connsiteY8" fmla="*/ 18288 h 18288"/>
-              <a:gd name="connsiteX9" fmla="*/ 1528877 w 3474720"/>
-              <a:gd name="connsiteY9" fmla="*/ 18288 h 18288"/>
-              <a:gd name="connsiteX10" fmla="*/ 868680 w 3474720"/>
-              <a:gd name="connsiteY10" fmla="*/ 18288 h 18288"/>
-              <a:gd name="connsiteX11" fmla="*/ 0 w 3474720"/>
-              <a:gd name="connsiteY11" fmla="*/ 18288 h 18288"/>
-              <a:gd name="connsiteX12" fmla="*/ 0 w 3474720"/>
-              <a:gd name="connsiteY12" fmla="*/ 0 h 18288"/>
+              <a:gd name="csX0" fmla="*/ 0 w 3474720"/>
+              <a:gd name="csY0" fmla="*/ 0 h 18288"/>
+              <a:gd name="csX1" fmla="*/ 694944 w 3474720"/>
+              <a:gd name="csY1" fmla="*/ 0 h 18288"/>
+              <a:gd name="csX2" fmla="*/ 1355141 w 3474720"/>
+              <a:gd name="csY2" fmla="*/ 0 h 18288"/>
+              <a:gd name="csX3" fmla="*/ 2015338 w 3474720"/>
+              <a:gd name="csY3" fmla="*/ 0 h 18288"/>
+              <a:gd name="csX4" fmla="*/ 2779776 w 3474720"/>
+              <a:gd name="csY4" fmla="*/ 0 h 18288"/>
+              <a:gd name="csX5" fmla="*/ 3474720 w 3474720"/>
+              <a:gd name="csY5" fmla="*/ 0 h 18288"/>
+              <a:gd name="csX6" fmla="*/ 3474720 w 3474720"/>
+              <a:gd name="csY6" fmla="*/ 18288 h 18288"/>
+              <a:gd name="csX7" fmla="*/ 2779776 w 3474720"/>
+              <a:gd name="csY7" fmla="*/ 18288 h 18288"/>
+              <a:gd name="csX8" fmla="*/ 2189074 w 3474720"/>
+              <a:gd name="csY8" fmla="*/ 18288 h 18288"/>
+              <a:gd name="csX9" fmla="*/ 1528877 w 3474720"/>
+              <a:gd name="csY9" fmla="*/ 18288 h 18288"/>
+              <a:gd name="csX10" fmla="*/ 868680 w 3474720"/>
+              <a:gd name="csY10" fmla="*/ 18288 h 18288"/>
+              <a:gd name="csX11" fmla="*/ 0 w 3474720"/>
+              <a:gd name="csY11" fmla="*/ 18288 h 18288"/>
+              <a:gd name="csX12" fmla="*/ 0 w 3474720"/>
+              <a:gd name="csY12" fmla="*/ 0 h 18288"/>
             </a:gdLst>
             <a:ahLst/>
             <a:cxnLst>
               <a:cxn ang="0">
-                <a:pos x="connsiteX0" y="connsiteY0"/>
+                <a:pos x="csX0" y="csY0"/>
               </a:cxn>
               <a:cxn ang="0">
-                <a:pos x="connsiteX1" y="connsiteY1"/>
+                <a:pos x="csX1" y="csY1"/>
               </a:cxn>
               <a:cxn ang="0">
-                <a:pos x="connsiteX2" y="connsiteY2"/>
+                <a:pos x="csX2" y="csY2"/>
               </a:cxn>
               <a:cxn ang="0">
-                <a:pos x="connsiteX3" y="connsiteY3"/>
+                <a:pos x="csX3" y="csY3"/>
               </a:cxn>
               <a:cxn ang="0">
-                <a:pos x="connsiteX4" y="connsiteY4"/>
+                <a:pos x="csX4" y="csY4"/>
               </a:cxn>
               <a:cxn ang="0">
-                <a:pos x="connsiteX5" y="connsiteY5"/>
+                <a:pos x="csX5" y="csY5"/>
               </a:cxn>
               <a:cxn ang="0">
-                <a:pos x="connsiteX6" y="connsiteY6"/>
+                <a:pos x="csX6" y="csY6"/>
               </a:cxn>
               <a:cxn ang="0">
-                <a:pos x="connsiteX7" y="connsiteY7"/>
+                <a:pos x="csX7" y="csY7"/>
               </a:cxn>
               <a:cxn ang="0">
-                <a:pos x="connsiteX8" y="connsiteY8"/>
+                <a:pos x="csX8" y="csY8"/>
               </a:cxn>
               <a:cxn ang="0">
-                <a:pos x="connsiteX9" y="connsiteY9"/>
+                <a:pos x="csX9" y="csY9"/>
               </a:cxn>
               <a:cxn ang="0">
-                <a:pos x="connsiteX10" y="connsiteY10"/>
+                <a:pos x="csX10" y="csY10"/>
               </a:cxn>
               <a:cxn ang="0">
-                <a:pos x="connsiteX11" y="connsiteY11"/>
+                <a:pos x="csX11" y="csY11"/>
               </a:cxn>
               <a:cxn ang="0">
-                <a:pos x="connsiteX12" y="connsiteY12"/>
+                <a:pos x="csX12" y="csY12"/>
               </a:cxn>
             </a:cxnLst>
             <a:rect l="l" t="t" r="r" b="b"/>
@@ -13850,68 +13852,68 @@
           <a:custGeom>
             <a:avLst/>
             <a:gdLst>
-              <a:gd name="connsiteX0" fmla="*/ 0 w 3255095"/>
-              <a:gd name="connsiteY0" fmla="*/ 0 h 18288"/>
-              <a:gd name="connsiteX1" fmla="*/ 618468 w 3255095"/>
-              <a:gd name="connsiteY1" fmla="*/ 0 h 18288"/>
-              <a:gd name="connsiteX2" fmla="*/ 1269487 w 3255095"/>
-              <a:gd name="connsiteY2" fmla="*/ 0 h 18288"/>
-              <a:gd name="connsiteX3" fmla="*/ 1953057 w 3255095"/>
-              <a:gd name="connsiteY3" fmla="*/ 0 h 18288"/>
-              <a:gd name="connsiteX4" fmla="*/ 2636627 w 3255095"/>
-              <a:gd name="connsiteY4" fmla="*/ 0 h 18288"/>
-              <a:gd name="connsiteX5" fmla="*/ 3255095 w 3255095"/>
-              <a:gd name="connsiteY5" fmla="*/ 0 h 18288"/>
-              <a:gd name="connsiteX6" fmla="*/ 3255095 w 3255095"/>
-              <a:gd name="connsiteY6" fmla="*/ 18288 h 18288"/>
-              <a:gd name="connsiteX7" fmla="*/ 2538974 w 3255095"/>
-              <a:gd name="connsiteY7" fmla="*/ 18288 h 18288"/>
-              <a:gd name="connsiteX8" fmla="*/ 1822853 w 3255095"/>
-              <a:gd name="connsiteY8" fmla="*/ 18288 h 18288"/>
-              <a:gd name="connsiteX9" fmla="*/ 1171834 w 3255095"/>
-              <a:gd name="connsiteY9" fmla="*/ 18288 h 18288"/>
-              <a:gd name="connsiteX10" fmla="*/ 0 w 3255095"/>
-              <a:gd name="connsiteY10" fmla="*/ 18288 h 18288"/>
-              <a:gd name="connsiteX11" fmla="*/ 0 w 3255095"/>
-              <a:gd name="connsiteY11" fmla="*/ 0 h 18288"/>
+              <a:gd name="csX0" fmla="*/ 0 w 3255095"/>
+              <a:gd name="csY0" fmla="*/ 0 h 18288"/>
+              <a:gd name="csX1" fmla="*/ 618468 w 3255095"/>
+              <a:gd name="csY1" fmla="*/ 0 h 18288"/>
+              <a:gd name="csX2" fmla="*/ 1269487 w 3255095"/>
+              <a:gd name="csY2" fmla="*/ 0 h 18288"/>
+              <a:gd name="csX3" fmla="*/ 1953057 w 3255095"/>
+              <a:gd name="csY3" fmla="*/ 0 h 18288"/>
+              <a:gd name="csX4" fmla="*/ 2636627 w 3255095"/>
+              <a:gd name="csY4" fmla="*/ 0 h 18288"/>
+              <a:gd name="csX5" fmla="*/ 3255095 w 3255095"/>
+              <a:gd name="csY5" fmla="*/ 0 h 18288"/>
+              <a:gd name="csX6" fmla="*/ 3255095 w 3255095"/>
+              <a:gd name="csY6" fmla="*/ 18288 h 18288"/>
+              <a:gd name="csX7" fmla="*/ 2538974 w 3255095"/>
+              <a:gd name="csY7" fmla="*/ 18288 h 18288"/>
+              <a:gd name="csX8" fmla="*/ 1822853 w 3255095"/>
+              <a:gd name="csY8" fmla="*/ 18288 h 18288"/>
+              <a:gd name="csX9" fmla="*/ 1171834 w 3255095"/>
+              <a:gd name="csY9" fmla="*/ 18288 h 18288"/>
+              <a:gd name="csX10" fmla="*/ 0 w 3255095"/>
+              <a:gd name="csY10" fmla="*/ 18288 h 18288"/>
+              <a:gd name="csX11" fmla="*/ 0 w 3255095"/>
+              <a:gd name="csY11" fmla="*/ 0 h 18288"/>
             </a:gdLst>
             <a:ahLst/>
             <a:cxnLst>
               <a:cxn ang="0">
-                <a:pos x="connsiteX0" y="connsiteY0"/>
+                <a:pos x="csX0" y="csY0"/>
               </a:cxn>
               <a:cxn ang="0">
-                <a:pos x="connsiteX1" y="connsiteY1"/>
+                <a:pos x="csX1" y="csY1"/>
               </a:cxn>
               <a:cxn ang="0">
-                <a:pos x="connsiteX2" y="connsiteY2"/>
+                <a:pos x="csX2" y="csY2"/>
               </a:cxn>
               <a:cxn ang="0">
-                <a:pos x="connsiteX3" y="connsiteY3"/>
+                <a:pos x="csX3" y="csY3"/>
               </a:cxn>
               <a:cxn ang="0">
-                <a:pos x="connsiteX4" y="connsiteY4"/>
+                <a:pos x="csX4" y="csY4"/>
               </a:cxn>
               <a:cxn ang="0">
-                <a:pos x="connsiteX5" y="connsiteY5"/>
+                <a:pos x="csX5" y="csY5"/>
               </a:cxn>
               <a:cxn ang="0">
-                <a:pos x="connsiteX6" y="connsiteY6"/>
+                <a:pos x="csX6" y="csY6"/>
               </a:cxn>
               <a:cxn ang="0">
-                <a:pos x="connsiteX7" y="connsiteY7"/>
+                <a:pos x="csX7" y="csY7"/>
               </a:cxn>
               <a:cxn ang="0">
-                <a:pos x="connsiteX8" y="connsiteY8"/>
+                <a:pos x="csX8" y="csY8"/>
               </a:cxn>
               <a:cxn ang="0">
-                <a:pos x="connsiteX9" y="connsiteY9"/>
+                <a:pos x="csX9" y="csY9"/>
               </a:cxn>
               <a:cxn ang="0">
-                <a:pos x="connsiteX10" y="connsiteY10"/>
+                <a:pos x="csX10" y="csY10"/>
               </a:cxn>
               <a:cxn ang="0">
-                <a:pos x="connsiteX11" y="connsiteY11"/>
+                <a:pos x="csX11" y="csY11"/>
               </a:cxn>
             </a:cxnLst>
             <a:rect l="l" t="t" r="r" b="b"/>
@@ -14842,93 +14844,93 @@
           <a:custGeom>
             <a:avLst/>
             <a:gdLst>
-              <a:gd name="connsiteX0" fmla="*/ 0 w 4243589"/>
-              <a:gd name="connsiteY0" fmla="*/ 0 h 18288"/>
-              <a:gd name="connsiteX1" fmla="*/ 478919 w 4243589"/>
-              <a:gd name="connsiteY1" fmla="*/ 0 h 18288"/>
-              <a:gd name="connsiteX2" fmla="*/ 957839 w 4243589"/>
-              <a:gd name="connsiteY2" fmla="*/ 0 h 18288"/>
-              <a:gd name="connsiteX3" fmla="*/ 1521630 w 4243589"/>
-              <a:gd name="connsiteY3" fmla="*/ 0 h 18288"/>
-              <a:gd name="connsiteX4" fmla="*/ 2212729 w 4243589"/>
-              <a:gd name="connsiteY4" fmla="*/ 0 h 18288"/>
-              <a:gd name="connsiteX5" fmla="*/ 2734084 w 4243589"/>
-              <a:gd name="connsiteY5" fmla="*/ 0 h 18288"/>
-              <a:gd name="connsiteX6" fmla="*/ 3255439 w 4243589"/>
-              <a:gd name="connsiteY6" fmla="*/ 0 h 18288"/>
-              <a:gd name="connsiteX7" fmla="*/ 4243589 w 4243589"/>
-              <a:gd name="connsiteY7" fmla="*/ 0 h 18288"/>
-              <a:gd name="connsiteX8" fmla="*/ 4243589 w 4243589"/>
-              <a:gd name="connsiteY8" fmla="*/ 18288 h 18288"/>
-              <a:gd name="connsiteX9" fmla="*/ 3594926 w 4243589"/>
-              <a:gd name="connsiteY9" fmla="*/ 18288 h 18288"/>
-              <a:gd name="connsiteX10" fmla="*/ 3073571 w 4243589"/>
-              <a:gd name="connsiteY10" fmla="*/ 18288 h 18288"/>
-              <a:gd name="connsiteX11" fmla="*/ 2552216 w 4243589"/>
-              <a:gd name="connsiteY11" fmla="*/ 18288 h 18288"/>
-              <a:gd name="connsiteX12" fmla="*/ 1903553 w 4243589"/>
-              <a:gd name="connsiteY12" fmla="*/ 18288 h 18288"/>
-              <a:gd name="connsiteX13" fmla="*/ 1212454 w 4243589"/>
-              <a:gd name="connsiteY13" fmla="*/ 18288 h 18288"/>
-              <a:gd name="connsiteX14" fmla="*/ 733535 w 4243589"/>
-              <a:gd name="connsiteY14" fmla="*/ 18288 h 18288"/>
-              <a:gd name="connsiteX15" fmla="*/ 0 w 4243589"/>
-              <a:gd name="connsiteY15" fmla="*/ 18288 h 18288"/>
-              <a:gd name="connsiteX16" fmla="*/ 0 w 4243589"/>
-              <a:gd name="connsiteY16" fmla="*/ 0 h 18288"/>
+              <a:gd name="csX0" fmla="*/ 0 w 4243589"/>
+              <a:gd name="csY0" fmla="*/ 0 h 18288"/>
+              <a:gd name="csX1" fmla="*/ 478919 w 4243589"/>
+              <a:gd name="csY1" fmla="*/ 0 h 18288"/>
+              <a:gd name="csX2" fmla="*/ 957839 w 4243589"/>
+              <a:gd name="csY2" fmla="*/ 0 h 18288"/>
+              <a:gd name="csX3" fmla="*/ 1521630 w 4243589"/>
+              <a:gd name="csY3" fmla="*/ 0 h 18288"/>
+              <a:gd name="csX4" fmla="*/ 2212729 w 4243589"/>
+              <a:gd name="csY4" fmla="*/ 0 h 18288"/>
+              <a:gd name="csX5" fmla="*/ 2734084 w 4243589"/>
+              <a:gd name="csY5" fmla="*/ 0 h 18288"/>
+              <a:gd name="csX6" fmla="*/ 3255439 w 4243589"/>
+              <a:gd name="csY6" fmla="*/ 0 h 18288"/>
+              <a:gd name="csX7" fmla="*/ 4243589 w 4243589"/>
+              <a:gd name="csY7" fmla="*/ 0 h 18288"/>
+              <a:gd name="csX8" fmla="*/ 4243589 w 4243589"/>
+              <a:gd name="csY8" fmla="*/ 18288 h 18288"/>
+              <a:gd name="csX9" fmla="*/ 3594926 w 4243589"/>
+              <a:gd name="csY9" fmla="*/ 18288 h 18288"/>
+              <a:gd name="csX10" fmla="*/ 3073571 w 4243589"/>
+              <a:gd name="csY10" fmla="*/ 18288 h 18288"/>
+              <a:gd name="csX11" fmla="*/ 2552216 w 4243589"/>
+              <a:gd name="csY11" fmla="*/ 18288 h 18288"/>
+              <a:gd name="csX12" fmla="*/ 1903553 w 4243589"/>
+              <a:gd name="csY12" fmla="*/ 18288 h 18288"/>
+              <a:gd name="csX13" fmla="*/ 1212454 w 4243589"/>
+              <a:gd name="csY13" fmla="*/ 18288 h 18288"/>
+              <a:gd name="csX14" fmla="*/ 733535 w 4243589"/>
+              <a:gd name="csY14" fmla="*/ 18288 h 18288"/>
+              <a:gd name="csX15" fmla="*/ 0 w 4243589"/>
+              <a:gd name="csY15" fmla="*/ 18288 h 18288"/>
+              <a:gd name="csX16" fmla="*/ 0 w 4243589"/>
+              <a:gd name="csY16" fmla="*/ 0 h 18288"/>
             </a:gdLst>
             <a:ahLst/>
             <a:cxnLst>
               <a:cxn ang="0">
-                <a:pos x="connsiteX0" y="connsiteY0"/>
+                <a:pos x="csX0" y="csY0"/>
               </a:cxn>
               <a:cxn ang="0">
-                <a:pos x="connsiteX1" y="connsiteY1"/>
+                <a:pos x="csX1" y="csY1"/>
               </a:cxn>
               <a:cxn ang="0">
-                <a:pos x="connsiteX2" y="connsiteY2"/>
+                <a:pos x="csX2" y="csY2"/>
               </a:cxn>
               <a:cxn ang="0">
-                <a:pos x="connsiteX3" y="connsiteY3"/>
+                <a:pos x="csX3" y="csY3"/>
               </a:cxn>
               <a:cxn ang="0">
-                <a:pos x="connsiteX4" y="connsiteY4"/>
+                <a:pos x="csX4" y="csY4"/>
               </a:cxn>
               <a:cxn ang="0">
-                <a:pos x="connsiteX5" y="connsiteY5"/>
+                <a:pos x="csX5" y="csY5"/>
               </a:cxn>
               <a:cxn ang="0">
-                <a:pos x="connsiteX6" y="connsiteY6"/>
+                <a:pos x="csX6" y="csY6"/>
               </a:cxn>
               <a:cxn ang="0">
-                <a:pos x="connsiteX7" y="connsiteY7"/>
+                <a:pos x="csX7" y="csY7"/>
               </a:cxn>
               <a:cxn ang="0">
-                <a:pos x="connsiteX8" y="connsiteY8"/>
+                <a:pos x="csX8" y="csY8"/>
               </a:cxn>
               <a:cxn ang="0">
-                <a:pos x="connsiteX9" y="connsiteY9"/>
+                <a:pos x="csX9" y="csY9"/>
               </a:cxn>
               <a:cxn ang="0">
-                <a:pos x="connsiteX10" y="connsiteY10"/>
+                <a:pos x="csX10" y="csY10"/>
               </a:cxn>
               <a:cxn ang="0">
-                <a:pos x="connsiteX11" y="connsiteY11"/>
+                <a:pos x="csX11" y="csY11"/>
               </a:cxn>
               <a:cxn ang="0">
-                <a:pos x="connsiteX12" y="connsiteY12"/>
+                <a:pos x="csX12" y="csY12"/>
               </a:cxn>
               <a:cxn ang="0">
-                <a:pos x="connsiteX13" y="connsiteY13"/>
+                <a:pos x="csX13" y="csY13"/>
               </a:cxn>
               <a:cxn ang="0">
-                <a:pos x="connsiteX14" y="connsiteY14"/>
+                <a:pos x="csX14" y="csY14"/>
               </a:cxn>
               <a:cxn ang="0">
-                <a:pos x="connsiteX15" y="connsiteY15"/>
+                <a:pos x="csX15" y="csY15"/>
               </a:cxn>
               <a:cxn ang="0">
-                <a:pos x="connsiteX16" y="connsiteY16"/>
+                <a:pos x="csX16" y="csY16"/>
               </a:cxn>
             </a:cxnLst>
             <a:rect l="l" t="t" r="r" b="b"/>
@@ -18871,40 +18873,1243 @@
           <a:custGeom>
             <a:avLst/>
             <a:gdLst>
-              <a:gd name="connsiteX0" fmla="*/ 0 w 4243589"/>
-              <a:gd name="connsiteY0" fmla="*/ 0 h 18288"/>
-              <a:gd name="connsiteX1" fmla="*/ 478919 w 4243589"/>
-              <a:gd name="connsiteY1" fmla="*/ 0 h 18288"/>
-              <a:gd name="connsiteX2" fmla="*/ 957839 w 4243589"/>
-              <a:gd name="connsiteY2" fmla="*/ 0 h 18288"/>
-              <a:gd name="connsiteX3" fmla="*/ 1521630 w 4243589"/>
-              <a:gd name="connsiteY3" fmla="*/ 0 h 18288"/>
-              <a:gd name="connsiteX4" fmla="*/ 2212729 w 4243589"/>
-              <a:gd name="connsiteY4" fmla="*/ 0 h 18288"/>
-              <a:gd name="connsiteX5" fmla="*/ 2734084 w 4243589"/>
-              <a:gd name="connsiteY5" fmla="*/ 0 h 18288"/>
-              <a:gd name="connsiteX6" fmla="*/ 3255439 w 4243589"/>
-              <a:gd name="connsiteY6" fmla="*/ 0 h 18288"/>
-              <a:gd name="connsiteX7" fmla="*/ 4243589 w 4243589"/>
-              <a:gd name="connsiteY7" fmla="*/ 0 h 18288"/>
-              <a:gd name="connsiteX8" fmla="*/ 4243589 w 4243589"/>
-              <a:gd name="connsiteY8" fmla="*/ 18288 h 18288"/>
-              <a:gd name="connsiteX9" fmla="*/ 3594926 w 4243589"/>
-              <a:gd name="connsiteY9" fmla="*/ 18288 h 18288"/>
-              <a:gd name="connsiteX10" fmla="*/ 3073571 w 4243589"/>
-              <a:gd name="connsiteY10" fmla="*/ 18288 h 18288"/>
-              <a:gd name="connsiteX11" fmla="*/ 2552216 w 4243589"/>
-              <a:gd name="connsiteY11" fmla="*/ 18288 h 18288"/>
-              <a:gd name="connsiteX12" fmla="*/ 1903553 w 4243589"/>
-              <a:gd name="connsiteY12" fmla="*/ 18288 h 18288"/>
-              <a:gd name="connsiteX13" fmla="*/ 1212454 w 4243589"/>
-              <a:gd name="connsiteY13" fmla="*/ 18288 h 18288"/>
-              <a:gd name="connsiteX14" fmla="*/ 733535 w 4243589"/>
-              <a:gd name="connsiteY14" fmla="*/ 18288 h 18288"/>
-              <a:gd name="connsiteX15" fmla="*/ 0 w 4243589"/>
-              <a:gd name="connsiteY15" fmla="*/ 18288 h 18288"/>
-              <a:gd name="connsiteX16" fmla="*/ 0 w 4243589"/>
-              <a:gd name="connsiteY16" fmla="*/ 0 h 18288"/>
+              <a:gd name="csX0" fmla="*/ 0 w 4243589"/>
+              <a:gd name="csY0" fmla="*/ 0 h 18288"/>
+              <a:gd name="csX1" fmla="*/ 478919 w 4243589"/>
+              <a:gd name="csY1" fmla="*/ 0 h 18288"/>
+              <a:gd name="csX2" fmla="*/ 957839 w 4243589"/>
+              <a:gd name="csY2" fmla="*/ 0 h 18288"/>
+              <a:gd name="csX3" fmla="*/ 1521630 w 4243589"/>
+              <a:gd name="csY3" fmla="*/ 0 h 18288"/>
+              <a:gd name="csX4" fmla="*/ 2212729 w 4243589"/>
+              <a:gd name="csY4" fmla="*/ 0 h 18288"/>
+              <a:gd name="csX5" fmla="*/ 2734084 w 4243589"/>
+              <a:gd name="csY5" fmla="*/ 0 h 18288"/>
+              <a:gd name="csX6" fmla="*/ 3255439 w 4243589"/>
+              <a:gd name="csY6" fmla="*/ 0 h 18288"/>
+              <a:gd name="csX7" fmla="*/ 4243589 w 4243589"/>
+              <a:gd name="csY7" fmla="*/ 0 h 18288"/>
+              <a:gd name="csX8" fmla="*/ 4243589 w 4243589"/>
+              <a:gd name="csY8" fmla="*/ 18288 h 18288"/>
+              <a:gd name="csX9" fmla="*/ 3594926 w 4243589"/>
+              <a:gd name="csY9" fmla="*/ 18288 h 18288"/>
+              <a:gd name="csX10" fmla="*/ 3073571 w 4243589"/>
+              <a:gd name="csY10" fmla="*/ 18288 h 18288"/>
+              <a:gd name="csX11" fmla="*/ 2552216 w 4243589"/>
+              <a:gd name="csY11" fmla="*/ 18288 h 18288"/>
+              <a:gd name="csX12" fmla="*/ 1903553 w 4243589"/>
+              <a:gd name="csY12" fmla="*/ 18288 h 18288"/>
+              <a:gd name="csX13" fmla="*/ 1212454 w 4243589"/>
+              <a:gd name="csY13" fmla="*/ 18288 h 18288"/>
+              <a:gd name="csX14" fmla="*/ 733535 w 4243589"/>
+              <a:gd name="csY14" fmla="*/ 18288 h 18288"/>
+              <a:gd name="csX15" fmla="*/ 0 w 4243589"/>
+              <a:gd name="csY15" fmla="*/ 18288 h 18288"/>
+              <a:gd name="csX16" fmla="*/ 0 w 4243589"/>
+              <a:gd name="csY16" fmla="*/ 0 h 18288"/>
+            </a:gdLst>
+            <a:ahLst/>
+            <a:cxnLst>
+              <a:cxn ang="0">
+                <a:pos x="csX0" y="csY0"/>
+              </a:cxn>
+              <a:cxn ang="0">
+                <a:pos x="csX1" y="csY1"/>
+              </a:cxn>
+              <a:cxn ang="0">
+                <a:pos x="csX2" y="csY2"/>
+              </a:cxn>
+              <a:cxn ang="0">
+                <a:pos x="csX3" y="csY3"/>
+              </a:cxn>
+              <a:cxn ang="0">
+                <a:pos x="csX4" y="csY4"/>
+              </a:cxn>
+              <a:cxn ang="0">
+                <a:pos x="csX5" y="csY5"/>
+              </a:cxn>
+              <a:cxn ang="0">
+                <a:pos x="csX6" y="csY6"/>
+              </a:cxn>
+              <a:cxn ang="0">
+                <a:pos x="csX7" y="csY7"/>
+              </a:cxn>
+              <a:cxn ang="0">
+                <a:pos x="csX8" y="csY8"/>
+              </a:cxn>
+              <a:cxn ang="0">
+                <a:pos x="csX9" y="csY9"/>
+              </a:cxn>
+              <a:cxn ang="0">
+                <a:pos x="csX10" y="csY10"/>
+              </a:cxn>
+              <a:cxn ang="0">
+                <a:pos x="csX11" y="csY11"/>
+              </a:cxn>
+              <a:cxn ang="0">
+                <a:pos x="csX12" y="csY12"/>
+              </a:cxn>
+              <a:cxn ang="0">
+                <a:pos x="csX13" y="csY13"/>
+              </a:cxn>
+              <a:cxn ang="0">
+                <a:pos x="csX14" y="csY14"/>
+              </a:cxn>
+              <a:cxn ang="0">
+                <a:pos x="csX15" y="csY15"/>
+              </a:cxn>
+              <a:cxn ang="0">
+                <a:pos x="csX16" y="csY16"/>
+              </a:cxn>
+            </a:cxnLst>
+            <a:rect l="l" t="t" r="r" b="b"/>
+            <a:pathLst>
+              <a:path w="4243589" h="18288" fill="none" extrusionOk="0">
+                <a:moveTo>
+                  <a:pt x="0" y="0"/>
+                </a:moveTo>
+                <a:cubicBezTo>
+                  <a:pt x="213395" y="-21006"/>
+                  <a:pt x="307421" y="-18116"/>
+                  <a:pt x="478919" y="0"/>
+                </a:cubicBezTo>
+                <a:cubicBezTo>
+                  <a:pt x="650417" y="18116"/>
+                  <a:pt x="831092" y="-21237"/>
+                  <a:pt x="957839" y="0"/>
+                </a:cubicBezTo>
+                <a:cubicBezTo>
+                  <a:pt x="1084586" y="21237"/>
+                  <a:pt x="1301682" y="25124"/>
+                  <a:pt x="1521630" y="0"/>
+                </a:cubicBezTo>
+                <a:cubicBezTo>
+                  <a:pt x="1741578" y="-25124"/>
+                  <a:pt x="1970269" y="-29139"/>
+                  <a:pt x="2212729" y="0"/>
+                </a:cubicBezTo>
+                <a:cubicBezTo>
+                  <a:pt x="2455189" y="29139"/>
+                  <a:pt x="2558847" y="-4796"/>
+                  <a:pt x="2734084" y="0"/>
+                </a:cubicBezTo>
+                <a:cubicBezTo>
+                  <a:pt x="2909321" y="4796"/>
+                  <a:pt x="3097217" y="-13409"/>
+                  <a:pt x="3255439" y="0"/>
+                </a:cubicBezTo>
+                <a:cubicBezTo>
+                  <a:pt x="3413662" y="13409"/>
+                  <a:pt x="3979999" y="-10121"/>
+                  <a:pt x="4243589" y="0"/>
+                </a:cubicBezTo>
+                <a:cubicBezTo>
+                  <a:pt x="4244484" y="8974"/>
+                  <a:pt x="4243043" y="9359"/>
+                  <a:pt x="4243589" y="18288"/>
+                </a:cubicBezTo>
+                <a:cubicBezTo>
+                  <a:pt x="4058777" y="31246"/>
+                  <a:pt x="3910348" y="3158"/>
+                  <a:pt x="3594926" y="18288"/>
+                </a:cubicBezTo>
+                <a:cubicBezTo>
+                  <a:pt x="3279504" y="33418"/>
+                  <a:pt x="3319955" y="-3977"/>
+                  <a:pt x="3073571" y="18288"/>
+                </a:cubicBezTo>
+                <a:cubicBezTo>
+                  <a:pt x="2827187" y="40553"/>
+                  <a:pt x="2767387" y="1863"/>
+                  <a:pt x="2552216" y="18288"/>
+                </a:cubicBezTo>
+                <a:cubicBezTo>
+                  <a:pt x="2337046" y="34713"/>
+                  <a:pt x="2181871" y="19527"/>
+                  <a:pt x="1903553" y="18288"/>
+                </a:cubicBezTo>
+                <a:cubicBezTo>
+                  <a:pt x="1625235" y="17049"/>
+                  <a:pt x="1557672" y="24174"/>
+                  <a:pt x="1212454" y="18288"/>
+                </a:cubicBezTo>
+                <a:cubicBezTo>
+                  <a:pt x="867236" y="12402"/>
+                  <a:pt x="874382" y="15627"/>
+                  <a:pt x="733535" y="18288"/>
+                </a:cubicBezTo>
+                <a:cubicBezTo>
+                  <a:pt x="592688" y="20949"/>
+                  <a:pt x="183477" y="14753"/>
+                  <a:pt x="0" y="18288"/>
+                </a:cubicBezTo>
+                <a:cubicBezTo>
+                  <a:pt x="-229" y="14222"/>
+                  <a:pt x="509" y="5816"/>
+                  <a:pt x="0" y="0"/>
+                </a:cubicBezTo>
+                <a:close/>
+              </a:path>
+              <a:path w="4243589" h="18288" stroke="0" extrusionOk="0">
+                <a:moveTo>
+                  <a:pt x="0" y="0"/>
+                </a:moveTo>
+                <a:cubicBezTo>
+                  <a:pt x="143690" y="16630"/>
+                  <a:pt x="266667" y="14847"/>
+                  <a:pt x="521355" y="0"/>
+                </a:cubicBezTo>
+                <a:cubicBezTo>
+                  <a:pt x="776043" y="-14847"/>
+                  <a:pt x="814491" y="-17363"/>
+                  <a:pt x="1000275" y="0"/>
+                </a:cubicBezTo>
+                <a:cubicBezTo>
+                  <a:pt x="1186059" y="17363"/>
+                  <a:pt x="1352504" y="-23507"/>
+                  <a:pt x="1521630" y="0"/>
+                </a:cubicBezTo>
+                <a:cubicBezTo>
+                  <a:pt x="1690756" y="23507"/>
+                  <a:pt x="1889525" y="5871"/>
+                  <a:pt x="2127857" y="0"/>
+                </a:cubicBezTo>
+                <a:cubicBezTo>
+                  <a:pt x="2366189" y="-5871"/>
+                  <a:pt x="2620628" y="-27997"/>
+                  <a:pt x="2776520" y="0"/>
+                </a:cubicBezTo>
+                <a:cubicBezTo>
+                  <a:pt x="2932412" y="27997"/>
+                  <a:pt x="3131683" y="-25073"/>
+                  <a:pt x="3467618" y="0"/>
+                </a:cubicBezTo>
+                <a:cubicBezTo>
+                  <a:pt x="3803553" y="25073"/>
+                  <a:pt x="4017371" y="3071"/>
+                  <a:pt x="4243589" y="0"/>
+                </a:cubicBezTo>
+                <a:cubicBezTo>
+                  <a:pt x="4243134" y="6162"/>
+                  <a:pt x="4243492" y="11775"/>
+                  <a:pt x="4243589" y="18288"/>
+                </a:cubicBezTo>
+                <a:cubicBezTo>
+                  <a:pt x="4017834" y="-5779"/>
+                  <a:pt x="3834586" y="13376"/>
+                  <a:pt x="3594926" y="18288"/>
+                </a:cubicBezTo>
+                <a:cubicBezTo>
+                  <a:pt x="3355266" y="23200"/>
+                  <a:pt x="3204179" y="2869"/>
+                  <a:pt x="2903827" y="18288"/>
+                </a:cubicBezTo>
+                <a:cubicBezTo>
+                  <a:pt x="2603475" y="33707"/>
+                  <a:pt x="2526187" y="46187"/>
+                  <a:pt x="2212729" y="18288"/>
+                </a:cubicBezTo>
+                <a:cubicBezTo>
+                  <a:pt x="1899271" y="-9611"/>
+                  <a:pt x="1966289" y="29692"/>
+                  <a:pt x="1733809" y="18288"/>
+                </a:cubicBezTo>
+                <a:cubicBezTo>
+                  <a:pt x="1501329" y="6884"/>
+                  <a:pt x="1343612" y="12492"/>
+                  <a:pt x="1085146" y="18288"/>
+                </a:cubicBezTo>
+                <a:cubicBezTo>
+                  <a:pt x="826680" y="24084"/>
+                  <a:pt x="778184" y="35607"/>
+                  <a:pt x="521355" y="18288"/>
+                </a:cubicBezTo>
+                <a:cubicBezTo>
+                  <a:pt x="264526" y="969"/>
+                  <a:pt x="120277" y="4268"/>
+                  <a:pt x="0" y="18288"/>
+                </a:cubicBezTo>
+                <a:cubicBezTo>
+                  <a:pt x="766" y="10800"/>
+                  <a:pt x="-457" y="8180"/>
+                  <a:pt x="0" y="0"/>
+                </a:cubicBezTo>
+                <a:close/>
+              </a:path>
+            </a:pathLst>
+          </a:custGeom>
+          <a:solidFill>
+            <a:srgbClr val="FFFFFF">
+              <a:alpha val="75000"/>
+            </a:srgbClr>
+          </a:solidFill>
+          <a:ln w="44450" cap="rnd">
+            <a:solidFill>
+              <a:schemeClr val="bg1">
+                <a:alpha val="75000"/>
+              </a:schemeClr>
+            </a:solidFill>
+            <a:round/>
+            <a:extLst>
+              <a:ext uri="{C807C97D-BFC1-408E-A445-0C87EB9F89A2}">
+                <ask:lineSketchStyleProps xmlns:ask="http://schemas.microsoft.com/office/drawing/2018/sketchyshapes" sd="2727557108">
+                  <a:prstGeom prst="rect">
+                    <a:avLst/>
+                  </a:prstGeom>
+                  <ask:type>
+                    <ask:lineSketchFreehand/>
+                  </ask:type>
+                </ask:lineSketchStyleProps>
+              </a:ext>
+            </a:extLst>
+          </a:ln>
+        </p:spPr>
+        <p:style>
+          <a:lnRef idx="2">
+            <a:schemeClr val="accent1">
+              <a:shade val="50000"/>
+            </a:schemeClr>
+          </a:lnRef>
+          <a:fillRef idx="1">
+            <a:schemeClr val="accent1"/>
+          </a:fillRef>
+          <a:effectRef idx="0">
+            <a:schemeClr val="accent1"/>
+          </a:effectRef>
+          <a:fontRef idx="minor">
+            <a:schemeClr val="lt1"/>
+          </a:fontRef>
+        </p:style>
+        <p:txBody>
+          <a:bodyPr rtlCol="0" anchor="ctr"/>
+          <a:lstStyle/>
+          <a:p>
+            <a:pPr algn="ctr"/>
+            <a:endParaRPr lang="en-US"/>
+          </a:p>
+        </p:txBody>
+      </p:sp>
+    </p:spTree>
+    <p:extLst>
+      <p:ext uri="{BB962C8B-B14F-4D97-AF65-F5344CB8AC3E}">
+        <p14:creationId xmlns:p14="http://schemas.microsoft.com/office/powerpoint/2010/main" val="449328287"/>
+      </p:ext>
+    </p:extLst>
+  </p:cSld>
+  <p:clrMapOvr>
+    <a:overrideClrMapping bg1="lt1" tx1="dk1" bg2="lt2" tx2="dk2" accent1="accent1" accent2="accent2" accent3="accent3" accent4="accent4" accent5="accent5" accent6="accent6" hlink="hlink" folHlink="folHlink"/>
+  </p:clrMapOvr>
+  <mc:AlternateContent xmlns:mc="http://schemas.openxmlformats.org/markup-compatibility/2006" xmlns:p159="http://schemas.microsoft.com/office/powerpoint/2015/09/main">
+    <mc:Choice Requires="p159">
+      <p:transition xmlns:p14="http://schemas.microsoft.com/office/powerpoint/2010/main" spd="slow" p14:dur="2000">
+        <p159:morph option="byObject"/>
+      </p:transition>
+    </mc:Choice>
+    <mc:Fallback xmlns="">
+      <p:transition spd="slow">
+        <p:fade/>
+      </p:transition>
+    </mc:Fallback>
+  </mc:AlternateContent>
+</p:sld>
+</file>
+
+<file path=ppt/slides/slide34.xml><?xml version="1.0" encoding="utf-8"?>
+<p:sld xmlns:a="http://schemas.openxmlformats.org/drawingml/2006/main" xmlns:r="http://schemas.openxmlformats.org/officeDocument/2006/relationships" xmlns:p="http://schemas.openxmlformats.org/presentationml/2006/main">
+  <p:cSld>
+    <p:bg>
+      <p:bgPr>
+        <a:solidFill>
+          <a:schemeClr val="bg1"/>
+        </a:solidFill>
+        <a:effectLst/>
+      </p:bgPr>
+    </p:bg>
+    <p:spTree>
+      <p:nvGrpSpPr>
+        <p:cNvPr id="1" name="">
+          <a:extLst>
+            <a:ext uri="{FF2B5EF4-FFF2-40B4-BE49-F238E27FC236}">
+              <a16:creationId xmlns:a16="http://schemas.microsoft.com/office/drawing/2014/main" id="{96BA4C36-A89F-9A6D-9314-636665B84C3E}"/>
+            </a:ext>
+          </a:extLst>
+        </p:cNvPr>
+        <p:cNvGrpSpPr/>
+        <p:nvPr/>
+      </p:nvGrpSpPr>
+      <p:grpSpPr>
+        <a:xfrm>
+          <a:off x="0" y="0"/>
+          <a:ext cx="0" cy="0"/>
+          <a:chOff x="0" y="0"/>
+          <a:chExt cx="0" cy="0"/>
+        </a:xfrm>
+      </p:grpSpPr>
+      <p:sp useBgFill="1">
+        <p:nvSpPr>
+          <p:cNvPr id="12" name="Rectangle 11">
+            <a:extLst>
+              <a:ext uri="{FF2B5EF4-FFF2-40B4-BE49-F238E27FC236}">
+                <a16:creationId xmlns:a16="http://schemas.microsoft.com/office/drawing/2014/main" id="{1CD81A2A-6ED4-4EF4-A14C-912D31E14800}"/>
+              </a:ext>
+              <a:ext uri="{C183D7F6-B498-43B3-948B-1728B52AA6E4}">
+                <adec:decorative xmlns:adec="http://schemas.microsoft.com/office/drawing/2017/decorative" val="1"/>
+              </a:ext>
+            </a:extLst>
+          </p:cNvPr>
+          <p:cNvSpPr>
+            <a:spLocks noGrp="1" noRot="1" noChangeAspect="1" noMove="1" noResize="1" noEditPoints="1" noAdjustHandles="1" noChangeArrowheads="1" noChangeShapeType="1" noTextEdit="1"/>
+          </p:cNvSpPr>
+          <p:nvPr>
+            <p:extLst>
+              <p:ext uri="{386F3935-93C4-4BCD-93E2-E3B085C9AB24}">
+                <p16:designElem xmlns:p16="http://schemas.microsoft.com/office/powerpoint/2015/main" val="1"/>
+              </p:ext>
+            </p:extLst>
+          </p:nvPr>
+        </p:nvSpPr>
+        <p:spPr bwMode="white">
+          <a:xfrm>
+            <a:off x="0" y="0"/>
+            <a:ext cx="12192000" cy="6858000"/>
+          </a:xfrm>
+          <a:prstGeom prst="rect">
+            <a:avLst/>
+          </a:prstGeom>
+          <a:ln>
+            <a:noFill/>
+          </a:ln>
+        </p:spPr>
+        <p:style>
+          <a:lnRef idx="2">
+            <a:schemeClr val="accent1">
+              <a:shade val="50000"/>
+            </a:schemeClr>
+          </a:lnRef>
+          <a:fillRef idx="1">
+            <a:schemeClr val="accent1"/>
+          </a:fillRef>
+          <a:effectRef idx="0">
+            <a:schemeClr val="accent1"/>
+          </a:effectRef>
+          <a:fontRef idx="minor">
+            <a:schemeClr val="lt1"/>
+          </a:fontRef>
+        </p:style>
+        <p:txBody>
+          <a:bodyPr rtlCol="0" anchor="ctr"/>
+          <a:lstStyle>
+            <a:defPPr>
+              <a:defRPr lang="en-US"/>
+            </a:defPPr>
+            <a:lvl1pPr marL="0" algn="l" defTabSz="914400" rtl="0" eaLnBrk="1" latinLnBrk="0" hangingPunct="1">
+              <a:defRPr sz="1800" kern="1200">
+                <a:solidFill>
+                  <a:schemeClr val="lt1"/>
+                </a:solidFill>
+                <a:latin typeface="+mn-lt"/>
+                <a:ea typeface="+mn-ea"/>
+                <a:cs typeface="+mn-cs"/>
+              </a:defRPr>
+            </a:lvl1pPr>
+            <a:lvl2pPr marL="457200" algn="l" defTabSz="914400" rtl="0" eaLnBrk="1" latinLnBrk="0" hangingPunct="1">
+              <a:defRPr sz="1800" kern="1200">
+                <a:solidFill>
+                  <a:schemeClr val="lt1"/>
+                </a:solidFill>
+                <a:latin typeface="+mn-lt"/>
+                <a:ea typeface="+mn-ea"/>
+                <a:cs typeface="+mn-cs"/>
+              </a:defRPr>
+            </a:lvl2pPr>
+            <a:lvl3pPr marL="914400" algn="l" defTabSz="914400" rtl="0" eaLnBrk="1" latinLnBrk="0" hangingPunct="1">
+              <a:defRPr sz="1800" kern="1200">
+                <a:solidFill>
+                  <a:schemeClr val="lt1"/>
+                </a:solidFill>
+                <a:latin typeface="+mn-lt"/>
+                <a:ea typeface="+mn-ea"/>
+                <a:cs typeface="+mn-cs"/>
+              </a:defRPr>
+            </a:lvl3pPr>
+            <a:lvl4pPr marL="1371600" algn="l" defTabSz="914400" rtl="0" eaLnBrk="1" latinLnBrk="0" hangingPunct="1">
+              <a:defRPr sz="1800" kern="1200">
+                <a:solidFill>
+                  <a:schemeClr val="lt1"/>
+                </a:solidFill>
+                <a:latin typeface="+mn-lt"/>
+                <a:ea typeface="+mn-ea"/>
+                <a:cs typeface="+mn-cs"/>
+              </a:defRPr>
+            </a:lvl4pPr>
+            <a:lvl5pPr marL="1828800" algn="l" defTabSz="914400" rtl="0" eaLnBrk="1" latinLnBrk="0" hangingPunct="1">
+              <a:defRPr sz="1800" kern="1200">
+                <a:solidFill>
+                  <a:schemeClr val="lt1"/>
+                </a:solidFill>
+                <a:latin typeface="+mn-lt"/>
+                <a:ea typeface="+mn-ea"/>
+                <a:cs typeface="+mn-cs"/>
+              </a:defRPr>
+            </a:lvl5pPr>
+            <a:lvl6pPr marL="2286000" algn="l" defTabSz="914400" rtl="0" eaLnBrk="1" latinLnBrk="0" hangingPunct="1">
+              <a:defRPr sz="1800" kern="1200">
+                <a:solidFill>
+                  <a:schemeClr val="lt1"/>
+                </a:solidFill>
+                <a:latin typeface="+mn-lt"/>
+                <a:ea typeface="+mn-ea"/>
+                <a:cs typeface="+mn-cs"/>
+              </a:defRPr>
+            </a:lvl6pPr>
+            <a:lvl7pPr marL="2743200" algn="l" defTabSz="914400" rtl="0" eaLnBrk="1" latinLnBrk="0" hangingPunct="1">
+              <a:defRPr sz="1800" kern="1200">
+                <a:solidFill>
+                  <a:schemeClr val="lt1"/>
+                </a:solidFill>
+                <a:latin typeface="+mn-lt"/>
+                <a:ea typeface="+mn-ea"/>
+                <a:cs typeface="+mn-cs"/>
+              </a:defRPr>
+            </a:lvl7pPr>
+            <a:lvl8pPr marL="3200400" algn="l" defTabSz="914400" rtl="0" eaLnBrk="1" latinLnBrk="0" hangingPunct="1">
+              <a:defRPr sz="1800" kern="1200">
+                <a:solidFill>
+                  <a:schemeClr val="lt1"/>
+                </a:solidFill>
+                <a:latin typeface="+mn-lt"/>
+                <a:ea typeface="+mn-ea"/>
+                <a:cs typeface="+mn-cs"/>
+              </a:defRPr>
+            </a:lvl8pPr>
+            <a:lvl9pPr marL="3657600" algn="l" defTabSz="914400" rtl="0" eaLnBrk="1" latinLnBrk="0" hangingPunct="1">
+              <a:defRPr sz="1800" kern="1200">
+                <a:solidFill>
+                  <a:schemeClr val="lt1"/>
+                </a:solidFill>
+                <a:latin typeface="+mn-lt"/>
+                <a:ea typeface="+mn-ea"/>
+                <a:cs typeface="+mn-cs"/>
+              </a:defRPr>
+            </a:lvl9pPr>
+          </a:lstStyle>
+          <a:p>
+            <a:pPr algn="ctr"/>
+            <a:endParaRPr lang="en-US"/>
+          </a:p>
+        </p:txBody>
+      </p:sp>
+      <p:sp>
+        <p:nvSpPr>
+          <p:cNvPr id="2" name="Título 1">
+            <a:extLst>
+              <a:ext uri="{FF2B5EF4-FFF2-40B4-BE49-F238E27FC236}">
+                <a16:creationId xmlns:a16="http://schemas.microsoft.com/office/drawing/2014/main" id="{83CB8AAE-277F-FED1-B3F1-B5DC13F914B6}"/>
+              </a:ext>
+            </a:extLst>
+          </p:cNvPr>
+          <p:cNvSpPr>
+            <a:spLocks noGrp="1"/>
+          </p:cNvSpPr>
+          <p:nvPr>
+            <p:ph type="title"/>
+          </p:nvPr>
+        </p:nvSpPr>
+        <p:spPr>
+          <a:xfrm>
+            <a:off x="838200" y="365125"/>
+            <a:ext cx="5393361" cy="1325563"/>
+          </a:xfrm>
+        </p:spPr>
+        <p:txBody>
+          <a:bodyPr>
+            <a:normAutofit/>
+          </a:bodyPr>
+          <a:lstStyle/>
+          <a:p>
+            <a:r>
+              <a:rPr lang="pt-PT"/>
+              <a:t>Metodologias de Deteção Utilizadas</a:t>
+            </a:r>
+          </a:p>
+        </p:txBody>
+      </p:sp>
+      <p:sp>
+        <p:nvSpPr>
+          <p:cNvPr id="14" name="Freeform: Shape 13">
+            <a:extLst>
+              <a:ext uri="{FF2B5EF4-FFF2-40B4-BE49-F238E27FC236}">
+                <a16:creationId xmlns:a16="http://schemas.microsoft.com/office/drawing/2014/main" id="{1661932C-CA15-4E17-B115-FAE7CBEE4789}"/>
+              </a:ext>
+              <a:ext uri="{C183D7F6-B498-43B3-948B-1728B52AA6E4}">
+                <adec:decorative xmlns:adec="http://schemas.microsoft.com/office/drawing/2017/decorative" val="1"/>
+              </a:ext>
+            </a:extLst>
+          </p:cNvPr>
+          <p:cNvSpPr>
+            <a:spLocks noGrp="1" noRot="1" noChangeAspect="1" noMove="1" noResize="1" noEditPoints="1" noAdjustHandles="1" noChangeArrowheads="1" noChangeShapeType="1" noTextEdit="1"/>
+          </p:cNvSpPr>
+          <p:nvPr>
+            <p:extLst>
+              <p:ext uri="{386F3935-93C4-4BCD-93E2-E3B085C9AB24}">
+                <p16:designElem xmlns:p16="http://schemas.microsoft.com/office/powerpoint/2015/main" val="1"/>
+              </p:ext>
+            </p:extLst>
+          </p:nvPr>
+        </p:nvSpPr>
+        <p:spPr>
+          <a:xfrm>
+            <a:off x="10198657" y="1"/>
+            <a:ext cx="1155142" cy="625027"/>
+          </a:xfrm>
+          <a:custGeom>
+            <a:avLst/>
+            <a:gdLst>
+              <a:gd name="connsiteX0" fmla="*/ 4784 w 1155142"/>
+              <a:gd name="connsiteY0" fmla="*/ 0 h 625027"/>
+              <a:gd name="connsiteX1" fmla="*/ 1150358 w 1155142"/>
+              <a:gd name="connsiteY1" fmla="*/ 0 h 625027"/>
+              <a:gd name="connsiteX2" fmla="*/ 1155142 w 1155142"/>
+              <a:gd name="connsiteY2" fmla="*/ 47456 h 625027"/>
+              <a:gd name="connsiteX3" fmla="*/ 577571 w 1155142"/>
+              <a:gd name="connsiteY3" fmla="*/ 625027 h 625027"/>
+              <a:gd name="connsiteX4" fmla="*/ 0 w 1155142"/>
+              <a:gd name="connsiteY4" fmla="*/ 47456 h 625027"/>
+            </a:gdLst>
+            <a:ahLst/>
+            <a:cxnLst>
+              <a:cxn ang="0">
+                <a:pos x="connsiteX0" y="connsiteY0"/>
+              </a:cxn>
+              <a:cxn ang="0">
+                <a:pos x="connsiteX1" y="connsiteY1"/>
+              </a:cxn>
+              <a:cxn ang="0">
+                <a:pos x="connsiteX2" y="connsiteY2"/>
+              </a:cxn>
+              <a:cxn ang="0">
+                <a:pos x="connsiteX3" y="connsiteY3"/>
+              </a:cxn>
+              <a:cxn ang="0">
+                <a:pos x="connsiteX4" y="connsiteY4"/>
+              </a:cxn>
+            </a:cxnLst>
+            <a:rect l="l" t="t" r="r" b="b"/>
+            <a:pathLst>
+              <a:path w="1155142" h="625027">
+                <a:moveTo>
+                  <a:pt x="4784" y="0"/>
+                </a:moveTo>
+                <a:lnTo>
+                  <a:pt x="1150358" y="0"/>
+                </a:lnTo>
+                <a:lnTo>
+                  <a:pt x="1155142" y="47456"/>
+                </a:lnTo>
+                <a:cubicBezTo>
+                  <a:pt x="1155142" y="366440"/>
+                  <a:pt x="896555" y="625027"/>
+                  <a:pt x="577571" y="625027"/>
+                </a:cubicBezTo>
+                <a:cubicBezTo>
+                  <a:pt x="258587" y="625027"/>
+                  <a:pt x="0" y="366440"/>
+                  <a:pt x="0" y="47456"/>
+                </a:cubicBezTo>
+                <a:close/>
+              </a:path>
+            </a:pathLst>
+          </a:custGeom>
+          <a:solidFill>
+            <a:schemeClr val="accent5">
+              <a:alpha val="95000"/>
+            </a:schemeClr>
+          </a:solidFill>
+          <a:ln>
+            <a:noFill/>
+          </a:ln>
+        </p:spPr>
+        <p:style>
+          <a:lnRef idx="2">
+            <a:schemeClr val="accent1">
+              <a:shade val="50000"/>
+            </a:schemeClr>
+          </a:lnRef>
+          <a:fillRef idx="1">
+            <a:schemeClr val="accent1"/>
+          </a:fillRef>
+          <a:effectRef idx="0">
+            <a:schemeClr val="accent1"/>
+          </a:effectRef>
+          <a:fontRef idx="minor">
+            <a:schemeClr val="lt1"/>
+          </a:fontRef>
+        </p:style>
+        <p:txBody>
+          <a:bodyPr wrap="square" rtlCol="0" anchor="ctr">
+            <a:noAutofit/>
+          </a:bodyPr>
+          <a:lstStyle/>
+          <a:p>
+            <a:pPr algn="ctr"/>
+            <a:endParaRPr lang="en-US"/>
+          </a:p>
+        </p:txBody>
+      </p:sp>
+      <p:sp>
+        <p:nvSpPr>
+          <p:cNvPr id="3" name="Espaço Reservado para Conteúdo 2">
+            <a:extLst>
+              <a:ext uri="{FF2B5EF4-FFF2-40B4-BE49-F238E27FC236}">
+                <a16:creationId xmlns:a16="http://schemas.microsoft.com/office/drawing/2014/main" id="{B23463D7-914E-961B-CABD-0BBA932098CC}"/>
+              </a:ext>
+            </a:extLst>
+          </p:cNvPr>
+          <p:cNvSpPr>
+            <a:spLocks noGrp="1"/>
+          </p:cNvSpPr>
+          <p:nvPr>
+            <p:ph idx="1"/>
+          </p:nvPr>
+        </p:nvSpPr>
+        <p:spPr>
+          <a:xfrm>
+            <a:off x="838200" y="1825625"/>
+            <a:ext cx="5393361" cy="4351338"/>
+          </a:xfrm>
+        </p:spPr>
+        <p:txBody>
+          <a:bodyPr>
+            <a:normAutofit/>
+          </a:bodyPr>
+          <a:lstStyle/>
+          <a:p>
+            <a:endParaRPr lang="pt-PT" sz="1300" b="1"/>
+          </a:p>
+          <a:p>
+            <a:r>
+              <a:rPr lang="pt-PT" sz="1300" b="1"/>
+              <a:t>Varrimento de Rede</a:t>
+            </a:r>
+            <a:r>
+              <a:rPr lang="pt-PT" sz="1300"/>
+              <a:t>: Utilização do nmap em modo ping scan para identificar o endereço IP ativo da máquina vítima na rede local.</a:t>
+            </a:r>
+          </a:p>
+          <a:p>
+            <a:r>
+              <a:rPr lang="pt-PT" sz="1300" b="1"/>
+              <a:t>Enumeração de Serviço Web e CGI</a:t>
+            </a:r>
+            <a:r>
+              <a:rPr lang="pt-PT" sz="1300"/>
+              <a:t>: Uso do curl com pedidos HTTP do tipo HEAD para confirmar a acessibilidade do servidor web Apache e a existência do script CGI vulnerável.</a:t>
+            </a:r>
+          </a:p>
+          <a:p>
+            <a:r>
+              <a:rPr lang="pt-PT" sz="1300" b="1"/>
+              <a:t>Testes de Penetração Direcionados</a:t>
+            </a:r>
+            <a:r>
+              <a:rPr lang="pt-PT" sz="1300"/>
+              <a:t>: Injeção manual de payloads maliciosos no cabeçalho HTTP User-Agent através do curl.</a:t>
+            </a:r>
+          </a:p>
+          <a:p>
+            <a:r>
+              <a:rPr lang="pt-PT" sz="1300" b="1"/>
+              <a:t>Estabelecimento de Reverse Shell</a:t>
+            </a:r>
+            <a:r>
+              <a:rPr lang="pt-PT" sz="1300"/>
+              <a:t>: Configuração de um listener em nc (Netcat) no sistema atacante e envio de um payload que forçava a máquina vítima a iniciar uma ligação reversa, permitindo obter uma shell interativa remota.</a:t>
+            </a:r>
+          </a:p>
+          <a:p>
+            <a:r>
+              <a:rPr lang="pt-PT" sz="1300" b="1"/>
+              <a:t>Validação Pós-Exploração e Escalada de Privilégios</a:t>
+            </a:r>
+            <a:r>
+              <a:rPr lang="pt-PT" sz="1300"/>
+              <a:t>: Execução de comandos no sistema comprometido para confirmar o sucesso da exploração, seguida da estabilização da shell e tentativa de escalada de privilégios para utilizador root utilizando sudo.</a:t>
+            </a:r>
+          </a:p>
+          <a:p>
+            <a:endParaRPr lang="pt-PT" sz="1300"/>
+          </a:p>
+        </p:txBody>
+      </p:sp>
+      <p:sp>
+        <p:nvSpPr>
+          <p:cNvPr id="16" name="Oval 15">
+            <a:extLst>
+              <a:ext uri="{FF2B5EF4-FFF2-40B4-BE49-F238E27FC236}">
+                <a16:creationId xmlns:a16="http://schemas.microsoft.com/office/drawing/2014/main" id="{8590ADD5-9383-4D3D-9047-3DA2593CCB5D}"/>
+              </a:ext>
+              <a:ext uri="{C183D7F6-B498-43B3-948B-1728B52AA6E4}">
+                <adec:decorative xmlns:adec="http://schemas.microsoft.com/office/drawing/2017/decorative" val="1"/>
+              </a:ext>
+            </a:extLst>
+          </p:cNvPr>
+          <p:cNvSpPr>
+            <a:spLocks noGrp="1" noRot="1" noChangeAspect="1" noMove="1" noResize="1" noEditPoints="1" noAdjustHandles="1" noChangeArrowheads="1" noChangeShapeType="1" noTextEdit="1"/>
+          </p:cNvSpPr>
+          <p:nvPr>
+            <p:extLst>
+              <p:ext uri="{386F3935-93C4-4BCD-93E2-E3B085C9AB24}">
+                <p16:designElem xmlns:p16="http://schemas.microsoft.com/office/powerpoint/2015/main" val="1"/>
+              </p:ext>
+            </p:extLst>
+          </p:nvPr>
+        </p:nvSpPr>
+        <p:spPr>
+          <a:xfrm>
+            <a:off x="6808185" y="3423959"/>
+            <a:ext cx="540822" cy="540822"/>
+          </a:xfrm>
+          <a:prstGeom prst="ellipse">
+            <a:avLst/>
+          </a:prstGeom>
+          <a:noFill/>
+          <a:ln w="127000">
+            <a:solidFill>
+              <a:schemeClr val="accent5"/>
+            </a:solidFill>
+          </a:ln>
+        </p:spPr>
+        <p:style>
+          <a:lnRef idx="2">
+            <a:schemeClr val="accent1">
+              <a:shade val="50000"/>
+            </a:schemeClr>
+          </a:lnRef>
+          <a:fillRef idx="1">
+            <a:schemeClr val="accent1"/>
+          </a:fillRef>
+          <a:effectRef idx="0">
+            <a:schemeClr val="accent1"/>
+          </a:effectRef>
+          <a:fontRef idx="minor">
+            <a:schemeClr val="lt1"/>
+          </a:fontRef>
+        </p:style>
+        <p:txBody>
+          <a:bodyPr rtlCol="0" anchor="ctr"/>
+          <a:lstStyle/>
+          <a:p>
+            <a:pPr algn="ctr"/>
+            <a:endParaRPr lang="en-US"/>
+          </a:p>
+        </p:txBody>
+      </p:sp>
+      <p:pic>
+        <p:nvPicPr>
+          <p:cNvPr id="7" name="Graphic 6" descr="Laptop seguro">
+            <a:extLst>
+              <a:ext uri="{FF2B5EF4-FFF2-40B4-BE49-F238E27FC236}">
+                <a16:creationId xmlns:a16="http://schemas.microsoft.com/office/drawing/2014/main" id="{DB45CA6A-2327-4A05-6FB4-8EF83AB12D42}"/>
+              </a:ext>
+            </a:extLst>
+          </p:cNvPr>
+          <p:cNvPicPr>
+            <a:picLocks noChangeAspect="1"/>
+          </p:cNvPicPr>
+          <p:nvPr/>
+        </p:nvPicPr>
+        <p:blipFill>
+          <a:blip r:embed="rId2">
+            <a:extLst>
+              <a:ext uri="{28A0092B-C50C-407E-A947-70E740481C1C}">
+                <a14:useLocalDpi xmlns:a14="http://schemas.microsoft.com/office/drawing/2010/main" val="0"/>
+              </a:ext>
+              <a:ext uri="{96DAC541-7B7A-43D3-8B79-37D633B846F1}">
+                <asvg:svgBlip xmlns:asvg="http://schemas.microsoft.com/office/drawing/2016/SVG/main" r:embed="rId3"/>
+              </a:ext>
+            </a:extLst>
+          </a:blip>
+          <a:stretch>
+            <a:fillRect/>
+          </a:stretch>
+        </p:blipFill>
+        <p:spPr>
+          <a:xfrm>
+            <a:off x="7887184" y="1216485"/>
+            <a:ext cx="3781051" cy="3781051"/>
+          </a:xfrm>
+          <a:custGeom>
+            <a:avLst/>
+            <a:gdLst/>
+            <a:ahLst/>
+            <a:cxnLst/>
+            <a:rect l="l" t="t" r="r" b="b"/>
+            <a:pathLst>
+              <a:path w="4114800" h="5712488">
+                <a:moveTo>
+                  <a:pt x="133155" y="0"/>
+                </a:moveTo>
+                <a:lnTo>
+                  <a:pt x="3981645" y="0"/>
+                </a:lnTo>
+                <a:cubicBezTo>
+                  <a:pt x="4055184" y="0"/>
+                  <a:pt x="4114800" y="59616"/>
+                  <a:pt x="4114800" y="133155"/>
+                </a:cubicBezTo>
+                <a:lnTo>
+                  <a:pt x="4114800" y="5579333"/>
+                </a:lnTo>
+                <a:cubicBezTo>
+                  <a:pt x="4114800" y="5652872"/>
+                  <a:pt x="4055184" y="5712488"/>
+                  <a:pt x="3981645" y="5712488"/>
+                </a:cubicBezTo>
+                <a:lnTo>
+                  <a:pt x="133155" y="5712488"/>
+                </a:lnTo>
+                <a:cubicBezTo>
+                  <a:pt x="59616" y="5712488"/>
+                  <a:pt x="0" y="5652872"/>
+                  <a:pt x="0" y="5579333"/>
+                </a:cubicBezTo>
+                <a:lnTo>
+                  <a:pt x="0" y="133155"/>
+                </a:lnTo>
+                <a:cubicBezTo>
+                  <a:pt x="0" y="59616"/>
+                  <a:pt x="59616" y="0"/>
+                  <a:pt x="133155" y="0"/>
+                </a:cubicBezTo>
+                <a:close/>
+              </a:path>
+            </a:pathLst>
+          </a:custGeom>
+        </p:spPr>
+      </p:pic>
+      <p:sp>
+        <p:nvSpPr>
+          <p:cNvPr id="18" name="Freeform: Shape 17">
+            <a:extLst>
+              <a:ext uri="{FF2B5EF4-FFF2-40B4-BE49-F238E27FC236}">
+                <a16:creationId xmlns:a16="http://schemas.microsoft.com/office/drawing/2014/main" id="{DABE3E45-88CF-45D8-8D40-C773324D93F6}"/>
+              </a:ext>
+              <a:ext uri="{C183D7F6-B498-43B3-948B-1728B52AA6E4}">
+                <adec:decorative xmlns:adec="http://schemas.microsoft.com/office/drawing/2017/decorative" val="1"/>
+              </a:ext>
+            </a:extLst>
+          </p:cNvPr>
+          <p:cNvSpPr>
+            <a:spLocks noGrp="1" noRot="1" noChangeAspect="1" noMove="1" noResize="1" noEditPoints="1" noAdjustHandles="1" noChangeArrowheads="1" noChangeShapeType="1" noTextEdit="1"/>
+          </p:cNvSpPr>
+          <p:nvPr>
+            <p:extLst>
+              <p:ext uri="{386F3935-93C4-4BCD-93E2-E3B085C9AB24}">
+                <p16:designElem xmlns:p16="http://schemas.microsoft.com/office/powerpoint/2015/main" val="1"/>
+              </p:ext>
+            </p:extLst>
+          </p:nvPr>
+        </p:nvSpPr>
+        <p:spPr>
+          <a:xfrm>
+            <a:off x="6749602" y="1"/>
+            <a:ext cx="2066948" cy="1621879"/>
+          </a:xfrm>
+          <a:custGeom>
+            <a:avLst/>
+            <a:gdLst>
+              <a:gd name="connsiteX0" fmla="*/ 0 w 2066948"/>
+              <a:gd name="connsiteY0" fmla="*/ 0 h 1621879"/>
+              <a:gd name="connsiteX1" fmla="*/ 123825 w 2066948"/>
+              <a:gd name="connsiteY1" fmla="*/ 0 h 1621879"/>
+              <a:gd name="connsiteX2" fmla="*/ 123825 w 2066948"/>
+              <a:gd name="connsiteY2" fmla="*/ 1452620 h 1621879"/>
+              <a:gd name="connsiteX3" fmla="*/ 1881378 w 2066948"/>
+              <a:gd name="connsiteY3" fmla="*/ 436017 h 1621879"/>
+              <a:gd name="connsiteX4" fmla="*/ 1127572 w 2066948"/>
+              <a:gd name="connsiteY4" fmla="*/ 0 h 1621879"/>
+              <a:gd name="connsiteX5" fmla="*/ 1374887 w 2066948"/>
+              <a:gd name="connsiteY5" fmla="*/ 0 h 1621879"/>
+              <a:gd name="connsiteX6" fmla="*/ 2035969 w 2066948"/>
+              <a:gd name="connsiteY6" fmla="*/ 382391 h 1621879"/>
+              <a:gd name="connsiteX7" fmla="*/ 2058648 w 2066948"/>
+              <a:gd name="connsiteY7" fmla="*/ 466963 h 1621879"/>
+              <a:gd name="connsiteX8" fmla="*/ 2035969 w 2066948"/>
+              <a:gd name="connsiteY8" fmla="*/ 489642 h 1621879"/>
+              <a:gd name="connsiteX9" fmla="*/ 92869 w 2066948"/>
+              <a:gd name="connsiteY9" fmla="*/ 1613592 h 1621879"/>
+              <a:gd name="connsiteX10" fmla="*/ 61913 w 2066948"/>
+              <a:gd name="connsiteY10" fmla="*/ 1621879 h 1621879"/>
+              <a:gd name="connsiteX11" fmla="*/ 0 w 2066948"/>
+              <a:gd name="connsiteY11" fmla="*/ 1559967 h 1621879"/>
+            </a:gdLst>
+            <a:ahLst/>
+            <a:cxnLst>
+              <a:cxn ang="0">
+                <a:pos x="connsiteX0" y="connsiteY0"/>
+              </a:cxn>
+              <a:cxn ang="0">
+                <a:pos x="connsiteX1" y="connsiteY1"/>
+              </a:cxn>
+              <a:cxn ang="0">
+                <a:pos x="connsiteX2" y="connsiteY2"/>
+              </a:cxn>
+              <a:cxn ang="0">
+                <a:pos x="connsiteX3" y="connsiteY3"/>
+              </a:cxn>
+              <a:cxn ang="0">
+                <a:pos x="connsiteX4" y="connsiteY4"/>
+              </a:cxn>
+              <a:cxn ang="0">
+                <a:pos x="connsiteX5" y="connsiteY5"/>
+              </a:cxn>
+              <a:cxn ang="0">
+                <a:pos x="connsiteX6" y="connsiteY6"/>
+              </a:cxn>
+              <a:cxn ang="0">
+                <a:pos x="connsiteX7" y="connsiteY7"/>
+              </a:cxn>
+              <a:cxn ang="0">
+                <a:pos x="connsiteX8" y="connsiteY8"/>
+              </a:cxn>
+              <a:cxn ang="0">
+                <a:pos x="connsiteX9" y="connsiteY9"/>
+              </a:cxn>
+              <a:cxn ang="0">
+                <a:pos x="connsiteX10" y="connsiteY10"/>
+              </a:cxn>
+              <a:cxn ang="0">
+                <a:pos x="connsiteX11" y="connsiteY11"/>
+              </a:cxn>
+            </a:cxnLst>
+            <a:rect l="l" t="t" r="r" b="b"/>
+            <a:pathLst>
+              <a:path w="2066948" h="1621879">
+                <a:moveTo>
+                  <a:pt x="0" y="0"/>
+                </a:moveTo>
+                <a:lnTo>
+                  <a:pt x="123825" y="0"/>
+                </a:lnTo>
+                <a:lnTo>
+                  <a:pt x="123825" y="1452620"/>
+                </a:lnTo>
+                <a:lnTo>
+                  <a:pt x="1881378" y="436017"/>
+                </a:lnTo>
+                <a:lnTo>
+                  <a:pt x="1127572" y="0"/>
+                </a:lnTo>
+                <a:lnTo>
+                  <a:pt x="1374887" y="0"/>
+                </a:lnTo>
+                <a:lnTo>
+                  <a:pt x="2035969" y="382391"/>
+                </a:lnTo>
+                <a:cubicBezTo>
+                  <a:pt x="2065582" y="399479"/>
+                  <a:pt x="2075745" y="437340"/>
+                  <a:pt x="2058648" y="466963"/>
+                </a:cubicBezTo>
+                <a:cubicBezTo>
+                  <a:pt x="2053219" y="476384"/>
+                  <a:pt x="2045389" y="484204"/>
+                  <a:pt x="2035969" y="489642"/>
+                </a:cubicBezTo>
+                <a:lnTo>
+                  <a:pt x="92869" y="1613592"/>
+                </a:lnTo>
+                <a:cubicBezTo>
+                  <a:pt x="83458" y="1619031"/>
+                  <a:pt x="72780" y="1621889"/>
+                  <a:pt x="61913" y="1621879"/>
+                </a:cubicBezTo>
+                <a:cubicBezTo>
+                  <a:pt x="27719" y="1621879"/>
+                  <a:pt x="0" y="1594161"/>
+                  <a:pt x="0" y="1559967"/>
+                </a:cubicBezTo>
+                <a:close/>
+              </a:path>
+            </a:pathLst>
+          </a:custGeom>
+          <a:solidFill>
+            <a:schemeClr val="accent6"/>
+          </a:solidFill>
+          <a:ln w="9525" cap="flat">
+            <a:noFill/>
+            <a:prstDash val="solid"/>
+            <a:miter/>
+          </a:ln>
+        </p:spPr>
+        <p:txBody>
+          <a:bodyPr rtlCol="0" anchor="ctr"/>
+          <a:lstStyle/>
+          <a:p>
+            <a:endParaRPr lang="en-US"/>
+          </a:p>
+        </p:txBody>
+      </p:sp>
+      <p:cxnSp>
+        <p:nvCxnSpPr>
+          <p:cNvPr id="20" name="Straight Connector 19">
+            <a:extLst>
+              <a:ext uri="{FF2B5EF4-FFF2-40B4-BE49-F238E27FC236}">
+                <a16:creationId xmlns:a16="http://schemas.microsoft.com/office/drawing/2014/main" id="{49CD1692-827B-4C8D-B4A1-134FD04CF45C}"/>
+              </a:ext>
+              <a:ext uri="{C183D7F6-B498-43B3-948B-1728B52AA6E4}">
+                <adec:decorative xmlns:adec="http://schemas.microsoft.com/office/drawing/2017/decorative" val="1"/>
+              </a:ext>
+            </a:extLst>
+          </p:cNvPr>
+          <p:cNvCxnSpPr>
+            <a:cxnSpLocks noGrp="1" noRot="1" noChangeAspect="1" noMove="1" noResize="1" noEditPoints="1" noAdjustHandles="1" noChangeArrowheads="1" noChangeShapeType="1"/>
+          </p:cNvCxnSpPr>
+          <p:nvPr>
+            <p:extLst>
+              <p:ext uri="{386F3935-93C4-4BCD-93E2-E3B085C9AB24}">
+                <p16:designElem xmlns:p16="http://schemas.microsoft.com/office/powerpoint/2015/main" val="1"/>
+              </p:ext>
+            </p:extLst>
+          </p:nvPr>
+        </p:nvCxnSpPr>
+        <p:spPr>
+          <a:xfrm>
+            <a:off x="12138745" y="1027906"/>
+            <a:ext cx="0" cy="1597708"/>
+          </a:xfrm>
+          <a:prstGeom prst="line">
+            <a:avLst/>
+          </a:prstGeom>
+          <a:ln w="127000" cap="rnd">
+            <a:solidFill>
+              <a:schemeClr val="accent4"/>
+            </a:solidFill>
+            <a:prstDash val="dash"/>
+          </a:ln>
+        </p:spPr>
+        <p:style>
+          <a:lnRef idx="1">
+            <a:schemeClr val="accent1"/>
+          </a:lnRef>
+          <a:fillRef idx="0">
+            <a:schemeClr val="accent1"/>
+          </a:fillRef>
+          <a:effectRef idx="0">
+            <a:schemeClr val="accent1"/>
+          </a:effectRef>
+          <a:fontRef idx="minor">
+            <a:schemeClr val="tx1"/>
+          </a:fontRef>
+        </p:style>
+      </p:cxnSp>
+      <p:sp>
+        <p:nvSpPr>
+          <p:cNvPr id="22" name="Freeform: Shape 21">
+            <a:extLst>
+              <a:ext uri="{FF2B5EF4-FFF2-40B4-BE49-F238E27FC236}">
+                <a16:creationId xmlns:a16="http://schemas.microsoft.com/office/drawing/2014/main" id="{B91ECDA9-56DC-4270-8F33-01C5637B8CEB}"/>
+              </a:ext>
+              <a:ext uri="{C183D7F6-B498-43B3-948B-1728B52AA6E4}">
+                <adec:decorative xmlns:adec="http://schemas.microsoft.com/office/drawing/2017/decorative" val="1"/>
+              </a:ext>
+            </a:extLst>
+          </p:cNvPr>
+          <p:cNvSpPr>
+            <a:spLocks noGrp="1" noRot="1" noChangeAspect="1" noMove="1" noResize="1" noEditPoints="1" noAdjustHandles="1" noChangeArrowheads="1" noChangeShapeType="1" noTextEdit="1"/>
+          </p:cNvSpPr>
+          <p:nvPr>
+            <p:extLst>
+              <p:ext uri="{386F3935-93C4-4BCD-93E2-E3B085C9AB24}">
+                <p16:designElem xmlns:p16="http://schemas.microsoft.com/office/powerpoint/2015/main" val="1"/>
+              </p:ext>
+            </p:extLst>
+          </p:nvPr>
+        </p:nvSpPr>
+        <p:spPr>
+          <a:xfrm rot="20463438">
+            <a:off x="7456580" y="5166682"/>
+            <a:ext cx="1835725" cy="2024785"/>
+          </a:xfrm>
+          <a:custGeom>
+            <a:avLst/>
+            <a:gdLst>
+              <a:gd name="connsiteX0" fmla="*/ 1801138 w 1835725"/>
+              <a:gd name="connsiteY0" fmla="*/ 1622662 h 2024785"/>
+              <a:gd name="connsiteX1" fmla="*/ 1835717 w 1835725"/>
+              <a:gd name="connsiteY1" fmla="*/ 1680254 h 2024785"/>
+              <a:gd name="connsiteX2" fmla="*/ 1812568 w 1835725"/>
+              <a:gd name="connsiteY2" fmla="*/ 1877193 h 2024785"/>
+              <a:gd name="connsiteX3" fmla="*/ 1776210 w 1835725"/>
+              <a:gd name="connsiteY3" fmla="*/ 2024785 h 2024785"/>
+              <a:gd name="connsiteX4" fmla="*/ 1655772 w 1835725"/>
+              <a:gd name="connsiteY4" fmla="*/ 1983449 h 2024785"/>
+              <a:gd name="connsiteX5" fmla="*/ 1687591 w 1835725"/>
+              <a:gd name="connsiteY5" fmla="*/ 1854495 h 2024785"/>
+              <a:gd name="connsiteX6" fmla="*/ 1708939 w 1835725"/>
+              <a:gd name="connsiteY6" fmla="*/ 1673301 h 2024785"/>
+              <a:gd name="connsiteX7" fmla="*/ 1778129 w 1835725"/>
+              <a:gd name="connsiteY7" fmla="*/ 1615979 h 2024785"/>
+              <a:gd name="connsiteX8" fmla="*/ 1801138 w 1835725"/>
+              <a:gd name="connsiteY8" fmla="*/ 1622662 h 2024785"/>
+              <a:gd name="connsiteX9" fmla="*/ 1585229 w 1835725"/>
+              <a:gd name="connsiteY9" fmla="*/ 764759 h 2024785"/>
+              <a:gd name="connsiteX10" fmla="*/ 1623024 w 1835725"/>
+              <a:gd name="connsiteY10" fmla="*/ 792810 h 2024785"/>
+              <a:gd name="connsiteX11" fmla="*/ 1777614 w 1835725"/>
+              <a:gd name="connsiteY11" fmla="*/ 1157141 h 2024785"/>
+              <a:gd name="connsiteX12" fmla="*/ 1733799 w 1835725"/>
+              <a:gd name="connsiteY12" fmla="*/ 1235532 h 2024785"/>
+              <a:gd name="connsiteX13" fmla="*/ 1716464 w 1835725"/>
+              <a:gd name="connsiteY13" fmla="*/ 1237722 h 2024785"/>
+              <a:gd name="connsiteX14" fmla="*/ 1716464 w 1835725"/>
+              <a:gd name="connsiteY14" fmla="*/ 1237913 h 2024785"/>
+              <a:gd name="connsiteX15" fmla="*/ 1655409 w 1835725"/>
+              <a:gd name="connsiteY15" fmla="*/ 1191717 h 2024785"/>
+              <a:gd name="connsiteX16" fmla="*/ 1513200 w 1835725"/>
+              <a:gd name="connsiteY16" fmla="*/ 856627 h 2024785"/>
+              <a:gd name="connsiteX17" fmla="*/ 1538499 w 1835725"/>
+              <a:gd name="connsiteY17" fmla="*/ 770415 h 2024785"/>
+              <a:gd name="connsiteX18" fmla="*/ 1585229 w 1835725"/>
+              <a:gd name="connsiteY18" fmla="*/ 764759 h 2024785"/>
+              <a:gd name="connsiteX19" fmla="*/ 477919 w 1835725"/>
+              <a:gd name="connsiteY19" fmla="*/ 21437 h 2024785"/>
+              <a:gd name="connsiteX20" fmla="*/ 509236 w 1835725"/>
+              <a:gd name="connsiteY20" fmla="*/ 84182 h 2024785"/>
+              <a:gd name="connsiteX21" fmla="*/ 445829 w 1835725"/>
+              <a:gd name="connsiteY21" fmla="*/ 139871 h 2024785"/>
+              <a:gd name="connsiteX22" fmla="*/ 437447 w 1835725"/>
+              <a:gd name="connsiteY22" fmla="*/ 139395 h 2024785"/>
+              <a:gd name="connsiteX23" fmla="*/ 73211 w 1835725"/>
+              <a:gd name="connsiteY23" fmla="*/ 137204 h 2024785"/>
+              <a:gd name="connsiteX24" fmla="*/ 749 w 1835725"/>
+              <a:gd name="connsiteY24" fmla="*/ 84082 h 2024785"/>
+              <a:gd name="connsiteX25" fmla="*/ 53871 w 1835725"/>
+              <a:gd name="connsiteY25" fmla="*/ 11621 h 2024785"/>
+              <a:gd name="connsiteX26" fmla="*/ 58352 w 1835725"/>
+              <a:gd name="connsiteY26" fmla="*/ 11093 h 2024785"/>
+              <a:gd name="connsiteX27" fmla="*/ 454020 w 1835725"/>
+              <a:gd name="connsiteY27" fmla="*/ 13474 h 2024785"/>
+              <a:gd name="connsiteX28" fmla="*/ 477919 w 1835725"/>
+              <a:gd name="connsiteY28" fmla="*/ 21437 h 2024785"/>
+              <a:gd name="connsiteX29" fmla="*/ 957797 w 1835725"/>
+              <a:gd name="connsiteY29" fmla="*/ 167970 h 2024785"/>
+              <a:gd name="connsiteX30" fmla="*/ 1286982 w 1835725"/>
+              <a:gd name="connsiteY30" fmla="*/ 387616 h 2024785"/>
+              <a:gd name="connsiteX31" fmla="*/ 1293725 w 1835725"/>
+              <a:gd name="connsiteY31" fmla="*/ 477075 h 2024785"/>
+              <a:gd name="connsiteX32" fmla="*/ 1245453 w 1835725"/>
+              <a:gd name="connsiteY32" fmla="*/ 499154 h 2024785"/>
+              <a:gd name="connsiteX33" fmla="*/ 1245167 w 1835725"/>
+              <a:gd name="connsiteY33" fmla="*/ 499154 h 2024785"/>
+              <a:gd name="connsiteX34" fmla="*/ 1203638 w 1835725"/>
+              <a:gd name="connsiteY34" fmla="*/ 484104 h 2024785"/>
+              <a:gd name="connsiteX35" fmla="*/ 900647 w 1835725"/>
+              <a:gd name="connsiteY35" fmla="*/ 281508 h 2024785"/>
+              <a:gd name="connsiteX36" fmla="*/ 872454 w 1835725"/>
+              <a:gd name="connsiteY36" fmla="*/ 196164 h 2024785"/>
+              <a:gd name="connsiteX37" fmla="*/ 957797 w 1835725"/>
+              <a:gd name="connsiteY37" fmla="*/ 167970 h 2024785"/>
             </a:gdLst>
             <a:ahLst/>
             <a:cxnLst>
@@ -18959,207 +20164,368 @@
               <a:cxn ang="0">
                 <a:pos x="connsiteX16" y="connsiteY16"/>
               </a:cxn>
+              <a:cxn ang="0">
+                <a:pos x="connsiteX17" y="connsiteY17"/>
+              </a:cxn>
+              <a:cxn ang="0">
+                <a:pos x="connsiteX18" y="connsiteY18"/>
+              </a:cxn>
+              <a:cxn ang="0">
+                <a:pos x="connsiteX19" y="connsiteY19"/>
+              </a:cxn>
+              <a:cxn ang="0">
+                <a:pos x="connsiteX20" y="connsiteY20"/>
+              </a:cxn>
+              <a:cxn ang="0">
+                <a:pos x="connsiteX21" y="connsiteY21"/>
+              </a:cxn>
+              <a:cxn ang="0">
+                <a:pos x="connsiteX22" y="connsiteY22"/>
+              </a:cxn>
+              <a:cxn ang="0">
+                <a:pos x="connsiteX23" y="connsiteY23"/>
+              </a:cxn>
+              <a:cxn ang="0">
+                <a:pos x="connsiteX24" y="connsiteY24"/>
+              </a:cxn>
+              <a:cxn ang="0">
+                <a:pos x="connsiteX25" y="connsiteY25"/>
+              </a:cxn>
+              <a:cxn ang="0">
+                <a:pos x="connsiteX26" y="connsiteY26"/>
+              </a:cxn>
+              <a:cxn ang="0">
+                <a:pos x="connsiteX27" y="connsiteY27"/>
+              </a:cxn>
+              <a:cxn ang="0">
+                <a:pos x="connsiteX28" y="connsiteY28"/>
+              </a:cxn>
+              <a:cxn ang="0">
+                <a:pos x="connsiteX29" y="connsiteY29"/>
+              </a:cxn>
+              <a:cxn ang="0">
+                <a:pos x="connsiteX30" y="connsiteY30"/>
+              </a:cxn>
+              <a:cxn ang="0">
+                <a:pos x="connsiteX31" y="connsiteY31"/>
+              </a:cxn>
+              <a:cxn ang="0">
+                <a:pos x="connsiteX32" y="connsiteY32"/>
+              </a:cxn>
+              <a:cxn ang="0">
+                <a:pos x="connsiteX33" y="connsiteY33"/>
+              </a:cxn>
+              <a:cxn ang="0">
+                <a:pos x="connsiteX34" y="connsiteY34"/>
+              </a:cxn>
+              <a:cxn ang="0">
+                <a:pos x="connsiteX35" y="connsiteY35"/>
+              </a:cxn>
+              <a:cxn ang="0">
+                <a:pos x="connsiteX36" y="connsiteY36"/>
+              </a:cxn>
+              <a:cxn ang="0">
+                <a:pos x="connsiteX37" y="connsiteY37"/>
+              </a:cxn>
             </a:cxnLst>
             <a:rect l="l" t="t" r="r" b="b"/>
             <a:pathLst>
-              <a:path w="4243589" h="18288" fill="none" extrusionOk="0">
+              <a:path w="1835725" h="2024785">
                 <a:moveTo>
-                  <a:pt x="0" y="0"/>
+                  <a:pt x="1801138" y="1622662"/>
                 </a:moveTo>
                 <a:cubicBezTo>
-                  <a:pt x="213395" y="-21006"/>
-                  <a:pt x="307421" y="-18116"/>
-                  <a:pt x="478919" y="0"/>
-                </a:cubicBezTo>
-                <a:cubicBezTo>
-                  <a:pt x="650417" y="18116"/>
-                  <a:pt x="831092" y="-21237"/>
-                  <a:pt x="957839" y="0"/>
-                </a:cubicBezTo>
-                <a:cubicBezTo>
-                  <a:pt x="1084586" y="21237"/>
-                  <a:pt x="1301682" y="25124"/>
-                  <a:pt x="1521630" y="0"/>
-                </a:cubicBezTo>
-                <a:cubicBezTo>
-                  <a:pt x="1741578" y="-25124"/>
-                  <a:pt x="1970269" y="-29139"/>
-                  <a:pt x="2212729" y="0"/>
-                </a:cubicBezTo>
-                <a:cubicBezTo>
-                  <a:pt x="2455189" y="29139"/>
-                  <a:pt x="2558847" y="-4796"/>
-                  <a:pt x="2734084" y="0"/>
-                </a:cubicBezTo>
-                <a:cubicBezTo>
-                  <a:pt x="2909321" y="4796"/>
-                  <a:pt x="3097217" y="-13409"/>
-                  <a:pt x="3255439" y="0"/>
-                </a:cubicBezTo>
-                <a:cubicBezTo>
-                  <a:pt x="3413662" y="13409"/>
-                  <a:pt x="3979999" y="-10121"/>
-                  <a:pt x="4243589" y="0"/>
-                </a:cubicBezTo>
-                <a:cubicBezTo>
-                  <a:pt x="4244484" y="8974"/>
-                  <a:pt x="4243043" y="9359"/>
-                  <a:pt x="4243589" y="18288"/>
-                </a:cubicBezTo>
-                <a:cubicBezTo>
-                  <a:pt x="4058777" y="31246"/>
-                  <a:pt x="3910348" y="3158"/>
-                  <a:pt x="3594926" y="18288"/>
-                </a:cubicBezTo>
-                <a:cubicBezTo>
-                  <a:pt x="3279504" y="33418"/>
-                  <a:pt x="3319955" y="-3977"/>
-                  <a:pt x="3073571" y="18288"/>
-                </a:cubicBezTo>
-                <a:cubicBezTo>
-                  <a:pt x="2827187" y="40553"/>
-                  <a:pt x="2767387" y="1863"/>
-                  <a:pt x="2552216" y="18288"/>
-                </a:cubicBezTo>
-                <a:cubicBezTo>
-                  <a:pt x="2337046" y="34713"/>
-                  <a:pt x="2181871" y="19527"/>
-                  <a:pt x="1903553" y="18288"/>
-                </a:cubicBezTo>
-                <a:cubicBezTo>
-                  <a:pt x="1625235" y="17049"/>
-                  <a:pt x="1557672" y="24174"/>
-                  <a:pt x="1212454" y="18288"/>
-                </a:cubicBezTo>
-                <a:cubicBezTo>
-                  <a:pt x="867236" y="12402"/>
-                  <a:pt x="874382" y="15627"/>
-                  <a:pt x="733535" y="18288"/>
-                </a:cubicBezTo>
-                <a:cubicBezTo>
-                  <a:pt x="592688" y="20949"/>
-                  <a:pt x="183477" y="14753"/>
-                  <a:pt x="0" y="18288"/>
-                </a:cubicBezTo>
-                <a:cubicBezTo>
-                  <a:pt x="-229" y="14222"/>
-                  <a:pt x="509" y="5816"/>
-                  <a:pt x="0" y="0"/>
+                  <a:pt x="1822105" y="1633400"/>
+                  <a:pt x="1836117" y="1655372"/>
+                  <a:pt x="1835717" y="1680254"/>
+                </a:cubicBezTo>
+                <a:cubicBezTo>
+                  <a:pt x="1832093" y="1746382"/>
+                  <a:pt x="1824354" y="1812154"/>
+                  <a:pt x="1812568" y="1877193"/>
+                </a:cubicBezTo>
+                <a:lnTo>
+                  <a:pt x="1776210" y="2024785"/>
+                </a:lnTo>
+                <a:lnTo>
+                  <a:pt x="1655772" y="1983449"/>
+                </a:lnTo>
+                <a:lnTo>
+                  <a:pt x="1687591" y="1854495"/>
+                </a:lnTo>
+                <a:cubicBezTo>
+                  <a:pt x="1698455" y="1794657"/>
+                  <a:pt x="1705590" y="1734142"/>
+                  <a:pt x="1708939" y="1673301"/>
+                </a:cubicBezTo>
+                <a:cubicBezTo>
+                  <a:pt x="1712216" y="1638363"/>
+                  <a:pt x="1743190" y="1612703"/>
+                  <a:pt x="1778129" y="1615979"/>
+                </a:cubicBezTo>
+                <a:cubicBezTo>
+                  <a:pt x="1786387" y="1616753"/>
+                  <a:pt x="1794149" y="1619084"/>
+                  <a:pt x="1801138" y="1622662"/>
                 </a:cubicBezTo>
                 <a:close/>
-              </a:path>
-              <a:path w="4243589" h="18288" stroke="0" extrusionOk="0">
                 <a:moveTo>
-                  <a:pt x="0" y="0"/>
+                  <a:pt x="1585229" y="764759"/>
                 </a:moveTo>
                 <a:cubicBezTo>
-                  <a:pt x="143690" y="16630"/>
-                  <a:pt x="266667" y="14847"/>
-                  <a:pt x="521355" y="0"/>
-                </a:cubicBezTo>
-                <a:cubicBezTo>
-                  <a:pt x="776043" y="-14847"/>
-                  <a:pt x="814491" y="-17363"/>
-                  <a:pt x="1000275" y="0"/>
-                </a:cubicBezTo>
-                <a:cubicBezTo>
-                  <a:pt x="1186059" y="17363"/>
-                  <a:pt x="1352504" y="-23507"/>
-                  <a:pt x="1521630" y="0"/>
-                </a:cubicBezTo>
-                <a:cubicBezTo>
-                  <a:pt x="1690756" y="23507"/>
-                  <a:pt x="1889525" y="5871"/>
-                  <a:pt x="2127857" y="0"/>
-                </a:cubicBezTo>
-                <a:cubicBezTo>
-                  <a:pt x="2366189" y="-5871"/>
-                  <a:pt x="2620628" y="-27997"/>
-                  <a:pt x="2776520" y="0"/>
-                </a:cubicBezTo>
-                <a:cubicBezTo>
-                  <a:pt x="2932412" y="27997"/>
-                  <a:pt x="3131683" y="-25073"/>
-                  <a:pt x="3467618" y="0"/>
-                </a:cubicBezTo>
-                <a:cubicBezTo>
-                  <a:pt x="3803553" y="25073"/>
-                  <a:pt x="4017371" y="3071"/>
-                  <a:pt x="4243589" y="0"/>
-                </a:cubicBezTo>
-                <a:cubicBezTo>
-                  <a:pt x="4243134" y="6162"/>
-                  <a:pt x="4243492" y="11775"/>
-                  <a:pt x="4243589" y="18288"/>
-                </a:cubicBezTo>
-                <a:cubicBezTo>
-                  <a:pt x="4017834" y="-5779"/>
-                  <a:pt x="3834586" y="13376"/>
-                  <a:pt x="3594926" y="18288"/>
-                </a:cubicBezTo>
-                <a:cubicBezTo>
-                  <a:pt x="3355266" y="23200"/>
-                  <a:pt x="3204179" y="2869"/>
-                  <a:pt x="2903827" y="18288"/>
-                </a:cubicBezTo>
-                <a:cubicBezTo>
-                  <a:pt x="2603475" y="33707"/>
-                  <a:pt x="2526187" y="46187"/>
-                  <a:pt x="2212729" y="18288"/>
-                </a:cubicBezTo>
-                <a:cubicBezTo>
-                  <a:pt x="1899271" y="-9611"/>
-                  <a:pt x="1966289" y="29692"/>
-                  <a:pt x="1733809" y="18288"/>
-                </a:cubicBezTo>
-                <a:cubicBezTo>
-                  <a:pt x="1501329" y="6884"/>
-                  <a:pt x="1343612" y="12492"/>
-                  <a:pt x="1085146" y="18288"/>
-                </a:cubicBezTo>
-                <a:cubicBezTo>
-                  <a:pt x="826680" y="24084"/>
-                  <a:pt x="778184" y="35607"/>
-                  <a:pt x="521355" y="18288"/>
-                </a:cubicBezTo>
-                <a:cubicBezTo>
-                  <a:pt x="264526" y="969"/>
-                  <a:pt x="120277" y="4268"/>
-                  <a:pt x="0" y="18288"/>
-                </a:cubicBezTo>
-                <a:cubicBezTo>
-                  <a:pt x="766" y="10800"/>
-                  <a:pt x="-457" y="8180"/>
-                  <a:pt x="0" y="0"/>
+                  <a:pt x="1600438" y="768789"/>
+                  <a:pt x="1614156" y="778436"/>
+                  <a:pt x="1623024" y="792810"/>
+                </a:cubicBezTo>
+                <a:cubicBezTo>
+                  <a:pt x="1689575" y="907319"/>
+                  <a:pt x="1741505" y="1029715"/>
+                  <a:pt x="1777614" y="1157141"/>
+                </a:cubicBezTo>
+                <a:cubicBezTo>
+                  <a:pt x="1787149" y="1190888"/>
+                  <a:pt x="1767537" y="1225969"/>
+                  <a:pt x="1733799" y="1235532"/>
+                </a:cubicBezTo>
+                <a:cubicBezTo>
+                  <a:pt x="1728151" y="1237046"/>
+                  <a:pt x="1722312" y="1237780"/>
+                  <a:pt x="1716464" y="1237722"/>
+                </a:cubicBezTo>
+                <a:lnTo>
+                  <a:pt x="1716464" y="1237913"/>
+                </a:lnTo>
+                <a:cubicBezTo>
+                  <a:pt x="1688070" y="1237913"/>
+                  <a:pt x="1663124" y="1219044"/>
+                  <a:pt x="1655409" y="1191717"/>
+                </a:cubicBezTo>
+                <a:cubicBezTo>
+                  <a:pt x="1622214" y="1074512"/>
+                  <a:pt x="1574437" y="961936"/>
+                  <a:pt x="1513200" y="856627"/>
+                </a:cubicBezTo>
+                <a:cubicBezTo>
+                  <a:pt x="1496379" y="825834"/>
+                  <a:pt x="1507704" y="787236"/>
+                  <a:pt x="1538499" y="770415"/>
+                </a:cubicBezTo>
+                <a:cubicBezTo>
+                  <a:pt x="1553325" y="762319"/>
+                  <a:pt x="1570022" y="760730"/>
+                  <a:pt x="1585229" y="764759"/>
+                </a:cubicBezTo>
+                <a:close/>
+                <a:moveTo>
+                  <a:pt x="477919" y="21437"/>
+                </a:moveTo>
+                <a:cubicBezTo>
+                  <a:pt x="499341" y="33775"/>
+                  <a:pt x="512445" y="58102"/>
+                  <a:pt x="509236" y="84182"/>
+                </a:cubicBezTo>
+                <a:cubicBezTo>
+                  <a:pt x="505303" y="116151"/>
+                  <a:pt x="478038" y="140098"/>
+                  <a:pt x="445829" y="139871"/>
+                </a:cubicBezTo>
+                <a:cubicBezTo>
+                  <a:pt x="443027" y="139899"/>
+                  <a:pt x="440227" y="139740"/>
+                  <a:pt x="437447" y="139395"/>
+                </a:cubicBezTo>
+                <a:cubicBezTo>
+                  <a:pt x="316592" y="123615"/>
+                  <a:pt x="194247" y="122878"/>
+                  <a:pt x="73211" y="137204"/>
+                </a:cubicBezTo>
+                <a:cubicBezTo>
+                  <a:pt x="38532" y="142545"/>
+                  <a:pt x="6090" y="118762"/>
+                  <a:pt x="749" y="84082"/>
+                </a:cubicBezTo>
+                <a:cubicBezTo>
+                  <a:pt x="-4591" y="49403"/>
+                  <a:pt x="19192" y="16961"/>
+                  <a:pt x="53871" y="11621"/>
+                </a:cubicBezTo>
+                <a:cubicBezTo>
+                  <a:pt x="55358" y="11392"/>
+                  <a:pt x="56852" y="11216"/>
+                  <a:pt x="58352" y="11093"/>
+                </a:cubicBezTo>
+                <a:cubicBezTo>
+                  <a:pt x="189834" y="-4456"/>
+                  <a:pt x="322735" y="-3656"/>
+                  <a:pt x="454020" y="13474"/>
+                </a:cubicBezTo>
+                <a:cubicBezTo>
+                  <a:pt x="462713" y="14543"/>
+                  <a:pt x="470778" y="17324"/>
+                  <a:pt x="477919" y="21437"/>
+                </a:cubicBezTo>
+                <a:close/>
+                <a:moveTo>
+                  <a:pt x="957797" y="167970"/>
+                </a:moveTo>
+                <a:cubicBezTo>
+                  <a:pt x="1076184" y="227289"/>
+                  <a:pt x="1186759" y="301068"/>
+                  <a:pt x="1286982" y="387616"/>
+                </a:cubicBezTo>
+                <a:cubicBezTo>
+                  <a:pt x="1313547" y="410457"/>
+                  <a:pt x="1316566" y="450510"/>
+                  <a:pt x="1293725" y="477075"/>
+                </a:cubicBezTo>
+                <a:cubicBezTo>
+                  <a:pt x="1281638" y="491137"/>
+                  <a:pt x="1263998" y="499204"/>
+                  <a:pt x="1245453" y="499154"/>
+                </a:cubicBezTo>
+                <a:lnTo>
+                  <a:pt x="1245167" y="499154"/>
+                </a:lnTo>
+                <a:cubicBezTo>
+                  <a:pt x="1229965" y="499301"/>
+                  <a:pt x="1215220" y="493956"/>
+                  <a:pt x="1203638" y="484104"/>
+                </a:cubicBezTo>
+                <a:cubicBezTo>
+                  <a:pt x="1111407" y="404300"/>
+                  <a:pt x="1009633" y="336248"/>
+                  <a:pt x="900647" y="281508"/>
+                </a:cubicBezTo>
+                <a:cubicBezTo>
+                  <a:pt x="869295" y="265726"/>
+                  <a:pt x="856672" y="227516"/>
+                  <a:pt x="872454" y="196164"/>
+                </a:cubicBezTo>
+                <a:cubicBezTo>
+                  <a:pt x="888235" y="164811"/>
+                  <a:pt x="926445" y="152188"/>
+                  <a:pt x="957797" y="167970"/>
                 </a:cubicBezTo>
                 <a:close/>
               </a:path>
             </a:pathLst>
           </a:custGeom>
           <a:solidFill>
-            <a:srgbClr val="FFFFFF">
-              <a:alpha val="75000"/>
-            </a:srgbClr>
+            <a:schemeClr val="accent4"/>
           </a:solidFill>
-          <a:ln w="44450" cap="rnd">
-            <a:solidFill>
-              <a:schemeClr val="bg1">
-                <a:alpha val="75000"/>
-              </a:schemeClr>
-            </a:solidFill>
-            <a:round/>
+          <a:ln w="9525" cap="flat">
+            <a:noFill/>
+            <a:prstDash val="solid"/>
+            <a:miter/>
+          </a:ln>
+        </p:spPr>
+        <p:txBody>
+          <a:bodyPr rtlCol="0" anchor="ctr"/>
+          <a:lstStyle/>
+          <a:p>
+            <a:endParaRPr lang="en-US"/>
+          </a:p>
+        </p:txBody>
+      </p:sp>
+      <p:sp>
+        <p:nvSpPr>
+          <p:cNvPr id="24" name="Freeform: Shape 23">
             <a:extLst>
-              <a:ext uri="{C807C97D-BFC1-408E-A445-0C87EB9F89A2}">
-                <ask:lineSketchStyleProps xmlns:ask="http://schemas.microsoft.com/office/drawing/2018/sketchyshapes" sd="2727557108">
-                  <a:prstGeom prst="rect">
-                    <a:avLst/>
-                  </a:prstGeom>
-                  <ask:type>
-                    <ask:lineSketchFreehand/>
-                  </ask:type>
-                </ask:lineSketchStyleProps>
+              <a:ext uri="{FF2B5EF4-FFF2-40B4-BE49-F238E27FC236}">
+                <a16:creationId xmlns:a16="http://schemas.microsoft.com/office/drawing/2014/main" id="{75F47824-961D-465D-84F9-EAE11BC6173B}"/>
+              </a:ext>
+              <a:ext uri="{C183D7F6-B498-43B3-948B-1728B52AA6E4}">
+                <adec:decorative xmlns:adec="http://schemas.microsoft.com/office/drawing/2017/decorative" val="1"/>
               </a:ext>
             </a:extLst>
+          </p:cNvPr>
+          <p:cNvSpPr>
+            <a:spLocks noGrp="1" noRot="1" noChangeAspect="1" noMove="1" noResize="1" noEditPoints="1" noAdjustHandles="1" noChangeArrowheads="1" noChangeShapeType="1" noTextEdit="1"/>
+          </p:cNvSpPr>
+          <p:nvPr>
+            <p:extLst>
+              <p:ext uri="{386F3935-93C4-4BCD-93E2-E3B085C9AB24}">
+                <p16:designElem xmlns:p16="http://schemas.microsoft.com/office/powerpoint/2015/main" val="1"/>
+              </p:ext>
+            </p:extLst>
+          </p:nvPr>
+        </p:nvSpPr>
+        <p:spPr>
+          <a:xfrm>
+            <a:off x="6809527" y="6033795"/>
+            <a:ext cx="1991064" cy="824205"/>
+          </a:xfrm>
+          <a:custGeom>
+            <a:avLst/>
+            <a:gdLst>
+              <a:gd name="connsiteX0" fmla="*/ 995532 w 1991064"/>
+              <a:gd name="connsiteY0" fmla="*/ 0 h 824205"/>
+              <a:gd name="connsiteX1" fmla="*/ 1984823 w 1991064"/>
+              <a:gd name="connsiteY1" fmla="*/ 784423 h 824205"/>
+              <a:gd name="connsiteX2" fmla="*/ 1991064 w 1991064"/>
+              <a:gd name="connsiteY2" fmla="*/ 824205 h 824205"/>
+              <a:gd name="connsiteX3" fmla="*/ 0 w 1991064"/>
+              <a:gd name="connsiteY3" fmla="*/ 824205 h 824205"/>
+              <a:gd name="connsiteX4" fmla="*/ 6241 w 1991064"/>
+              <a:gd name="connsiteY4" fmla="*/ 784423 h 824205"/>
+              <a:gd name="connsiteX5" fmla="*/ 995532 w 1991064"/>
+              <a:gd name="connsiteY5" fmla="*/ 0 h 824205"/>
+            </a:gdLst>
+            <a:ahLst/>
+            <a:cxnLst>
+              <a:cxn ang="0">
+                <a:pos x="connsiteX0" y="connsiteY0"/>
+              </a:cxn>
+              <a:cxn ang="0">
+                <a:pos x="connsiteX1" y="connsiteY1"/>
+              </a:cxn>
+              <a:cxn ang="0">
+                <a:pos x="connsiteX2" y="connsiteY2"/>
+              </a:cxn>
+              <a:cxn ang="0">
+                <a:pos x="connsiteX3" y="connsiteY3"/>
+              </a:cxn>
+              <a:cxn ang="0">
+                <a:pos x="connsiteX4" y="connsiteY4"/>
+              </a:cxn>
+              <a:cxn ang="0">
+                <a:pos x="connsiteX5" y="connsiteY5"/>
+              </a:cxn>
+            </a:cxnLst>
+            <a:rect l="l" t="t" r="r" b="b"/>
+            <a:pathLst>
+              <a:path w="1991064" h="824205">
+                <a:moveTo>
+                  <a:pt x="995532" y="0"/>
+                </a:moveTo>
+                <a:cubicBezTo>
+                  <a:pt x="1483521" y="0"/>
+                  <a:pt x="1890663" y="336754"/>
+                  <a:pt x="1984823" y="784423"/>
+                </a:cubicBezTo>
+                <a:lnTo>
+                  <a:pt x="1991064" y="824205"/>
+                </a:lnTo>
+                <a:lnTo>
+                  <a:pt x="0" y="824205"/>
+                </a:lnTo>
+                <a:lnTo>
+                  <a:pt x="6241" y="784423"/>
+                </a:lnTo>
+                <a:cubicBezTo>
+                  <a:pt x="100402" y="336754"/>
+                  <a:pt x="507544" y="0"/>
+                  <a:pt x="995532" y="0"/>
+                </a:cubicBezTo>
+                <a:close/>
+              </a:path>
+            </a:pathLst>
+          </a:custGeom>
+          <a:solidFill>
+            <a:schemeClr val="accent2"/>
+          </a:solidFill>
+          <a:ln>
+            <a:noFill/>
           </a:ln>
         </p:spPr>
         <p:style>
@@ -19179,10 +20545,137 @@
           </a:fontRef>
         </p:style>
         <p:txBody>
+          <a:bodyPr wrap="square" rtlCol="0" anchor="ctr">
+            <a:noAutofit/>
+          </a:bodyPr>
+          <a:lstStyle/>
+          <a:p>
+            <a:pPr algn="ctr"/>
+            <a:endParaRPr lang="en-US" dirty="0"/>
+          </a:p>
+        </p:txBody>
+      </p:sp>
+      <p:sp>
+        <p:nvSpPr>
+          <p:cNvPr id="26" name="Freeform: Shape 25">
+            <a:extLst>
+              <a:ext uri="{FF2B5EF4-FFF2-40B4-BE49-F238E27FC236}">
+                <a16:creationId xmlns:a16="http://schemas.microsoft.com/office/drawing/2014/main" id="{FEC9DA3E-C1D7-472D-B7C0-F71AE41FBA23}"/>
+              </a:ext>
+              <a:ext uri="{C183D7F6-B498-43B3-948B-1728B52AA6E4}">
+                <adec:decorative xmlns:adec="http://schemas.microsoft.com/office/drawing/2017/decorative" val="1"/>
+              </a:ext>
+            </a:extLst>
+          </p:cNvPr>
+          <p:cNvSpPr>
+            <a:spLocks noGrp="1" noRot="1" noChangeAspect="1" noMove="1" noResize="1" noEditPoints="1" noAdjustHandles="1" noChangeArrowheads="1" noChangeShapeType="1" noTextEdit="1"/>
+          </p:cNvSpPr>
+          <p:nvPr>
+            <p:extLst>
+              <p:ext uri="{386F3935-93C4-4BCD-93E2-E3B085C9AB24}">
+                <p16:designElem xmlns:p16="http://schemas.microsoft.com/office/powerpoint/2015/main" val="1"/>
+              </p:ext>
+            </p:extLst>
+          </p:nvPr>
+        </p:nvSpPr>
+        <p:spPr>
+          <a:xfrm>
+            <a:off x="10851696" y="5519196"/>
+            <a:ext cx="1340305" cy="1338805"/>
+          </a:xfrm>
+          <a:custGeom>
+            <a:avLst/>
+            <a:gdLst>
+              <a:gd name="connsiteX0" fmla="*/ 61913 w 1340305"/>
+              <a:gd name="connsiteY0" fmla="*/ 0 h 1338805"/>
+              <a:gd name="connsiteX1" fmla="*/ 1340305 w 1340305"/>
+              <a:gd name="connsiteY1" fmla="*/ 0 h 1338805"/>
+              <a:gd name="connsiteX2" fmla="*/ 1340305 w 1340305"/>
+              <a:gd name="connsiteY2" fmla="*/ 123825 h 1338805"/>
+              <a:gd name="connsiteX3" fmla="*/ 123825 w 1340305"/>
+              <a:gd name="connsiteY3" fmla="*/ 123825 h 1338805"/>
+              <a:gd name="connsiteX4" fmla="*/ 123825 w 1340305"/>
+              <a:gd name="connsiteY4" fmla="*/ 1338805 h 1338805"/>
+              <a:gd name="connsiteX5" fmla="*/ 0 w 1340305"/>
+              <a:gd name="connsiteY5" fmla="*/ 1338805 h 1338805"/>
+              <a:gd name="connsiteX6" fmla="*/ 0 w 1340305"/>
+              <a:gd name="connsiteY6" fmla="*/ 61913 h 1338805"/>
+              <a:gd name="connsiteX7" fmla="*/ 61913 w 1340305"/>
+              <a:gd name="connsiteY7" fmla="*/ 0 h 1338805"/>
+            </a:gdLst>
+            <a:ahLst/>
+            <a:cxnLst>
+              <a:cxn ang="0">
+                <a:pos x="connsiteX0" y="connsiteY0"/>
+              </a:cxn>
+              <a:cxn ang="0">
+                <a:pos x="connsiteX1" y="connsiteY1"/>
+              </a:cxn>
+              <a:cxn ang="0">
+                <a:pos x="connsiteX2" y="connsiteY2"/>
+              </a:cxn>
+              <a:cxn ang="0">
+                <a:pos x="connsiteX3" y="connsiteY3"/>
+              </a:cxn>
+              <a:cxn ang="0">
+                <a:pos x="connsiteX4" y="connsiteY4"/>
+              </a:cxn>
+              <a:cxn ang="0">
+                <a:pos x="connsiteX5" y="connsiteY5"/>
+              </a:cxn>
+              <a:cxn ang="0">
+                <a:pos x="connsiteX6" y="connsiteY6"/>
+              </a:cxn>
+              <a:cxn ang="0">
+                <a:pos x="connsiteX7" y="connsiteY7"/>
+              </a:cxn>
+            </a:cxnLst>
+            <a:rect l="l" t="t" r="r" b="b"/>
+            <a:pathLst>
+              <a:path w="1340305" h="1338805">
+                <a:moveTo>
+                  <a:pt x="61913" y="0"/>
+                </a:moveTo>
+                <a:lnTo>
+                  <a:pt x="1340305" y="0"/>
+                </a:lnTo>
+                <a:lnTo>
+                  <a:pt x="1340305" y="123825"/>
+                </a:lnTo>
+                <a:lnTo>
+                  <a:pt x="123825" y="123825"/>
+                </a:lnTo>
+                <a:lnTo>
+                  <a:pt x="123825" y="1338805"/>
+                </a:lnTo>
+                <a:lnTo>
+                  <a:pt x="0" y="1338805"/>
+                </a:lnTo>
+                <a:lnTo>
+                  <a:pt x="0" y="61913"/>
+                </a:lnTo>
+                <a:cubicBezTo>
+                  <a:pt x="0" y="27719"/>
+                  <a:pt x="27719" y="0"/>
+                  <a:pt x="61913" y="0"/>
+                </a:cubicBezTo>
+                <a:close/>
+              </a:path>
+            </a:pathLst>
+          </a:custGeom>
+          <a:solidFill>
+            <a:schemeClr val="accent6"/>
+          </a:solidFill>
+          <a:ln w="9525" cap="flat">
+            <a:noFill/>
+            <a:prstDash val="solid"/>
+            <a:miter/>
+          </a:ln>
+        </p:spPr>
+        <p:txBody>
           <a:bodyPr rtlCol="0" anchor="ctr"/>
           <a:lstStyle/>
           <a:p>
-            <a:pPr algn="ctr"/>
             <a:endParaRPr lang="en-US"/>
           </a:p>
         </p:txBody>
@@ -19190,29 +20683,20 @@
     </p:spTree>
     <p:extLst>
       <p:ext uri="{BB962C8B-B14F-4D97-AF65-F5344CB8AC3E}">
-        <p14:creationId xmlns:p14="http://schemas.microsoft.com/office/powerpoint/2010/main" val="449328287"/>
+        <p14:creationId xmlns:p14="http://schemas.microsoft.com/office/powerpoint/2010/main" val="4227303008"/>
       </p:ext>
     </p:extLst>
   </p:cSld>
   <p:clrMapOvr>
-    <a:overrideClrMapping bg1="lt1" tx1="dk1" bg2="lt2" tx2="dk2" accent1="accent1" accent2="accent2" accent3="accent3" accent4="accent4" accent5="accent5" accent6="accent6" hlink="hlink" folHlink="folHlink"/>
+    <a:masterClrMapping/>
   </p:clrMapOvr>
-  <mc:AlternateContent xmlns:mc="http://schemas.openxmlformats.org/markup-compatibility/2006" xmlns:p159="http://schemas.microsoft.com/office/powerpoint/2015/09/main">
-    <mc:Choice Requires="p159">
-      <p:transition xmlns:p14="http://schemas.microsoft.com/office/powerpoint/2010/main" spd="slow" p14:dur="2000">
-        <p159:morph option="byObject"/>
-      </p:transition>
-    </mc:Choice>
-    <mc:Fallback xmlns="">
-      <p:transition spd="slow">
-        <p:fade/>
-      </p:transition>
-    </mc:Fallback>
-  </mc:AlternateContent>
+  <p:transition spd="med">
+    <p:pull/>
+  </p:transition>
 </p:sld>
 </file>
 
-<file path=ppt/slides/slide34.xml><?xml version="1.0" encoding="utf-8"?>
+<file path=ppt/slides/slide35.xml><?xml version="1.0" encoding="utf-8"?>
 <p:sld xmlns:a="http://schemas.openxmlformats.org/drawingml/2006/main" xmlns:r="http://schemas.openxmlformats.org/officeDocument/2006/relationships" xmlns:p="http://schemas.openxmlformats.org/presentationml/2006/main">
   <p:cSld>
     <p:bg>
@@ -22477,7 +23961,7 @@
 </p:sld>
 </file>
 
-<file path=ppt/slides/slide35.xml><?xml version="1.0" encoding="utf-8"?>
+<file path=ppt/slides/slide36.xml><?xml version="1.0" encoding="utf-8"?>
 <p:sld xmlns:a="http://schemas.openxmlformats.org/drawingml/2006/main" xmlns:r="http://schemas.openxmlformats.org/officeDocument/2006/relationships" xmlns:p="http://schemas.openxmlformats.org/presentationml/2006/main">
   <p:cSld>
     <p:bg>
@@ -25605,7 +27089,7 @@
 </p:sld>
 </file>
 
-<file path=ppt/slides/slide36.xml><?xml version="1.0" encoding="utf-8"?>
+<file path=ppt/slides/slide37.xml><?xml version="1.0" encoding="utf-8"?>
 <p:sld xmlns:a="http://schemas.openxmlformats.org/drawingml/2006/main" xmlns:r="http://schemas.openxmlformats.org/officeDocument/2006/relationships" xmlns:p="http://schemas.openxmlformats.org/presentationml/2006/main">
   <p:cSld>
     <p:bg>
@@ -25870,7 +27354,7 @@
 </p:sld>
 </file>
 
-<file path=ppt/slides/slide37.xml><?xml version="1.0" encoding="utf-8"?>
+<file path=ppt/slides/slide38.xml><?xml version="1.0" encoding="utf-8"?>
 <p:sld xmlns:a="http://schemas.openxmlformats.org/drawingml/2006/main" xmlns:r="http://schemas.openxmlformats.org/officeDocument/2006/relationships" xmlns:p="http://schemas.openxmlformats.org/presentationml/2006/main">
   <p:cSld>
     <p:bg>
@@ -26077,7 +27561,7 @@
 </p:sld>
 </file>
 
-<file path=ppt/slides/slide38.xml><?xml version="1.0" encoding="utf-8"?>
+<file path=ppt/slides/slide39.xml><?xml version="1.0" encoding="utf-8"?>
 <p:sld xmlns:a="http://schemas.openxmlformats.org/drawingml/2006/main" xmlns:r="http://schemas.openxmlformats.org/officeDocument/2006/relationships" xmlns:p="http://schemas.openxmlformats.org/presentationml/2006/main">
   <p:cSld>
     <p:bg>
@@ -26337,403 +27821,6 @@
 </p:sld>
 </file>
 
-<file path=ppt/slides/slide39.xml><?xml version="1.0" encoding="utf-8"?>
-<p:sld xmlns:a="http://schemas.openxmlformats.org/drawingml/2006/main" xmlns:r="http://schemas.openxmlformats.org/officeDocument/2006/relationships" xmlns:p="http://schemas.openxmlformats.org/presentationml/2006/main">
-  <p:cSld>
-    <p:bg>
-      <p:bgPr>
-        <a:solidFill>
-          <a:schemeClr val="bg1"/>
-        </a:solidFill>
-        <a:effectLst/>
-      </p:bgPr>
-    </p:bg>
-    <p:spTree>
-      <p:nvGrpSpPr>
-        <p:cNvPr id="1" name="">
-          <a:extLst>
-            <a:ext uri="{FF2B5EF4-FFF2-40B4-BE49-F238E27FC236}">
-              <a16:creationId xmlns:a16="http://schemas.microsoft.com/office/drawing/2014/main" id="{E19BF8DC-C01E-B91E-A741-28AA49CEED2F}"/>
-            </a:ext>
-          </a:extLst>
-        </p:cNvPr>
-        <p:cNvGrpSpPr/>
-        <p:nvPr/>
-      </p:nvGrpSpPr>
-      <p:grpSpPr>
-        <a:xfrm>
-          <a:off x="0" y="0"/>
-          <a:ext cx="0" cy="0"/>
-          <a:chOff x="0" y="0"/>
-          <a:chExt cx="0" cy="0"/>
-        </a:xfrm>
-      </p:grpSpPr>
-      <p:sp>
-        <p:nvSpPr>
-          <p:cNvPr id="17" name="Rectangle 16">
-            <a:extLst>
-              <a:ext uri="{FF2B5EF4-FFF2-40B4-BE49-F238E27FC236}">
-                <a16:creationId xmlns:a16="http://schemas.microsoft.com/office/drawing/2014/main" id="{E8A8EAB8-D2FF-444D-B34B-7D32F106AD0E}"/>
-              </a:ext>
-              <a:ext uri="{C183D7F6-B498-43B3-948B-1728B52AA6E4}">
-                <adec:decorative xmlns:adec="http://schemas.microsoft.com/office/drawing/2017/decorative" val="1"/>
-              </a:ext>
-            </a:extLst>
-          </p:cNvPr>
-          <p:cNvSpPr>
-            <a:spLocks noGrp="1" noRot="1" noChangeAspect="1" noMove="1" noResize="1" noEditPoints="1" noAdjustHandles="1" noChangeArrowheads="1" noChangeShapeType="1" noTextEdit="1"/>
-          </p:cNvSpPr>
-          <p:nvPr>
-            <p:extLst>
-              <p:ext uri="{386F3935-93C4-4BCD-93E2-E3B085C9AB24}">
-                <p16:designElem xmlns:p16="http://schemas.microsoft.com/office/powerpoint/2015/main" val="1"/>
-              </p:ext>
-            </p:extLst>
-          </p:nvPr>
-        </p:nvSpPr>
-        <p:spPr>
-          <a:xfrm>
-            <a:off x="0" y="0"/>
-            <a:ext cx="12192000" cy="6858000"/>
-          </a:xfrm>
-          <a:prstGeom prst="rect">
-            <a:avLst/>
-          </a:prstGeom>
-          <a:solidFill>
-            <a:schemeClr val="tx1">
-              <a:lumMod val="95000"/>
-              <a:lumOff val="5000"/>
-            </a:schemeClr>
-          </a:solidFill>
-          <a:ln>
-            <a:noFill/>
-          </a:ln>
-        </p:spPr>
-        <p:style>
-          <a:lnRef idx="2">
-            <a:schemeClr val="accent1">
-              <a:shade val="50000"/>
-            </a:schemeClr>
-          </a:lnRef>
-          <a:fillRef idx="1">
-            <a:schemeClr val="accent1"/>
-          </a:fillRef>
-          <a:effectRef idx="0">
-            <a:schemeClr val="accent1"/>
-          </a:effectRef>
-          <a:fontRef idx="minor">
-            <a:schemeClr val="lt1"/>
-          </a:fontRef>
-        </p:style>
-        <p:txBody>
-          <a:bodyPr rtlCol="0" anchor="ctr"/>
-          <a:lstStyle/>
-          <a:p>
-            <a:pPr algn="ctr"/>
-            <a:endParaRPr lang="en-US" dirty="0">
-              <a:solidFill>
-                <a:schemeClr val="bg1"/>
-              </a:solidFill>
-            </a:endParaRPr>
-          </a:p>
-        </p:txBody>
-      </p:sp>
-      <p:sp>
-        <p:nvSpPr>
-          <p:cNvPr id="2" name="Título 1">
-            <a:extLst>
-              <a:ext uri="{FF2B5EF4-FFF2-40B4-BE49-F238E27FC236}">
-                <a16:creationId xmlns:a16="http://schemas.microsoft.com/office/drawing/2014/main" id="{D6217E46-1C3A-BA45-16F4-E83D8179F751}"/>
-              </a:ext>
-            </a:extLst>
-          </p:cNvPr>
-          <p:cNvSpPr>
-            <a:spLocks noGrp="1"/>
-          </p:cNvSpPr>
-          <p:nvPr>
-            <p:ph type="title"/>
-          </p:nvPr>
-        </p:nvSpPr>
-        <p:spPr>
-          <a:xfrm>
-            <a:off x="1020467" y="1397120"/>
-            <a:ext cx="4707671" cy="1225650"/>
-          </a:xfrm>
-        </p:spPr>
-        <p:txBody>
-          <a:bodyPr anchor="b">
-            <a:normAutofit/>
-          </a:bodyPr>
-          <a:lstStyle/>
-          <a:p>
-            <a:r>
-              <a:rPr lang="pt-PT" sz="3800" b="1" dirty="0">
-                <a:solidFill>
-                  <a:schemeClr val="bg1"/>
-                </a:solidFill>
-              </a:rPr>
-              <a:t>Como Explorar a Vulnerabilidade:</a:t>
-            </a:r>
-            <a:endParaRPr lang="pt-PT" sz="3800" dirty="0">
-              <a:solidFill>
-                <a:schemeClr val="bg1"/>
-              </a:solidFill>
-            </a:endParaRPr>
-          </a:p>
-        </p:txBody>
-      </p:sp>
-      <p:sp>
-        <p:nvSpPr>
-          <p:cNvPr id="3" name="Espaço Reservado para Conteúdo 2">
-            <a:extLst>
-              <a:ext uri="{FF2B5EF4-FFF2-40B4-BE49-F238E27FC236}">
-                <a16:creationId xmlns:a16="http://schemas.microsoft.com/office/drawing/2014/main" id="{0F0389F9-317E-4BBA-0F64-CFA078CCB48D}"/>
-              </a:ext>
-            </a:extLst>
-          </p:cNvPr>
-          <p:cNvSpPr>
-            <a:spLocks noGrp="1"/>
-          </p:cNvSpPr>
-          <p:nvPr>
-            <p:ph idx="1"/>
-          </p:nvPr>
-        </p:nvSpPr>
-        <p:spPr>
-          <a:xfrm>
-            <a:off x="1020467" y="2891752"/>
-            <a:ext cx="4707671" cy="2334517"/>
-          </a:xfrm>
-        </p:spPr>
-        <p:txBody>
-          <a:bodyPr>
-            <a:normAutofit/>
-          </a:bodyPr>
-          <a:lstStyle/>
-          <a:p>
-            <a:pPr marL="0" indent="0">
-              <a:buNone/>
-            </a:pPr>
-            <a:r>
-              <a:rPr lang="pt-PT" sz="2000" dirty="0">
-                <a:solidFill>
-                  <a:schemeClr val="bg1"/>
-                </a:solidFill>
-              </a:rPr>
-              <a:t>1. 	Reconhecimento (Descoberta 	do Alvo): Identificação do IP da 	vítima na rede local utilizando 	varrimento de rede.</a:t>
-            </a:r>
-          </a:p>
-          <a:p>
-            <a:pPr marL="457200" indent="-457200">
-              <a:buFont typeface="+mj-lt"/>
-              <a:buAutoNum type="arabicPeriod"/>
-            </a:pPr>
-            <a:endParaRPr lang="pt-PT" sz="2000" dirty="0">
-              <a:solidFill>
-                <a:schemeClr val="bg1"/>
-              </a:solidFill>
-            </a:endParaRPr>
-          </a:p>
-        </p:txBody>
-      </p:sp>
-      <p:pic>
-        <p:nvPicPr>
-          <p:cNvPr id="8" name="Imagem 7" descr="Texto, Logotipo&#10;&#10;O conteúdo gerado por IA pode estar incorreto.">
-            <a:extLst>
-              <a:ext uri="{FF2B5EF4-FFF2-40B4-BE49-F238E27FC236}">
-                <a16:creationId xmlns:a16="http://schemas.microsoft.com/office/drawing/2014/main" id="{9AE3CC9F-1275-1114-317A-DBC7E849C326}"/>
-              </a:ext>
-            </a:extLst>
-          </p:cNvPr>
-          <p:cNvPicPr>
-            <a:picLocks noChangeAspect="1"/>
-          </p:cNvPicPr>
-          <p:nvPr/>
-        </p:nvPicPr>
-        <p:blipFill>
-          <a:blip r:embed="rId2"/>
-          <a:stretch>
-            <a:fillRect/>
-          </a:stretch>
-        </p:blipFill>
-        <p:spPr>
-          <a:xfrm>
-            <a:off x="6992455" y="1338355"/>
-            <a:ext cx="3332766" cy="671590"/>
-          </a:xfrm>
-          <a:prstGeom prst="rect">
-            <a:avLst/>
-          </a:prstGeom>
-        </p:spPr>
-      </p:pic>
-      <p:sp>
-        <p:nvSpPr>
-          <p:cNvPr id="19" name="Rectangle 18">
-            <a:extLst>
-              <a:ext uri="{FF2B5EF4-FFF2-40B4-BE49-F238E27FC236}">
-                <a16:creationId xmlns:a16="http://schemas.microsoft.com/office/drawing/2014/main" id="{9DD005C1-8C51-42D6-9BEE-B9B83849743D}"/>
-              </a:ext>
-              <a:ext uri="{C183D7F6-B498-43B3-948B-1728B52AA6E4}">
-                <adec:decorative xmlns:adec="http://schemas.microsoft.com/office/drawing/2017/decorative" val="1"/>
-              </a:ext>
-            </a:extLst>
-          </p:cNvPr>
-          <p:cNvSpPr>
-            <a:spLocks noGrp="1" noRot="1" noChangeAspect="1" noMove="1" noResize="1" noEditPoints="1" noAdjustHandles="1" noChangeArrowheads="1" noChangeShapeType="1" noTextEdit="1"/>
-          </p:cNvSpPr>
-          <p:nvPr>
-            <p:extLst>
-              <p:ext uri="{386F3935-93C4-4BCD-93E2-E3B085C9AB24}">
-                <p16:designElem xmlns:p16="http://schemas.microsoft.com/office/powerpoint/2015/main" val="1"/>
-              </p:ext>
-            </p:extLst>
-          </p:nvPr>
-        </p:nvSpPr>
-        <p:spPr>
-          <a:xfrm>
-            <a:off x="126206" y="115193"/>
-            <a:ext cx="11939588" cy="6627614"/>
-          </a:xfrm>
-          <a:prstGeom prst="rect">
-            <a:avLst/>
-          </a:prstGeom>
-          <a:noFill/>
-          <a:ln w="12700">
-            <a:solidFill>
-              <a:schemeClr val="accent2"/>
-            </a:solidFill>
-          </a:ln>
-        </p:spPr>
-        <p:style>
-          <a:lnRef idx="2">
-            <a:schemeClr val="accent1">
-              <a:shade val="50000"/>
-            </a:schemeClr>
-          </a:lnRef>
-          <a:fillRef idx="1">
-            <a:schemeClr val="accent1"/>
-          </a:fillRef>
-          <a:effectRef idx="0">
-            <a:schemeClr val="accent1"/>
-          </a:effectRef>
-          <a:fontRef idx="minor">
-            <a:schemeClr val="lt1"/>
-          </a:fontRef>
-        </p:style>
-        <p:txBody>
-          <a:bodyPr rtlCol="0" anchor="ctr"/>
-          <a:lstStyle/>
-          <a:p>
-            <a:pPr algn="ctr"/>
-            <a:endParaRPr lang="en-US"/>
-          </a:p>
-        </p:txBody>
-      </p:sp>
-      <p:pic>
-        <p:nvPicPr>
-          <p:cNvPr id="12" name="Imagem 11" descr="Texto&#10;&#10;O conteúdo gerado por IA pode estar incorreto.">
-            <a:extLst>
-              <a:ext uri="{FF2B5EF4-FFF2-40B4-BE49-F238E27FC236}">
-                <a16:creationId xmlns:a16="http://schemas.microsoft.com/office/drawing/2014/main" id="{127EACF8-1CCD-AE26-88C9-74894305AE5F}"/>
-              </a:ext>
-            </a:extLst>
-          </p:cNvPr>
-          <p:cNvPicPr>
-            <a:picLocks noChangeAspect="1"/>
-          </p:cNvPicPr>
-          <p:nvPr/>
-        </p:nvPicPr>
-        <p:blipFill>
-          <a:blip r:embed="rId3"/>
-          <a:stretch>
-            <a:fillRect/>
-          </a:stretch>
-        </p:blipFill>
-        <p:spPr>
-          <a:xfrm>
-            <a:off x="5875601" y="2542051"/>
-            <a:ext cx="5566475" cy="2838902"/>
-          </a:xfrm>
-          <a:prstGeom prst="rect">
-            <a:avLst/>
-          </a:prstGeom>
-        </p:spPr>
-      </p:pic>
-      <p:sp>
-        <p:nvSpPr>
-          <p:cNvPr id="21" name="Rectangle 20">
-            <a:extLst>
-              <a:ext uri="{FF2B5EF4-FFF2-40B4-BE49-F238E27FC236}">
-                <a16:creationId xmlns:a16="http://schemas.microsoft.com/office/drawing/2014/main" id="{C61F2F60-14E3-4196-B7CE-175E46F04481}"/>
-              </a:ext>
-              <a:ext uri="{C183D7F6-B498-43B3-948B-1728B52AA6E4}">
-                <adec:decorative xmlns:adec="http://schemas.microsoft.com/office/drawing/2017/decorative" val="1"/>
-              </a:ext>
-            </a:extLst>
-          </p:cNvPr>
-          <p:cNvSpPr>
-            <a:spLocks noGrp="1" noRot="1" noChangeAspect="1" noMove="1" noResize="1" noEditPoints="1" noAdjustHandles="1" noChangeArrowheads="1" noChangeShapeType="1" noTextEdit="1"/>
-          </p:cNvSpPr>
-          <p:nvPr>
-            <p:extLst>
-              <p:ext uri="{386F3935-93C4-4BCD-93E2-E3B085C9AB24}">
-                <p16:designElem xmlns:p16="http://schemas.microsoft.com/office/powerpoint/2015/main" val="1"/>
-              </p:ext>
-            </p:extLst>
-          </p:nvPr>
-        </p:nvSpPr>
-        <p:spPr>
-          <a:xfrm>
-            <a:off x="602461" y="1159669"/>
-            <a:ext cx="10987078" cy="4462463"/>
-          </a:xfrm>
-          <a:prstGeom prst="rect">
-            <a:avLst/>
-          </a:prstGeom>
-          <a:noFill/>
-          <a:ln w="12700">
-            <a:solidFill>
-              <a:schemeClr val="accent2"/>
-            </a:solidFill>
-          </a:ln>
-        </p:spPr>
-        <p:style>
-          <a:lnRef idx="2">
-            <a:schemeClr val="accent1">
-              <a:shade val="50000"/>
-            </a:schemeClr>
-          </a:lnRef>
-          <a:fillRef idx="1">
-            <a:schemeClr val="accent1"/>
-          </a:fillRef>
-          <a:effectRef idx="0">
-            <a:schemeClr val="accent1"/>
-          </a:effectRef>
-          <a:fontRef idx="minor">
-            <a:schemeClr val="lt1"/>
-          </a:fontRef>
-        </p:style>
-        <p:txBody>
-          <a:bodyPr rtlCol="0" anchor="ctr"/>
-          <a:lstStyle/>
-          <a:p>
-            <a:pPr algn="ctr"/>
-            <a:endParaRPr lang="en-US"/>
-          </a:p>
-        </p:txBody>
-      </p:sp>
-    </p:spTree>
-    <p:extLst>
-      <p:ext uri="{BB962C8B-B14F-4D97-AF65-F5344CB8AC3E}">
-        <p14:creationId xmlns:p14="http://schemas.microsoft.com/office/powerpoint/2010/main" val="1358620081"/>
-      </p:ext>
-    </p:extLst>
-  </p:cSld>
-  <p:clrMapOvr>
-    <a:masterClrMapping/>
-  </p:clrMapOvr>
-</p:sld>
-</file>
-
 <file path=ppt/slides/slide4.xml><?xml version="1.0" encoding="utf-8"?>
 <p:sld xmlns:a="http://schemas.openxmlformats.org/drawingml/2006/main" xmlns:r="http://schemas.openxmlformats.org/officeDocument/2006/relationships" xmlns:p="http://schemas.openxmlformats.org/presentationml/2006/main">
   <p:cSld>
@@ -26886,68 +27973,68 @@
           <a:custGeom>
             <a:avLst/>
             <a:gdLst>
-              <a:gd name="connsiteX0" fmla="*/ 0 w 3255095"/>
-              <a:gd name="connsiteY0" fmla="*/ 0 h 18288"/>
-              <a:gd name="connsiteX1" fmla="*/ 618468 w 3255095"/>
-              <a:gd name="connsiteY1" fmla="*/ 0 h 18288"/>
-              <a:gd name="connsiteX2" fmla="*/ 1269487 w 3255095"/>
-              <a:gd name="connsiteY2" fmla="*/ 0 h 18288"/>
-              <a:gd name="connsiteX3" fmla="*/ 1953057 w 3255095"/>
-              <a:gd name="connsiteY3" fmla="*/ 0 h 18288"/>
-              <a:gd name="connsiteX4" fmla="*/ 2636627 w 3255095"/>
-              <a:gd name="connsiteY4" fmla="*/ 0 h 18288"/>
-              <a:gd name="connsiteX5" fmla="*/ 3255095 w 3255095"/>
-              <a:gd name="connsiteY5" fmla="*/ 0 h 18288"/>
-              <a:gd name="connsiteX6" fmla="*/ 3255095 w 3255095"/>
-              <a:gd name="connsiteY6" fmla="*/ 18288 h 18288"/>
-              <a:gd name="connsiteX7" fmla="*/ 2538974 w 3255095"/>
-              <a:gd name="connsiteY7" fmla="*/ 18288 h 18288"/>
-              <a:gd name="connsiteX8" fmla="*/ 1822853 w 3255095"/>
-              <a:gd name="connsiteY8" fmla="*/ 18288 h 18288"/>
-              <a:gd name="connsiteX9" fmla="*/ 1171834 w 3255095"/>
-              <a:gd name="connsiteY9" fmla="*/ 18288 h 18288"/>
-              <a:gd name="connsiteX10" fmla="*/ 0 w 3255095"/>
-              <a:gd name="connsiteY10" fmla="*/ 18288 h 18288"/>
-              <a:gd name="connsiteX11" fmla="*/ 0 w 3255095"/>
-              <a:gd name="connsiteY11" fmla="*/ 0 h 18288"/>
+              <a:gd name="csX0" fmla="*/ 0 w 3255095"/>
+              <a:gd name="csY0" fmla="*/ 0 h 18288"/>
+              <a:gd name="csX1" fmla="*/ 618468 w 3255095"/>
+              <a:gd name="csY1" fmla="*/ 0 h 18288"/>
+              <a:gd name="csX2" fmla="*/ 1269487 w 3255095"/>
+              <a:gd name="csY2" fmla="*/ 0 h 18288"/>
+              <a:gd name="csX3" fmla="*/ 1953057 w 3255095"/>
+              <a:gd name="csY3" fmla="*/ 0 h 18288"/>
+              <a:gd name="csX4" fmla="*/ 2636627 w 3255095"/>
+              <a:gd name="csY4" fmla="*/ 0 h 18288"/>
+              <a:gd name="csX5" fmla="*/ 3255095 w 3255095"/>
+              <a:gd name="csY5" fmla="*/ 0 h 18288"/>
+              <a:gd name="csX6" fmla="*/ 3255095 w 3255095"/>
+              <a:gd name="csY6" fmla="*/ 18288 h 18288"/>
+              <a:gd name="csX7" fmla="*/ 2538974 w 3255095"/>
+              <a:gd name="csY7" fmla="*/ 18288 h 18288"/>
+              <a:gd name="csX8" fmla="*/ 1822853 w 3255095"/>
+              <a:gd name="csY8" fmla="*/ 18288 h 18288"/>
+              <a:gd name="csX9" fmla="*/ 1171834 w 3255095"/>
+              <a:gd name="csY9" fmla="*/ 18288 h 18288"/>
+              <a:gd name="csX10" fmla="*/ 0 w 3255095"/>
+              <a:gd name="csY10" fmla="*/ 18288 h 18288"/>
+              <a:gd name="csX11" fmla="*/ 0 w 3255095"/>
+              <a:gd name="csY11" fmla="*/ 0 h 18288"/>
             </a:gdLst>
             <a:ahLst/>
             <a:cxnLst>
               <a:cxn ang="0">
-                <a:pos x="connsiteX0" y="connsiteY0"/>
+                <a:pos x="csX0" y="csY0"/>
               </a:cxn>
               <a:cxn ang="0">
-                <a:pos x="connsiteX1" y="connsiteY1"/>
+                <a:pos x="csX1" y="csY1"/>
               </a:cxn>
               <a:cxn ang="0">
-                <a:pos x="connsiteX2" y="connsiteY2"/>
+                <a:pos x="csX2" y="csY2"/>
               </a:cxn>
               <a:cxn ang="0">
-                <a:pos x="connsiteX3" y="connsiteY3"/>
+                <a:pos x="csX3" y="csY3"/>
               </a:cxn>
               <a:cxn ang="0">
-                <a:pos x="connsiteX4" y="connsiteY4"/>
+                <a:pos x="csX4" y="csY4"/>
               </a:cxn>
               <a:cxn ang="0">
-                <a:pos x="connsiteX5" y="connsiteY5"/>
+                <a:pos x="csX5" y="csY5"/>
               </a:cxn>
               <a:cxn ang="0">
-                <a:pos x="connsiteX6" y="connsiteY6"/>
+                <a:pos x="csX6" y="csY6"/>
               </a:cxn>
               <a:cxn ang="0">
-                <a:pos x="connsiteX7" y="connsiteY7"/>
+                <a:pos x="csX7" y="csY7"/>
               </a:cxn>
               <a:cxn ang="0">
-                <a:pos x="connsiteX8" y="connsiteY8"/>
+                <a:pos x="csX8" y="csY8"/>
               </a:cxn>
               <a:cxn ang="0">
-                <a:pos x="connsiteX9" y="connsiteY9"/>
+                <a:pos x="csX9" y="csY9"/>
               </a:cxn>
               <a:cxn ang="0">
-                <a:pos x="connsiteX10" y="connsiteY10"/>
+                <a:pos x="csX10" y="csY10"/>
               </a:cxn>
               <a:cxn ang="0">
-                <a:pos x="connsiteX11" y="connsiteY11"/>
+                <a:pos x="csX11" y="csY11"/>
               </a:cxn>
             </a:cxnLst>
             <a:rect l="l" t="t" r="r" b="b"/>
@@ -27511,7 +28598,13 @@
     </p:bg>
     <p:spTree>
       <p:nvGrpSpPr>
-        <p:cNvPr id="1" name=""/>
+        <p:cNvPr id="1" name="">
+          <a:extLst>
+            <a:ext uri="{FF2B5EF4-FFF2-40B4-BE49-F238E27FC236}">
+              <a16:creationId xmlns:a16="http://schemas.microsoft.com/office/drawing/2014/main" id="{E19BF8DC-C01E-B91E-A741-28AA49CEED2F}"/>
+            </a:ext>
+          </a:extLst>
+        </p:cNvPr>
         <p:cNvGrpSpPr/>
         <p:nvPr/>
       </p:nvGrpSpPr>
@@ -27525,7 +28618,7 @@
       </p:grpSpPr>
       <p:sp>
         <p:nvSpPr>
-          <p:cNvPr id="12" name="Rectangle 11">
+          <p:cNvPr id="17" name="Rectangle 16">
             <a:extLst>
               <a:ext uri="{FF2B5EF4-FFF2-40B4-BE49-F238E27FC236}">
                 <a16:creationId xmlns:a16="http://schemas.microsoft.com/office/drawing/2014/main" id="{E8A8EAB8-D2FF-444D-B34B-7D32F106AD0E}"/>
@@ -27595,10 +28688,54 @@
       </p:sp>
       <p:sp>
         <p:nvSpPr>
+          <p:cNvPr id="2" name="Título 1">
+            <a:extLst>
+              <a:ext uri="{FF2B5EF4-FFF2-40B4-BE49-F238E27FC236}">
+                <a16:creationId xmlns:a16="http://schemas.microsoft.com/office/drawing/2014/main" id="{D6217E46-1C3A-BA45-16F4-E83D8179F751}"/>
+              </a:ext>
+            </a:extLst>
+          </p:cNvPr>
+          <p:cNvSpPr>
+            <a:spLocks noGrp="1"/>
+          </p:cNvSpPr>
+          <p:nvPr>
+            <p:ph type="title"/>
+          </p:nvPr>
+        </p:nvSpPr>
+        <p:spPr>
+          <a:xfrm>
+            <a:off x="1020467" y="1397120"/>
+            <a:ext cx="4707671" cy="1225650"/>
+          </a:xfrm>
+        </p:spPr>
+        <p:txBody>
+          <a:bodyPr anchor="b">
+            <a:normAutofit/>
+          </a:bodyPr>
+          <a:lstStyle/>
+          <a:p>
+            <a:r>
+              <a:rPr lang="pt-PT" sz="3800" b="1" dirty="0">
+                <a:solidFill>
+                  <a:schemeClr val="bg1"/>
+                </a:solidFill>
+              </a:rPr>
+              <a:t>Como Explorar a Vulnerabilidade:</a:t>
+            </a:r>
+            <a:endParaRPr lang="pt-PT" sz="3800" dirty="0">
+              <a:solidFill>
+                <a:schemeClr val="bg1"/>
+              </a:solidFill>
+            </a:endParaRPr>
+          </a:p>
+        </p:txBody>
+      </p:sp>
+      <p:sp>
+        <p:nvSpPr>
           <p:cNvPr id="3" name="Espaço Reservado para Conteúdo 2">
             <a:extLst>
               <a:ext uri="{FF2B5EF4-FFF2-40B4-BE49-F238E27FC236}">
-                <a16:creationId xmlns:a16="http://schemas.microsoft.com/office/drawing/2014/main" id="{A1C74004-C962-CEE0-CA02-D1CE137EC928}"/>
+                <a16:creationId xmlns:a16="http://schemas.microsoft.com/office/drawing/2014/main" id="{0F0389F9-317E-4BBA-0F64-CFA078CCB48D}"/>
               </a:ext>
             </a:extLst>
           </p:cNvPr>
@@ -27630,12 +28767,13 @@
                   <a:schemeClr val="bg1"/>
                 </a:solidFill>
               </a:rPr>
-              <a:t>2. 	Verificação (Reconnaissance): 	Confirmação de que o script CGI 	existe e está acessível.</a:t>
+              <a:t>1. 	Reconhecimento (Descoberta 	do Alvo): Identificação do IP da 	vítima na rede local utilizando 	varrimento de rede.</a:t>
             </a:r>
           </a:p>
           <a:p>
-            <a:pPr marL="0" indent="0">
-              <a:buNone/>
+            <a:pPr marL="457200" indent="-457200">
+              <a:buFont typeface="+mj-lt"/>
+              <a:buAutoNum type="arabicPeriod"/>
             </a:pPr>
             <a:endParaRPr lang="pt-PT" sz="2000" dirty="0">
               <a:solidFill>
@@ -27643,21 +28781,14 @@
               </a:solidFill>
             </a:endParaRPr>
           </a:p>
-          <a:p>
-            <a:endParaRPr lang="pt-PT" sz="2000" dirty="0">
-              <a:solidFill>
-                <a:schemeClr val="bg1"/>
-              </a:solidFill>
-            </a:endParaRPr>
-          </a:p>
         </p:txBody>
       </p:sp>
       <p:pic>
         <p:nvPicPr>
-          <p:cNvPr id="5" name="Imagem 4" descr="Tela preta com letras brancas&#10;&#10;O conteúdo gerado por IA pode estar incorreto.">
+          <p:cNvPr id="8" name="Imagem 7" descr="Texto, Logotipo&#10;&#10;O conteúdo gerado por IA pode estar incorreto.">
             <a:extLst>
               <a:ext uri="{FF2B5EF4-FFF2-40B4-BE49-F238E27FC236}">
-                <a16:creationId xmlns:a16="http://schemas.microsoft.com/office/drawing/2014/main" id="{EB0B99A1-678A-812B-8B2E-AB0A0C8C7CF3}"/>
+                <a16:creationId xmlns:a16="http://schemas.microsoft.com/office/drawing/2014/main" id="{9AE3CC9F-1275-1114-317A-DBC7E849C326}"/>
               </a:ext>
             </a:extLst>
           </p:cNvPr>
@@ -27674,8 +28805,8 @@
         </p:blipFill>
         <p:spPr>
           <a:xfrm>
-            <a:off x="6322512" y="3985387"/>
-            <a:ext cx="5037433" cy="696666"/>
+            <a:off x="6992455" y="1338355"/>
+            <a:ext cx="3332766" cy="671590"/>
           </a:xfrm>
           <a:prstGeom prst="rect">
             <a:avLst/>
@@ -27684,7 +28815,7 @@
       </p:pic>
       <p:sp>
         <p:nvSpPr>
-          <p:cNvPr id="14" name="Rectangle 13">
+          <p:cNvPr id="19" name="Rectangle 18">
             <a:extLst>
               <a:ext uri="{FF2B5EF4-FFF2-40B4-BE49-F238E27FC236}">
                 <a16:creationId xmlns:a16="http://schemas.microsoft.com/office/drawing/2014/main" id="{9DD005C1-8C51-42D6-9BEE-B9B83849743D}"/>
@@ -27747,10 +28878,10 @@
       </p:sp>
       <p:pic>
         <p:nvPicPr>
-          <p:cNvPr id="7" name="Imagem 6" descr="Texto&#10;&#10;O conteúdo gerado por IA pode estar incorreto.">
+          <p:cNvPr id="12" name="Imagem 11" descr="Texto&#10;&#10;O conteúdo gerado por IA pode estar incorreto.">
             <a:extLst>
               <a:ext uri="{FF2B5EF4-FFF2-40B4-BE49-F238E27FC236}">
-                <a16:creationId xmlns:a16="http://schemas.microsoft.com/office/drawing/2014/main" id="{4C11C284-C99C-1A56-C49A-EC824EE7A4CE}"/>
+                <a16:creationId xmlns:a16="http://schemas.microsoft.com/office/drawing/2014/main" id="{127EACF8-1CCD-AE26-88C9-74894305AE5F}"/>
               </a:ext>
             </a:extLst>
           </p:cNvPr>
@@ -27767,8 +28898,8 @@
         </p:blipFill>
         <p:spPr>
           <a:xfrm>
-            <a:off x="6322511" y="1369961"/>
-            <a:ext cx="5037433" cy="1856614"/>
+            <a:off x="5875601" y="2542051"/>
+            <a:ext cx="5566475" cy="2838902"/>
           </a:xfrm>
           <a:prstGeom prst="rect">
             <a:avLst/>
@@ -27777,7 +28908,7 @@
       </p:pic>
       <p:sp>
         <p:nvSpPr>
-          <p:cNvPr id="16" name="Rectangle 15">
+          <p:cNvPr id="21" name="Rectangle 20">
             <a:extLst>
               <a:ext uri="{FF2B5EF4-FFF2-40B4-BE49-F238E27FC236}">
                 <a16:creationId xmlns:a16="http://schemas.microsoft.com/office/drawing/2014/main" id="{C61F2F60-14E3-4196-B7CE-175E46F04481}"/>
@@ -27841,6 +28972,359 @@
     </p:spTree>
     <p:extLst>
       <p:ext uri="{BB962C8B-B14F-4D97-AF65-F5344CB8AC3E}">
+        <p14:creationId xmlns:p14="http://schemas.microsoft.com/office/powerpoint/2010/main" val="1358620081"/>
+      </p:ext>
+    </p:extLst>
+  </p:cSld>
+  <p:clrMapOvr>
+    <a:masterClrMapping/>
+  </p:clrMapOvr>
+</p:sld>
+</file>
+
+<file path=ppt/slides/slide41.xml><?xml version="1.0" encoding="utf-8"?>
+<p:sld xmlns:a="http://schemas.openxmlformats.org/drawingml/2006/main" xmlns:r="http://schemas.openxmlformats.org/officeDocument/2006/relationships" xmlns:p="http://schemas.openxmlformats.org/presentationml/2006/main">
+  <p:cSld>
+    <p:bg>
+      <p:bgPr>
+        <a:solidFill>
+          <a:schemeClr val="bg1"/>
+        </a:solidFill>
+        <a:effectLst/>
+      </p:bgPr>
+    </p:bg>
+    <p:spTree>
+      <p:nvGrpSpPr>
+        <p:cNvPr id="1" name=""/>
+        <p:cNvGrpSpPr/>
+        <p:nvPr/>
+      </p:nvGrpSpPr>
+      <p:grpSpPr>
+        <a:xfrm>
+          <a:off x="0" y="0"/>
+          <a:ext cx="0" cy="0"/>
+          <a:chOff x="0" y="0"/>
+          <a:chExt cx="0" cy="0"/>
+        </a:xfrm>
+      </p:grpSpPr>
+      <p:sp>
+        <p:nvSpPr>
+          <p:cNvPr id="12" name="Rectangle 11">
+            <a:extLst>
+              <a:ext uri="{FF2B5EF4-FFF2-40B4-BE49-F238E27FC236}">
+                <a16:creationId xmlns:a16="http://schemas.microsoft.com/office/drawing/2014/main" id="{E8A8EAB8-D2FF-444D-B34B-7D32F106AD0E}"/>
+              </a:ext>
+              <a:ext uri="{C183D7F6-B498-43B3-948B-1728B52AA6E4}">
+                <adec:decorative xmlns:adec="http://schemas.microsoft.com/office/drawing/2017/decorative" val="1"/>
+              </a:ext>
+            </a:extLst>
+          </p:cNvPr>
+          <p:cNvSpPr>
+            <a:spLocks noGrp="1" noRot="1" noChangeAspect="1" noMove="1" noResize="1" noEditPoints="1" noAdjustHandles="1" noChangeArrowheads="1" noChangeShapeType="1" noTextEdit="1"/>
+          </p:cNvSpPr>
+          <p:nvPr>
+            <p:extLst>
+              <p:ext uri="{386F3935-93C4-4BCD-93E2-E3B085C9AB24}">
+                <p16:designElem xmlns:p16="http://schemas.microsoft.com/office/powerpoint/2015/main" val="1"/>
+              </p:ext>
+            </p:extLst>
+          </p:nvPr>
+        </p:nvSpPr>
+        <p:spPr>
+          <a:xfrm>
+            <a:off x="0" y="0"/>
+            <a:ext cx="12192000" cy="6858000"/>
+          </a:xfrm>
+          <a:prstGeom prst="rect">
+            <a:avLst/>
+          </a:prstGeom>
+          <a:solidFill>
+            <a:schemeClr val="tx1">
+              <a:lumMod val="95000"/>
+              <a:lumOff val="5000"/>
+            </a:schemeClr>
+          </a:solidFill>
+          <a:ln>
+            <a:noFill/>
+          </a:ln>
+        </p:spPr>
+        <p:style>
+          <a:lnRef idx="2">
+            <a:schemeClr val="accent1">
+              <a:shade val="50000"/>
+            </a:schemeClr>
+          </a:lnRef>
+          <a:fillRef idx="1">
+            <a:schemeClr val="accent1"/>
+          </a:fillRef>
+          <a:effectRef idx="0">
+            <a:schemeClr val="accent1"/>
+          </a:effectRef>
+          <a:fontRef idx="minor">
+            <a:schemeClr val="lt1"/>
+          </a:fontRef>
+        </p:style>
+        <p:txBody>
+          <a:bodyPr rtlCol="0" anchor="ctr"/>
+          <a:lstStyle/>
+          <a:p>
+            <a:pPr algn="ctr"/>
+            <a:endParaRPr lang="en-US" dirty="0">
+              <a:solidFill>
+                <a:schemeClr val="bg1"/>
+              </a:solidFill>
+            </a:endParaRPr>
+          </a:p>
+        </p:txBody>
+      </p:sp>
+      <p:sp>
+        <p:nvSpPr>
+          <p:cNvPr id="3" name="Espaço Reservado para Conteúdo 2">
+            <a:extLst>
+              <a:ext uri="{FF2B5EF4-FFF2-40B4-BE49-F238E27FC236}">
+                <a16:creationId xmlns:a16="http://schemas.microsoft.com/office/drawing/2014/main" id="{A1C74004-C962-CEE0-CA02-D1CE137EC928}"/>
+              </a:ext>
+            </a:extLst>
+          </p:cNvPr>
+          <p:cNvSpPr>
+            <a:spLocks noGrp="1"/>
+          </p:cNvSpPr>
+          <p:nvPr>
+            <p:ph idx="1"/>
+          </p:nvPr>
+        </p:nvSpPr>
+        <p:spPr>
+          <a:xfrm>
+            <a:off x="1020467" y="2891752"/>
+            <a:ext cx="4707671" cy="2334517"/>
+          </a:xfrm>
+        </p:spPr>
+        <p:txBody>
+          <a:bodyPr>
+            <a:normAutofit/>
+          </a:bodyPr>
+          <a:lstStyle/>
+          <a:p>
+            <a:pPr marL="0" indent="0">
+              <a:buNone/>
+            </a:pPr>
+            <a:r>
+              <a:rPr lang="pt-PT" sz="2000" dirty="0">
+                <a:solidFill>
+                  <a:schemeClr val="bg1"/>
+                </a:solidFill>
+              </a:rPr>
+              <a:t>2. 	Verificação (Reconnaissance): 	Confirmação de que o script CGI 	existe e está acessível.</a:t>
+            </a:r>
+          </a:p>
+          <a:p>
+            <a:pPr marL="0" indent="0">
+              <a:buNone/>
+            </a:pPr>
+            <a:endParaRPr lang="pt-PT" sz="2000" dirty="0">
+              <a:solidFill>
+                <a:schemeClr val="bg1"/>
+              </a:solidFill>
+            </a:endParaRPr>
+          </a:p>
+          <a:p>
+            <a:endParaRPr lang="pt-PT" sz="2000" dirty="0">
+              <a:solidFill>
+                <a:schemeClr val="bg1"/>
+              </a:solidFill>
+            </a:endParaRPr>
+          </a:p>
+        </p:txBody>
+      </p:sp>
+      <p:pic>
+        <p:nvPicPr>
+          <p:cNvPr id="5" name="Imagem 4" descr="Tela preta com letras brancas&#10;&#10;O conteúdo gerado por IA pode estar incorreto.">
+            <a:extLst>
+              <a:ext uri="{FF2B5EF4-FFF2-40B4-BE49-F238E27FC236}">
+                <a16:creationId xmlns:a16="http://schemas.microsoft.com/office/drawing/2014/main" id="{EB0B99A1-678A-812B-8B2E-AB0A0C8C7CF3}"/>
+              </a:ext>
+            </a:extLst>
+          </p:cNvPr>
+          <p:cNvPicPr>
+            <a:picLocks noChangeAspect="1"/>
+          </p:cNvPicPr>
+          <p:nvPr/>
+        </p:nvPicPr>
+        <p:blipFill>
+          <a:blip r:embed="rId2"/>
+          <a:stretch>
+            <a:fillRect/>
+          </a:stretch>
+        </p:blipFill>
+        <p:spPr>
+          <a:xfrm>
+            <a:off x="6322512" y="3985387"/>
+            <a:ext cx="5037433" cy="696666"/>
+          </a:xfrm>
+          <a:prstGeom prst="rect">
+            <a:avLst/>
+          </a:prstGeom>
+        </p:spPr>
+      </p:pic>
+      <p:sp>
+        <p:nvSpPr>
+          <p:cNvPr id="14" name="Rectangle 13">
+            <a:extLst>
+              <a:ext uri="{FF2B5EF4-FFF2-40B4-BE49-F238E27FC236}">
+                <a16:creationId xmlns:a16="http://schemas.microsoft.com/office/drawing/2014/main" id="{9DD005C1-8C51-42D6-9BEE-B9B83849743D}"/>
+              </a:ext>
+              <a:ext uri="{C183D7F6-B498-43B3-948B-1728B52AA6E4}">
+                <adec:decorative xmlns:adec="http://schemas.microsoft.com/office/drawing/2017/decorative" val="1"/>
+              </a:ext>
+            </a:extLst>
+          </p:cNvPr>
+          <p:cNvSpPr>
+            <a:spLocks noGrp="1" noRot="1" noChangeAspect="1" noMove="1" noResize="1" noEditPoints="1" noAdjustHandles="1" noChangeArrowheads="1" noChangeShapeType="1" noTextEdit="1"/>
+          </p:cNvSpPr>
+          <p:nvPr>
+            <p:extLst>
+              <p:ext uri="{386F3935-93C4-4BCD-93E2-E3B085C9AB24}">
+                <p16:designElem xmlns:p16="http://schemas.microsoft.com/office/powerpoint/2015/main" val="1"/>
+              </p:ext>
+            </p:extLst>
+          </p:nvPr>
+        </p:nvSpPr>
+        <p:spPr>
+          <a:xfrm>
+            <a:off x="126206" y="115193"/>
+            <a:ext cx="11939588" cy="6627614"/>
+          </a:xfrm>
+          <a:prstGeom prst="rect">
+            <a:avLst/>
+          </a:prstGeom>
+          <a:noFill/>
+          <a:ln w="12700">
+            <a:solidFill>
+              <a:schemeClr val="accent2"/>
+            </a:solidFill>
+          </a:ln>
+        </p:spPr>
+        <p:style>
+          <a:lnRef idx="2">
+            <a:schemeClr val="accent1">
+              <a:shade val="50000"/>
+            </a:schemeClr>
+          </a:lnRef>
+          <a:fillRef idx="1">
+            <a:schemeClr val="accent1"/>
+          </a:fillRef>
+          <a:effectRef idx="0">
+            <a:schemeClr val="accent1"/>
+          </a:effectRef>
+          <a:fontRef idx="minor">
+            <a:schemeClr val="lt1"/>
+          </a:fontRef>
+        </p:style>
+        <p:txBody>
+          <a:bodyPr rtlCol="0" anchor="ctr"/>
+          <a:lstStyle/>
+          <a:p>
+            <a:pPr algn="ctr"/>
+            <a:endParaRPr lang="en-US"/>
+          </a:p>
+        </p:txBody>
+      </p:sp>
+      <p:pic>
+        <p:nvPicPr>
+          <p:cNvPr id="7" name="Imagem 6" descr="Texto&#10;&#10;O conteúdo gerado por IA pode estar incorreto.">
+            <a:extLst>
+              <a:ext uri="{FF2B5EF4-FFF2-40B4-BE49-F238E27FC236}">
+                <a16:creationId xmlns:a16="http://schemas.microsoft.com/office/drawing/2014/main" id="{4C11C284-C99C-1A56-C49A-EC824EE7A4CE}"/>
+              </a:ext>
+            </a:extLst>
+          </p:cNvPr>
+          <p:cNvPicPr>
+            <a:picLocks noChangeAspect="1"/>
+          </p:cNvPicPr>
+          <p:nvPr/>
+        </p:nvPicPr>
+        <p:blipFill>
+          <a:blip r:embed="rId3"/>
+          <a:stretch>
+            <a:fillRect/>
+          </a:stretch>
+        </p:blipFill>
+        <p:spPr>
+          <a:xfrm>
+            <a:off x="6322511" y="1369961"/>
+            <a:ext cx="5037433" cy="1856614"/>
+          </a:xfrm>
+          <a:prstGeom prst="rect">
+            <a:avLst/>
+          </a:prstGeom>
+        </p:spPr>
+      </p:pic>
+      <p:sp>
+        <p:nvSpPr>
+          <p:cNvPr id="16" name="Rectangle 15">
+            <a:extLst>
+              <a:ext uri="{FF2B5EF4-FFF2-40B4-BE49-F238E27FC236}">
+                <a16:creationId xmlns:a16="http://schemas.microsoft.com/office/drawing/2014/main" id="{C61F2F60-14E3-4196-B7CE-175E46F04481}"/>
+              </a:ext>
+              <a:ext uri="{C183D7F6-B498-43B3-948B-1728B52AA6E4}">
+                <adec:decorative xmlns:adec="http://schemas.microsoft.com/office/drawing/2017/decorative" val="1"/>
+              </a:ext>
+            </a:extLst>
+          </p:cNvPr>
+          <p:cNvSpPr>
+            <a:spLocks noGrp="1" noRot="1" noChangeAspect="1" noMove="1" noResize="1" noEditPoints="1" noAdjustHandles="1" noChangeArrowheads="1" noChangeShapeType="1" noTextEdit="1"/>
+          </p:cNvSpPr>
+          <p:nvPr>
+            <p:extLst>
+              <p:ext uri="{386F3935-93C4-4BCD-93E2-E3B085C9AB24}">
+                <p16:designElem xmlns:p16="http://schemas.microsoft.com/office/powerpoint/2015/main" val="1"/>
+              </p:ext>
+            </p:extLst>
+          </p:nvPr>
+        </p:nvSpPr>
+        <p:spPr>
+          <a:xfrm>
+            <a:off x="602461" y="1159669"/>
+            <a:ext cx="10987078" cy="4462463"/>
+          </a:xfrm>
+          <a:prstGeom prst="rect">
+            <a:avLst/>
+          </a:prstGeom>
+          <a:noFill/>
+          <a:ln w="12700">
+            <a:solidFill>
+              <a:schemeClr val="accent2"/>
+            </a:solidFill>
+          </a:ln>
+        </p:spPr>
+        <p:style>
+          <a:lnRef idx="2">
+            <a:schemeClr val="accent1">
+              <a:shade val="50000"/>
+            </a:schemeClr>
+          </a:lnRef>
+          <a:fillRef idx="1">
+            <a:schemeClr val="accent1"/>
+          </a:fillRef>
+          <a:effectRef idx="0">
+            <a:schemeClr val="accent1"/>
+          </a:effectRef>
+          <a:fontRef idx="minor">
+            <a:schemeClr val="lt1"/>
+          </a:fontRef>
+        </p:style>
+        <p:txBody>
+          <a:bodyPr rtlCol="0" anchor="ctr"/>
+          <a:lstStyle/>
+          <a:p>
+            <a:pPr algn="ctr"/>
+            <a:endParaRPr lang="en-US"/>
+          </a:p>
+        </p:txBody>
+      </p:sp>
+    </p:spTree>
+    <p:extLst>
+      <p:ext uri="{BB962C8B-B14F-4D97-AF65-F5344CB8AC3E}">
         <p14:creationId xmlns:p14="http://schemas.microsoft.com/office/powerpoint/2010/main" val="1231668576"/>
       </p:ext>
     </p:extLst>
@@ -27851,7 +29335,7 @@
 </p:sld>
 </file>
 
-<file path=ppt/slides/slide41.xml><?xml version="1.0" encoding="utf-8"?>
+<file path=ppt/slides/slide42.xml><?xml version="1.0" encoding="utf-8"?>
 <p:sld xmlns:a="http://schemas.openxmlformats.org/drawingml/2006/main" xmlns:r="http://schemas.openxmlformats.org/officeDocument/2006/relationships" xmlns:p="http://schemas.openxmlformats.org/presentationml/2006/main">
   <p:cSld>
     <p:bg>
@@ -30532,7 +32016,7 @@
 </p:sld>
 </file>
 
-<file path=ppt/slides/slide42.xml><?xml version="1.0" encoding="utf-8"?>
+<file path=ppt/slides/slide43.xml><?xml version="1.0" encoding="utf-8"?>
 <p:sld xmlns:a="http://schemas.openxmlformats.org/drawingml/2006/main" xmlns:r="http://schemas.openxmlformats.org/officeDocument/2006/relationships" xmlns:p="http://schemas.openxmlformats.org/presentationml/2006/main">
   <p:cSld>
     <p:bg>
@@ -31025,7 +32509,7 @@
 </p:sld>
 </file>
 
-<file path=ppt/slides/slide43.xml><?xml version="1.0" encoding="utf-8"?>
+<file path=ppt/slides/slide44.xml><?xml version="1.0" encoding="utf-8"?>
 <p:sld xmlns:a="http://schemas.openxmlformats.org/drawingml/2006/main" xmlns:r="http://schemas.openxmlformats.org/officeDocument/2006/relationships" xmlns:p="http://schemas.openxmlformats.org/presentationml/2006/main">
   <p:cSld>
     <p:bg>
@@ -31379,7 +32863,7 @@
 </p:sld>
 </file>
 
-<file path=ppt/slides/slide44.xml><?xml version="1.0" encoding="utf-8"?>
+<file path=ppt/slides/slide45.xml><?xml version="1.0" encoding="utf-8"?>
 <p:sld xmlns:a="http://schemas.openxmlformats.org/drawingml/2006/main" xmlns:r="http://schemas.openxmlformats.org/officeDocument/2006/relationships" xmlns:p="http://schemas.openxmlformats.org/presentationml/2006/main">
   <p:cSld>
     <p:bg>
@@ -31867,7 +33351,7 @@
 </p:sld>
 </file>
 
-<file path=ppt/slides/slide45.xml><?xml version="1.0" encoding="utf-8"?>
+<file path=ppt/slides/slide46.xml><?xml version="1.0" encoding="utf-8"?>
 <p:sld xmlns:a="http://schemas.openxmlformats.org/drawingml/2006/main" xmlns:r="http://schemas.openxmlformats.org/officeDocument/2006/relationships" xmlns:p="http://schemas.openxmlformats.org/presentationml/2006/main">
   <p:cSld>
     <p:bg>
@@ -32549,93 +34033,93 @@
           <a:custGeom>
             <a:avLst/>
             <a:gdLst>
-              <a:gd name="connsiteX0" fmla="*/ 0 w 4243589"/>
-              <a:gd name="connsiteY0" fmla="*/ 0 h 18288"/>
-              <a:gd name="connsiteX1" fmla="*/ 478919 w 4243589"/>
-              <a:gd name="connsiteY1" fmla="*/ 0 h 18288"/>
-              <a:gd name="connsiteX2" fmla="*/ 957839 w 4243589"/>
-              <a:gd name="connsiteY2" fmla="*/ 0 h 18288"/>
-              <a:gd name="connsiteX3" fmla="*/ 1521630 w 4243589"/>
-              <a:gd name="connsiteY3" fmla="*/ 0 h 18288"/>
-              <a:gd name="connsiteX4" fmla="*/ 2212729 w 4243589"/>
-              <a:gd name="connsiteY4" fmla="*/ 0 h 18288"/>
-              <a:gd name="connsiteX5" fmla="*/ 2734084 w 4243589"/>
-              <a:gd name="connsiteY5" fmla="*/ 0 h 18288"/>
-              <a:gd name="connsiteX6" fmla="*/ 3255439 w 4243589"/>
-              <a:gd name="connsiteY6" fmla="*/ 0 h 18288"/>
-              <a:gd name="connsiteX7" fmla="*/ 4243589 w 4243589"/>
-              <a:gd name="connsiteY7" fmla="*/ 0 h 18288"/>
-              <a:gd name="connsiteX8" fmla="*/ 4243589 w 4243589"/>
-              <a:gd name="connsiteY8" fmla="*/ 18288 h 18288"/>
-              <a:gd name="connsiteX9" fmla="*/ 3594926 w 4243589"/>
-              <a:gd name="connsiteY9" fmla="*/ 18288 h 18288"/>
-              <a:gd name="connsiteX10" fmla="*/ 3073571 w 4243589"/>
-              <a:gd name="connsiteY10" fmla="*/ 18288 h 18288"/>
-              <a:gd name="connsiteX11" fmla="*/ 2552216 w 4243589"/>
-              <a:gd name="connsiteY11" fmla="*/ 18288 h 18288"/>
-              <a:gd name="connsiteX12" fmla="*/ 1903553 w 4243589"/>
-              <a:gd name="connsiteY12" fmla="*/ 18288 h 18288"/>
-              <a:gd name="connsiteX13" fmla="*/ 1212454 w 4243589"/>
-              <a:gd name="connsiteY13" fmla="*/ 18288 h 18288"/>
-              <a:gd name="connsiteX14" fmla="*/ 733535 w 4243589"/>
-              <a:gd name="connsiteY14" fmla="*/ 18288 h 18288"/>
-              <a:gd name="connsiteX15" fmla="*/ 0 w 4243589"/>
-              <a:gd name="connsiteY15" fmla="*/ 18288 h 18288"/>
-              <a:gd name="connsiteX16" fmla="*/ 0 w 4243589"/>
-              <a:gd name="connsiteY16" fmla="*/ 0 h 18288"/>
+              <a:gd name="csX0" fmla="*/ 0 w 4243589"/>
+              <a:gd name="csY0" fmla="*/ 0 h 18288"/>
+              <a:gd name="csX1" fmla="*/ 478919 w 4243589"/>
+              <a:gd name="csY1" fmla="*/ 0 h 18288"/>
+              <a:gd name="csX2" fmla="*/ 957839 w 4243589"/>
+              <a:gd name="csY2" fmla="*/ 0 h 18288"/>
+              <a:gd name="csX3" fmla="*/ 1521630 w 4243589"/>
+              <a:gd name="csY3" fmla="*/ 0 h 18288"/>
+              <a:gd name="csX4" fmla="*/ 2212729 w 4243589"/>
+              <a:gd name="csY4" fmla="*/ 0 h 18288"/>
+              <a:gd name="csX5" fmla="*/ 2734084 w 4243589"/>
+              <a:gd name="csY5" fmla="*/ 0 h 18288"/>
+              <a:gd name="csX6" fmla="*/ 3255439 w 4243589"/>
+              <a:gd name="csY6" fmla="*/ 0 h 18288"/>
+              <a:gd name="csX7" fmla="*/ 4243589 w 4243589"/>
+              <a:gd name="csY7" fmla="*/ 0 h 18288"/>
+              <a:gd name="csX8" fmla="*/ 4243589 w 4243589"/>
+              <a:gd name="csY8" fmla="*/ 18288 h 18288"/>
+              <a:gd name="csX9" fmla="*/ 3594926 w 4243589"/>
+              <a:gd name="csY9" fmla="*/ 18288 h 18288"/>
+              <a:gd name="csX10" fmla="*/ 3073571 w 4243589"/>
+              <a:gd name="csY10" fmla="*/ 18288 h 18288"/>
+              <a:gd name="csX11" fmla="*/ 2552216 w 4243589"/>
+              <a:gd name="csY11" fmla="*/ 18288 h 18288"/>
+              <a:gd name="csX12" fmla="*/ 1903553 w 4243589"/>
+              <a:gd name="csY12" fmla="*/ 18288 h 18288"/>
+              <a:gd name="csX13" fmla="*/ 1212454 w 4243589"/>
+              <a:gd name="csY13" fmla="*/ 18288 h 18288"/>
+              <a:gd name="csX14" fmla="*/ 733535 w 4243589"/>
+              <a:gd name="csY14" fmla="*/ 18288 h 18288"/>
+              <a:gd name="csX15" fmla="*/ 0 w 4243589"/>
+              <a:gd name="csY15" fmla="*/ 18288 h 18288"/>
+              <a:gd name="csX16" fmla="*/ 0 w 4243589"/>
+              <a:gd name="csY16" fmla="*/ 0 h 18288"/>
             </a:gdLst>
             <a:ahLst/>
             <a:cxnLst>
               <a:cxn ang="0">
-                <a:pos x="connsiteX0" y="connsiteY0"/>
+                <a:pos x="csX0" y="csY0"/>
               </a:cxn>
               <a:cxn ang="0">
-                <a:pos x="connsiteX1" y="connsiteY1"/>
+                <a:pos x="csX1" y="csY1"/>
               </a:cxn>
               <a:cxn ang="0">
-                <a:pos x="connsiteX2" y="connsiteY2"/>
+                <a:pos x="csX2" y="csY2"/>
               </a:cxn>
               <a:cxn ang="0">
-                <a:pos x="connsiteX3" y="connsiteY3"/>
+                <a:pos x="csX3" y="csY3"/>
               </a:cxn>
               <a:cxn ang="0">
-                <a:pos x="connsiteX4" y="connsiteY4"/>
+                <a:pos x="csX4" y="csY4"/>
               </a:cxn>
               <a:cxn ang="0">
-                <a:pos x="connsiteX5" y="connsiteY5"/>
+                <a:pos x="csX5" y="csY5"/>
               </a:cxn>
               <a:cxn ang="0">
-                <a:pos x="connsiteX6" y="connsiteY6"/>
+                <a:pos x="csX6" y="csY6"/>
               </a:cxn>
               <a:cxn ang="0">
-                <a:pos x="connsiteX7" y="connsiteY7"/>
+                <a:pos x="csX7" y="csY7"/>
               </a:cxn>
               <a:cxn ang="0">
-                <a:pos x="connsiteX8" y="connsiteY8"/>
+                <a:pos x="csX8" y="csY8"/>
               </a:cxn>
               <a:cxn ang="0">
-                <a:pos x="connsiteX9" y="connsiteY9"/>
+                <a:pos x="csX9" y="csY9"/>
               </a:cxn>
               <a:cxn ang="0">
-                <a:pos x="connsiteX10" y="connsiteY10"/>
+                <a:pos x="csX10" y="csY10"/>
               </a:cxn>
               <a:cxn ang="0">
-                <a:pos x="connsiteX11" y="connsiteY11"/>
+                <a:pos x="csX11" y="csY11"/>
               </a:cxn>
               <a:cxn ang="0">
-                <a:pos x="connsiteX12" y="connsiteY12"/>
+                <a:pos x="csX12" y="csY12"/>
               </a:cxn>
               <a:cxn ang="0">
-                <a:pos x="connsiteX13" y="connsiteY13"/>
+                <a:pos x="csX13" y="csY13"/>
               </a:cxn>
               <a:cxn ang="0">
-                <a:pos x="connsiteX14" y="connsiteY14"/>
+                <a:pos x="csX14" y="csY14"/>
               </a:cxn>
               <a:cxn ang="0">
-                <a:pos x="connsiteX15" y="connsiteY15"/>
+                <a:pos x="csX15" y="csY15"/>
               </a:cxn>
               <a:cxn ang="0">
-                <a:pos x="connsiteX16" y="connsiteY16"/>
+                <a:pos x="csX16" y="csY16"/>
               </a:cxn>
             </a:cxnLst>
             <a:rect l="l" t="t" r="r" b="b"/>
@@ -34319,68 +35803,68 @@
           <a:custGeom>
             <a:avLst/>
             <a:gdLst>
-              <a:gd name="connsiteX0" fmla="*/ 0 w 3255095"/>
-              <a:gd name="connsiteY0" fmla="*/ 0 h 18288"/>
-              <a:gd name="connsiteX1" fmla="*/ 618468 w 3255095"/>
-              <a:gd name="connsiteY1" fmla="*/ 0 h 18288"/>
-              <a:gd name="connsiteX2" fmla="*/ 1269487 w 3255095"/>
-              <a:gd name="connsiteY2" fmla="*/ 0 h 18288"/>
-              <a:gd name="connsiteX3" fmla="*/ 1953057 w 3255095"/>
-              <a:gd name="connsiteY3" fmla="*/ 0 h 18288"/>
-              <a:gd name="connsiteX4" fmla="*/ 2636627 w 3255095"/>
-              <a:gd name="connsiteY4" fmla="*/ 0 h 18288"/>
-              <a:gd name="connsiteX5" fmla="*/ 3255095 w 3255095"/>
-              <a:gd name="connsiteY5" fmla="*/ 0 h 18288"/>
-              <a:gd name="connsiteX6" fmla="*/ 3255095 w 3255095"/>
-              <a:gd name="connsiteY6" fmla="*/ 18288 h 18288"/>
-              <a:gd name="connsiteX7" fmla="*/ 2538974 w 3255095"/>
-              <a:gd name="connsiteY7" fmla="*/ 18288 h 18288"/>
-              <a:gd name="connsiteX8" fmla="*/ 1822853 w 3255095"/>
-              <a:gd name="connsiteY8" fmla="*/ 18288 h 18288"/>
-              <a:gd name="connsiteX9" fmla="*/ 1171834 w 3255095"/>
-              <a:gd name="connsiteY9" fmla="*/ 18288 h 18288"/>
-              <a:gd name="connsiteX10" fmla="*/ 0 w 3255095"/>
-              <a:gd name="connsiteY10" fmla="*/ 18288 h 18288"/>
-              <a:gd name="connsiteX11" fmla="*/ 0 w 3255095"/>
-              <a:gd name="connsiteY11" fmla="*/ 0 h 18288"/>
+              <a:gd name="csX0" fmla="*/ 0 w 3255095"/>
+              <a:gd name="csY0" fmla="*/ 0 h 18288"/>
+              <a:gd name="csX1" fmla="*/ 618468 w 3255095"/>
+              <a:gd name="csY1" fmla="*/ 0 h 18288"/>
+              <a:gd name="csX2" fmla="*/ 1269487 w 3255095"/>
+              <a:gd name="csY2" fmla="*/ 0 h 18288"/>
+              <a:gd name="csX3" fmla="*/ 1953057 w 3255095"/>
+              <a:gd name="csY3" fmla="*/ 0 h 18288"/>
+              <a:gd name="csX4" fmla="*/ 2636627 w 3255095"/>
+              <a:gd name="csY4" fmla="*/ 0 h 18288"/>
+              <a:gd name="csX5" fmla="*/ 3255095 w 3255095"/>
+              <a:gd name="csY5" fmla="*/ 0 h 18288"/>
+              <a:gd name="csX6" fmla="*/ 3255095 w 3255095"/>
+              <a:gd name="csY6" fmla="*/ 18288 h 18288"/>
+              <a:gd name="csX7" fmla="*/ 2538974 w 3255095"/>
+              <a:gd name="csY7" fmla="*/ 18288 h 18288"/>
+              <a:gd name="csX8" fmla="*/ 1822853 w 3255095"/>
+              <a:gd name="csY8" fmla="*/ 18288 h 18288"/>
+              <a:gd name="csX9" fmla="*/ 1171834 w 3255095"/>
+              <a:gd name="csY9" fmla="*/ 18288 h 18288"/>
+              <a:gd name="csX10" fmla="*/ 0 w 3255095"/>
+              <a:gd name="csY10" fmla="*/ 18288 h 18288"/>
+              <a:gd name="csX11" fmla="*/ 0 w 3255095"/>
+              <a:gd name="csY11" fmla="*/ 0 h 18288"/>
             </a:gdLst>
             <a:ahLst/>
             <a:cxnLst>
               <a:cxn ang="0">
-                <a:pos x="connsiteX0" y="connsiteY0"/>
+                <a:pos x="csX0" y="csY0"/>
               </a:cxn>
               <a:cxn ang="0">
-                <a:pos x="connsiteX1" y="connsiteY1"/>
+                <a:pos x="csX1" y="csY1"/>
               </a:cxn>
               <a:cxn ang="0">
-                <a:pos x="connsiteX2" y="connsiteY2"/>
+                <a:pos x="csX2" y="csY2"/>
               </a:cxn>
               <a:cxn ang="0">
-                <a:pos x="connsiteX3" y="connsiteY3"/>
+                <a:pos x="csX3" y="csY3"/>
               </a:cxn>
               <a:cxn ang="0">
-                <a:pos x="connsiteX4" y="connsiteY4"/>
+                <a:pos x="csX4" y="csY4"/>
               </a:cxn>
               <a:cxn ang="0">
-                <a:pos x="connsiteX5" y="connsiteY5"/>
+                <a:pos x="csX5" y="csY5"/>
               </a:cxn>
               <a:cxn ang="0">
-                <a:pos x="connsiteX6" y="connsiteY6"/>
+                <a:pos x="csX6" y="csY6"/>
               </a:cxn>
               <a:cxn ang="0">
-                <a:pos x="connsiteX7" y="connsiteY7"/>
+                <a:pos x="csX7" y="csY7"/>
               </a:cxn>
               <a:cxn ang="0">
-                <a:pos x="connsiteX8" y="connsiteY8"/>
+                <a:pos x="csX8" y="csY8"/>
               </a:cxn>
               <a:cxn ang="0">
-                <a:pos x="connsiteX9" y="connsiteY9"/>
+                <a:pos x="csX9" y="csY9"/>
               </a:cxn>
               <a:cxn ang="0">
-                <a:pos x="connsiteX10" y="connsiteY10"/>
+                <a:pos x="csX10" y="csY10"/>
               </a:cxn>
               <a:cxn ang="0">
-                <a:pos x="connsiteX11" y="connsiteY11"/>
+                <a:pos x="csX11" y="csY11"/>
               </a:cxn>
             </a:cxnLst>
             <a:rect l="l" t="t" r="r" b="b"/>
